--- a/docs/Research_Project_Plan_Gantt.pptx
+++ b/docs/Research_Project_Plan_Gantt.pptx
@@ -6428,7 +6428,7 @@
                 <a:ea typeface="Arial"/>
                 <a:cs typeface="Arial"/>
               </a:rPr>
-              <a:t>Biological Foundation Models | Research Project Plan</a:t>
+              <a:t>Multimodal Biology | Research Project Plan</a:t>
             </a:r>
           </a:p>
         </p:txBody>
@@ -6519,6 +6519,10 @@
             <a:noFill/>
           </a:ln>
         </p:spPr>
+        <p:txBody xmlns:a="http://schemas.openxmlformats.org/drawingml/2006/main">
+          <a:bodyPr/>
+          <a:p/>
+        </p:txBody>
       </p:sp>
       <p:sp>
         <p:nvSpPr>
@@ -7803,6 +7807,10 @@
             <a:noFill/>
           </a:ln>
         </p:spPr>
+        <p:txBody xmlns:a="http://schemas.openxmlformats.org/drawingml/2006/main">
+          <a:bodyPr/>
+          <a:p/>
+        </p:txBody>
       </p:sp>
       <p:sp>
         <p:nvSpPr>
@@ -8004,6 +8012,10 @@
             </a:solidFill>
           </a:ln>
         </p:spPr>
+        <p:txBody xmlns:a="http://schemas.openxmlformats.org/drawingml/2006/main">
+          <a:bodyPr/>
+          <a:p/>
+        </p:txBody>
       </p:sp>
       <p:sp>
         <p:nvSpPr>
@@ -8034,6 +8046,10 @@
             </a:solidFill>
           </a:ln>
         </p:spPr>
+        <p:txBody xmlns:a="http://schemas.openxmlformats.org/drawingml/2006/main">
+          <a:bodyPr/>
+          <a:p/>
+        </p:txBody>
       </p:sp>
       <p:sp>
         <p:nvSpPr>
@@ -8064,6 +8080,10 @@
             </a:solidFill>
           </a:ln>
         </p:spPr>
+        <p:txBody xmlns:a="http://schemas.openxmlformats.org/drawingml/2006/main">
+          <a:bodyPr/>
+          <a:p/>
+        </p:txBody>
       </p:sp>
       <p:sp>
         <p:nvSpPr>
@@ -8094,6 +8114,10 @@
             </a:solidFill>
           </a:ln>
         </p:spPr>
+        <p:txBody xmlns:a="http://schemas.openxmlformats.org/drawingml/2006/main">
+          <a:bodyPr/>
+          <a:p/>
+        </p:txBody>
       </p:sp>
       <p:sp>
         <p:nvSpPr>
@@ -8124,6 +8148,10 @@
             </a:solidFill>
           </a:ln>
         </p:spPr>
+        <p:txBody xmlns:a="http://schemas.openxmlformats.org/drawingml/2006/main">
+          <a:bodyPr/>
+          <a:p/>
+        </p:txBody>
       </p:sp>
       <p:sp>
         <p:nvSpPr>
@@ -8154,6 +8182,10 @@
             </a:solidFill>
           </a:ln>
         </p:spPr>
+        <p:txBody xmlns:a="http://schemas.openxmlformats.org/drawingml/2006/main">
+          <a:bodyPr/>
+          <a:p/>
+        </p:txBody>
       </p:sp>
       <p:sp>
         <p:nvSpPr>
@@ -8184,6 +8216,10 @@
             </a:solidFill>
           </a:ln>
         </p:spPr>
+        <p:txBody xmlns:a="http://schemas.openxmlformats.org/drawingml/2006/main">
+          <a:bodyPr/>
+          <a:p/>
+        </p:txBody>
       </p:sp>
       <p:sp>
         <p:nvSpPr>
@@ -8214,6 +8250,10 @@
             </a:solidFill>
           </a:ln>
         </p:spPr>
+        <p:txBody xmlns:a="http://schemas.openxmlformats.org/drawingml/2006/main">
+          <a:bodyPr/>
+          <a:p/>
+        </p:txBody>
       </p:sp>
       <p:sp>
         <p:nvSpPr>
@@ -8244,6 +8284,10 @@
             </a:solidFill>
           </a:ln>
         </p:spPr>
+        <p:txBody xmlns:a="http://schemas.openxmlformats.org/drawingml/2006/main">
+          <a:bodyPr/>
+          <a:p/>
+        </p:txBody>
       </p:sp>
       <p:sp>
         <p:nvSpPr>
@@ -8274,6 +8318,10 @@
             </a:solidFill>
           </a:ln>
         </p:spPr>
+        <p:txBody xmlns:a="http://schemas.openxmlformats.org/drawingml/2006/main">
+          <a:bodyPr/>
+          <a:p/>
+        </p:txBody>
       </p:sp>
       <p:sp>
         <p:nvSpPr>
@@ -8304,6 +8352,10 @@
             </a:solidFill>
           </a:ln>
         </p:spPr>
+        <p:txBody xmlns:a="http://schemas.openxmlformats.org/drawingml/2006/main">
+          <a:bodyPr/>
+          <a:p/>
+        </p:txBody>
       </p:sp>
       <p:sp>
         <p:nvSpPr>
@@ -8334,6 +8386,10 @@
             </a:solidFill>
           </a:ln>
         </p:spPr>
+        <p:txBody xmlns:a="http://schemas.openxmlformats.org/drawingml/2006/main">
+          <a:bodyPr/>
+          <a:p/>
+        </p:txBody>
       </p:sp>
       <p:sp>
         <p:nvSpPr>
@@ -8364,6 +8420,10 @@
             </a:solidFill>
           </a:ln>
         </p:spPr>
+        <p:txBody xmlns:a="http://schemas.openxmlformats.org/drawingml/2006/main">
+          <a:bodyPr/>
+          <a:p/>
+        </p:txBody>
       </p:sp>
       <p:sp>
         <p:nvSpPr>
@@ -8394,6 +8454,10 @@
             </a:solidFill>
           </a:ln>
         </p:spPr>
+        <p:txBody xmlns:a="http://schemas.openxmlformats.org/drawingml/2006/main">
+          <a:bodyPr/>
+          <a:p/>
+        </p:txBody>
       </p:sp>
       <p:sp>
         <p:nvSpPr>
@@ -8424,6 +8488,10 @@
             </a:solidFill>
           </a:ln>
         </p:spPr>
+        <p:txBody xmlns:a="http://schemas.openxmlformats.org/drawingml/2006/main">
+          <a:bodyPr/>
+          <a:p/>
+        </p:txBody>
       </p:sp>
       <p:sp>
         <p:nvSpPr>
@@ -8454,6 +8522,10 @@
             </a:solidFill>
           </a:ln>
         </p:spPr>
+        <p:txBody xmlns:a="http://schemas.openxmlformats.org/drawingml/2006/main">
+          <a:bodyPr/>
+          <a:p/>
+        </p:txBody>
       </p:sp>
       <p:sp>
         <p:nvSpPr>
@@ -8484,6 +8556,10 @@
             </a:solidFill>
           </a:ln>
         </p:spPr>
+        <p:txBody xmlns:a="http://schemas.openxmlformats.org/drawingml/2006/main">
+          <a:bodyPr/>
+          <a:p/>
+        </p:txBody>
       </p:sp>
       <p:sp>
         <p:nvSpPr>
@@ -8514,6 +8590,10 @@
             </a:solidFill>
           </a:ln>
         </p:spPr>
+        <p:txBody xmlns:a="http://schemas.openxmlformats.org/drawingml/2006/main">
+          <a:bodyPr/>
+          <a:p/>
+        </p:txBody>
       </p:sp>
       <p:sp>
         <p:nvSpPr>
@@ -8544,6 +8624,10 @@
             </a:solidFill>
           </a:ln>
         </p:spPr>
+        <p:txBody xmlns:a="http://schemas.openxmlformats.org/drawingml/2006/main">
+          <a:bodyPr/>
+          <a:p/>
+        </p:txBody>
       </p:sp>
       <p:sp>
         <p:nvSpPr>
@@ -8574,6 +8658,10 @@
             </a:solidFill>
           </a:ln>
         </p:spPr>
+        <p:txBody xmlns:a="http://schemas.openxmlformats.org/drawingml/2006/main">
+          <a:bodyPr/>
+          <a:p/>
+        </p:txBody>
       </p:sp>
       <p:sp>
         <p:nvSpPr>
@@ -8604,6 +8692,10 @@
             <a:noFill/>
           </a:ln>
         </p:spPr>
+        <p:txBody xmlns:a="http://schemas.openxmlformats.org/drawingml/2006/main">
+          <a:bodyPr/>
+          <a:p/>
+        </p:txBody>
       </p:sp>
       <p:sp>
         <p:nvSpPr>
@@ -8634,6 +8726,10 @@
             <a:noFill/>
           </a:ln>
         </p:spPr>
+        <p:txBody xmlns:a="http://schemas.openxmlformats.org/drawingml/2006/main">
+          <a:bodyPr/>
+          <a:p/>
+        </p:txBody>
       </p:sp>
       <p:sp>
         <p:nvSpPr>
@@ -8664,6 +8760,10 @@
             <a:noFill/>
           </a:ln>
         </p:spPr>
+        <p:txBody xmlns:a="http://schemas.openxmlformats.org/drawingml/2006/main">
+          <a:bodyPr/>
+          <a:p/>
+        </p:txBody>
       </p:sp>
       <p:sp>
         <p:nvSpPr>
@@ -8694,6 +8794,10 @@
             </a:solidFill>
           </a:ln>
         </p:spPr>
+        <p:txBody xmlns:a="http://schemas.openxmlformats.org/drawingml/2006/main">
+          <a:bodyPr/>
+          <a:p/>
+        </p:txBody>
       </p:sp>
       <p:sp>
         <p:nvSpPr>
@@ -8724,6 +8828,10 @@
             <a:noFill/>
           </a:ln>
         </p:spPr>
+        <p:txBody xmlns:a="http://schemas.openxmlformats.org/drawingml/2006/main">
+          <a:bodyPr/>
+          <a:p/>
+        </p:txBody>
       </p:sp>
       <p:sp>
         <p:nvSpPr>
@@ -8868,6 +8976,10 @@
             </a:solidFill>
           </a:ln>
         </p:spPr>
+        <p:txBody xmlns:a="http://schemas.openxmlformats.org/drawingml/2006/main">
+          <a:bodyPr/>
+          <a:p/>
+        </p:txBody>
       </p:sp>
       <p:sp>
         <p:nvSpPr>
@@ -8898,6 +9010,10 @@
             </a:solidFill>
           </a:ln>
         </p:spPr>
+        <p:txBody xmlns:a="http://schemas.openxmlformats.org/drawingml/2006/main">
+          <a:bodyPr/>
+          <a:p/>
+        </p:txBody>
       </p:sp>
       <p:sp>
         <p:nvSpPr>
@@ -8928,6 +9044,10 @@
             </a:solidFill>
           </a:ln>
         </p:spPr>
+        <p:txBody xmlns:a="http://schemas.openxmlformats.org/drawingml/2006/main">
+          <a:bodyPr/>
+          <a:p/>
+        </p:txBody>
       </p:sp>
       <p:sp>
         <p:nvSpPr>
@@ -8958,6 +9078,10 @@
             </a:solidFill>
           </a:ln>
         </p:spPr>
+        <p:txBody xmlns:a="http://schemas.openxmlformats.org/drawingml/2006/main">
+          <a:bodyPr/>
+          <a:p/>
+        </p:txBody>
       </p:sp>
       <p:sp>
         <p:nvSpPr>
@@ -8988,6 +9112,10 @@
             </a:solidFill>
           </a:ln>
         </p:spPr>
+        <p:txBody xmlns:a="http://schemas.openxmlformats.org/drawingml/2006/main">
+          <a:bodyPr/>
+          <a:p/>
+        </p:txBody>
       </p:sp>
       <p:sp>
         <p:nvSpPr>
@@ -9018,6 +9146,10 @@
             </a:solidFill>
           </a:ln>
         </p:spPr>
+        <p:txBody xmlns:a="http://schemas.openxmlformats.org/drawingml/2006/main">
+          <a:bodyPr/>
+          <a:p/>
+        </p:txBody>
       </p:sp>
       <p:sp>
         <p:nvSpPr>
@@ -9048,6 +9180,10 @@
             </a:solidFill>
           </a:ln>
         </p:spPr>
+        <p:txBody xmlns:a="http://schemas.openxmlformats.org/drawingml/2006/main">
+          <a:bodyPr/>
+          <a:p/>
+        </p:txBody>
       </p:sp>
       <p:sp>
         <p:nvSpPr>
@@ -9078,6 +9214,10 @@
             </a:solidFill>
           </a:ln>
         </p:spPr>
+        <p:txBody xmlns:a="http://schemas.openxmlformats.org/drawingml/2006/main">
+          <a:bodyPr/>
+          <a:p/>
+        </p:txBody>
       </p:sp>
       <p:sp>
         <p:nvSpPr>
@@ -9108,6 +9248,10 @@
             </a:solidFill>
           </a:ln>
         </p:spPr>
+        <p:txBody xmlns:a="http://schemas.openxmlformats.org/drawingml/2006/main">
+          <a:bodyPr/>
+          <a:p/>
+        </p:txBody>
       </p:sp>
       <p:sp>
         <p:nvSpPr>
@@ -9138,6 +9282,10 @@
             </a:solidFill>
           </a:ln>
         </p:spPr>
+        <p:txBody xmlns:a="http://schemas.openxmlformats.org/drawingml/2006/main">
+          <a:bodyPr/>
+          <a:p/>
+        </p:txBody>
       </p:sp>
       <p:sp>
         <p:nvSpPr>
@@ -9168,6 +9316,10 @@
             </a:solidFill>
           </a:ln>
         </p:spPr>
+        <p:txBody xmlns:a="http://schemas.openxmlformats.org/drawingml/2006/main">
+          <a:bodyPr/>
+          <a:p/>
+        </p:txBody>
       </p:sp>
       <p:sp>
         <p:nvSpPr>
@@ -9198,6 +9350,10 @@
             </a:solidFill>
           </a:ln>
         </p:spPr>
+        <p:txBody xmlns:a="http://schemas.openxmlformats.org/drawingml/2006/main">
+          <a:bodyPr/>
+          <a:p/>
+        </p:txBody>
       </p:sp>
       <p:sp>
         <p:nvSpPr>
@@ -9228,6 +9384,10 @@
             </a:solidFill>
           </a:ln>
         </p:spPr>
+        <p:txBody xmlns:a="http://schemas.openxmlformats.org/drawingml/2006/main">
+          <a:bodyPr/>
+          <a:p/>
+        </p:txBody>
       </p:sp>
       <p:sp>
         <p:nvSpPr>
@@ -9258,6 +9418,10 @@
             </a:solidFill>
           </a:ln>
         </p:spPr>
+        <p:txBody xmlns:a="http://schemas.openxmlformats.org/drawingml/2006/main">
+          <a:bodyPr/>
+          <a:p/>
+        </p:txBody>
       </p:sp>
       <p:sp>
         <p:nvSpPr>
@@ -9288,6 +9452,10 @@
             </a:solidFill>
           </a:ln>
         </p:spPr>
+        <p:txBody xmlns:a="http://schemas.openxmlformats.org/drawingml/2006/main">
+          <a:bodyPr/>
+          <a:p/>
+        </p:txBody>
       </p:sp>
       <p:sp>
         <p:nvSpPr>
@@ -9318,6 +9486,10 @@
             </a:solidFill>
           </a:ln>
         </p:spPr>
+        <p:txBody xmlns:a="http://schemas.openxmlformats.org/drawingml/2006/main">
+          <a:bodyPr/>
+          <a:p/>
+        </p:txBody>
       </p:sp>
       <p:sp>
         <p:nvSpPr>
@@ -9348,6 +9520,10 @@
             </a:solidFill>
           </a:ln>
         </p:spPr>
+        <p:txBody xmlns:a="http://schemas.openxmlformats.org/drawingml/2006/main">
+          <a:bodyPr/>
+          <a:p/>
+        </p:txBody>
       </p:sp>
       <p:sp>
         <p:nvSpPr>
@@ -9378,6 +9554,10 @@
             </a:solidFill>
           </a:ln>
         </p:spPr>
+        <p:txBody xmlns:a="http://schemas.openxmlformats.org/drawingml/2006/main">
+          <a:bodyPr/>
+          <a:p/>
+        </p:txBody>
       </p:sp>
       <p:sp>
         <p:nvSpPr>
@@ -9408,6 +9588,10 @@
             </a:solidFill>
           </a:ln>
         </p:spPr>
+        <p:txBody xmlns:a="http://schemas.openxmlformats.org/drawingml/2006/main">
+          <a:bodyPr/>
+          <a:p/>
+        </p:txBody>
       </p:sp>
       <p:sp>
         <p:nvSpPr>
@@ -9438,6 +9622,10 @@
             </a:solidFill>
           </a:ln>
         </p:spPr>
+        <p:txBody xmlns:a="http://schemas.openxmlformats.org/drawingml/2006/main">
+          <a:bodyPr/>
+          <a:p/>
+        </p:txBody>
       </p:sp>
       <p:sp>
         <p:nvSpPr>
@@ -9468,6 +9656,10 @@
             <a:noFill/>
           </a:ln>
         </p:spPr>
+        <p:txBody xmlns:a="http://schemas.openxmlformats.org/drawingml/2006/main">
+          <a:bodyPr/>
+          <a:p/>
+        </p:txBody>
       </p:sp>
       <p:sp>
         <p:nvSpPr>
@@ -9498,6 +9690,10 @@
             <a:noFill/>
           </a:ln>
         </p:spPr>
+        <p:txBody xmlns:a="http://schemas.openxmlformats.org/drawingml/2006/main">
+          <a:bodyPr/>
+          <a:p/>
+        </p:txBody>
       </p:sp>
       <p:sp>
         <p:nvSpPr>
@@ -9528,6 +9724,10 @@
             <a:noFill/>
           </a:ln>
         </p:spPr>
+        <p:txBody xmlns:a="http://schemas.openxmlformats.org/drawingml/2006/main">
+          <a:bodyPr/>
+          <a:p/>
+        </p:txBody>
       </p:sp>
       <p:sp>
         <p:nvSpPr>
@@ -9558,6 +9758,10 @@
             </a:solidFill>
           </a:ln>
         </p:spPr>
+        <p:txBody xmlns:a="http://schemas.openxmlformats.org/drawingml/2006/main">
+          <a:bodyPr/>
+          <a:p/>
+        </p:txBody>
       </p:sp>
       <p:sp>
         <p:nvSpPr>
@@ -9611,7 +9815,7 @@
                 <a:ea typeface="Arial"/>
                 <a:cs typeface="Arial"/>
               </a:rPr>
-              <a:t>BioLangFusion methods pilot</a:t>
+              <a:t>BioLangFusion/IsoFormer pilot with DNA</a:t>
             </a:r>
           </a:p>
         </p:txBody>
@@ -9702,6 +9906,10 @@
             </a:solidFill>
           </a:ln>
         </p:spPr>
+        <p:txBody xmlns:a="http://schemas.openxmlformats.org/drawingml/2006/main">
+          <a:bodyPr/>
+          <a:p/>
+        </p:txBody>
       </p:sp>
       <p:sp>
         <p:nvSpPr>
@@ -9732,6 +9940,10 @@
             </a:solidFill>
           </a:ln>
         </p:spPr>
+        <p:txBody xmlns:a="http://schemas.openxmlformats.org/drawingml/2006/main">
+          <a:bodyPr/>
+          <a:p/>
+        </p:txBody>
       </p:sp>
       <p:sp>
         <p:nvSpPr>
@@ -9762,6 +9974,10 @@
             </a:solidFill>
           </a:ln>
         </p:spPr>
+        <p:txBody xmlns:a="http://schemas.openxmlformats.org/drawingml/2006/main">
+          <a:bodyPr/>
+          <a:p/>
+        </p:txBody>
       </p:sp>
       <p:sp>
         <p:nvSpPr>
@@ -9792,6 +10008,10 @@
             </a:solidFill>
           </a:ln>
         </p:spPr>
+        <p:txBody xmlns:a="http://schemas.openxmlformats.org/drawingml/2006/main">
+          <a:bodyPr/>
+          <a:p/>
+        </p:txBody>
       </p:sp>
       <p:sp>
         <p:nvSpPr>
@@ -9822,6 +10042,10 @@
             </a:solidFill>
           </a:ln>
         </p:spPr>
+        <p:txBody xmlns:a="http://schemas.openxmlformats.org/drawingml/2006/main">
+          <a:bodyPr/>
+          <a:p/>
+        </p:txBody>
       </p:sp>
       <p:sp>
         <p:nvSpPr>
@@ -9852,6 +10076,10 @@
             </a:solidFill>
           </a:ln>
         </p:spPr>
+        <p:txBody xmlns:a="http://schemas.openxmlformats.org/drawingml/2006/main">
+          <a:bodyPr/>
+          <a:p/>
+        </p:txBody>
       </p:sp>
       <p:sp>
         <p:nvSpPr>
@@ -9882,6 +10110,10 @@
             </a:solidFill>
           </a:ln>
         </p:spPr>
+        <p:txBody xmlns:a="http://schemas.openxmlformats.org/drawingml/2006/main">
+          <a:bodyPr/>
+          <a:p/>
+        </p:txBody>
       </p:sp>
       <p:sp>
         <p:nvSpPr>
@@ -9912,6 +10144,10 @@
             </a:solidFill>
           </a:ln>
         </p:spPr>
+        <p:txBody xmlns:a="http://schemas.openxmlformats.org/drawingml/2006/main">
+          <a:bodyPr/>
+          <a:p/>
+        </p:txBody>
       </p:sp>
       <p:sp>
         <p:nvSpPr>
@@ -9942,6 +10178,10 @@
             </a:solidFill>
           </a:ln>
         </p:spPr>
+        <p:txBody xmlns:a="http://schemas.openxmlformats.org/drawingml/2006/main">
+          <a:bodyPr/>
+          <a:p/>
+        </p:txBody>
       </p:sp>
       <p:sp>
         <p:nvSpPr>
@@ -9972,6 +10212,10 @@
             </a:solidFill>
           </a:ln>
         </p:spPr>
+        <p:txBody xmlns:a="http://schemas.openxmlformats.org/drawingml/2006/main">
+          <a:bodyPr/>
+          <a:p/>
+        </p:txBody>
       </p:sp>
       <p:sp>
         <p:nvSpPr>
@@ -10002,6 +10246,10 @@
             </a:solidFill>
           </a:ln>
         </p:spPr>
+        <p:txBody xmlns:a="http://schemas.openxmlformats.org/drawingml/2006/main">
+          <a:bodyPr/>
+          <a:p/>
+        </p:txBody>
       </p:sp>
       <p:sp>
         <p:nvSpPr>
@@ -10032,6 +10280,10 @@
             </a:solidFill>
           </a:ln>
         </p:spPr>
+        <p:txBody xmlns:a="http://schemas.openxmlformats.org/drawingml/2006/main">
+          <a:bodyPr/>
+          <a:p/>
+        </p:txBody>
       </p:sp>
       <p:sp>
         <p:nvSpPr>
@@ -10062,6 +10314,10 @@
             </a:solidFill>
           </a:ln>
         </p:spPr>
+        <p:txBody xmlns:a="http://schemas.openxmlformats.org/drawingml/2006/main">
+          <a:bodyPr/>
+          <a:p/>
+        </p:txBody>
       </p:sp>
       <p:sp>
         <p:nvSpPr>
@@ -10092,6 +10348,10 @@
             </a:solidFill>
           </a:ln>
         </p:spPr>
+        <p:txBody xmlns:a="http://schemas.openxmlformats.org/drawingml/2006/main">
+          <a:bodyPr/>
+          <a:p/>
+        </p:txBody>
       </p:sp>
       <p:sp>
         <p:nvSpPr>
@@ -10122,6 +10382,10 @@
             </a:solidFill>
           </a:ln>
         </p:spPr>
+        <p:txBody xmlns:a="http://schemas.openxmlformats.org/drawingml/2006/main">
+          <a:bodyPr/>
+          <a:p/>
+        </p:txBody>
       </p:sp>
       <p:sp>
         <p:nvSpPr>
@@ -10152,6 +10416,10 @@
             </a:solidFill>
           </a:ln>
         </p:spPr>
+        <p:txBody xmlns:a="http://schemas.openxmlformats.org/drawingml/2006/main">
+          <a:bodyPr/>
+          <a:p/>
+        </p:txBody>
       </p:sp>
       <p:sp>
         <p:nvSpPr>
@@ -10182,6 +10450,10 @@
             </a:solidFill>
           </a:ln>
         </p:spPr>
+        <p:txBody xmlns:a="http://schemas.openxmlformats.org/drawingml/2006/main">
+          <a:bodyPr/>
+          <a:p/>
+        </p:txBody>
       </p:sp>
       <p:sp>
         <p:nvSpPr>
@@ -10212,6 +10484,10 @@
             </a:solidFill>
           </a:ln>
         </p:spPr>
+        <p:txBody xmlns:a="http://schemas.openxmlformats.org/drawingml/2006/main">
+          <a:bodyPr/>
+          <a:p/>
+        </p:txBody>
       </p:sp>
       <p:sp>
         <p:nvSpPr>
@@ -10242,6 +10518,10 @@
             </a:solidFill>
           </a:ln>
         </p:spPr>
+        <p:txBody xmlns:a="http://schemas.openxmlformats.org/drawingml/2006/main">
+          <a:bodyPr/>
+          <a:p/>
+        </p:txBody>
       </p:sp>
       <p:sp>
         <p:nvSpPr>
@@ -10272,6 +10552,10 @@
             </a:solidFill>
           </a:ln>
         </p:spPr>
+        <p:txBody xmlns:a="http://schemas.openxmlformats.org/drawingml/2006/main">
+          <a:bodyPr/>
+          <a:p/>
+        </p:txBody>
       </p:sp>
       <p:sp>
         <p:nvSpPr>
@@ -10302,6 +10586,10 @@
             <a:noFill/>
           </a:ln>
         </p:spPr>
+        <p:txBody xmlns:a="http://schemas.openxmlformats.org/drawingml/2006/main">
+          <a:bodyPr/>
+          <a:p/>
+        </p:txBody>
       </p:sp>
       <p:sp>
         <p:nvSpPr>
@@ -10332,6 +10620,10 @@
             </a:solidFill>
           </a:ln>
         </p:spPr>
+        <p:txBody xmlns:a="http://schemas.openxmlformats.org/drawingml/2006/main">
+          <a:bodyPr/>
+          <a:p/>
+        </p:txBody>
       </p:sp>
       <p:sp>
         <p:nvSpPr>
@@ -10362,6 +10654,10 @@
             <a:noFill/>
           </a:ln>
         </p:spPr>
+        <p:txBody xmlns:a="http://schemas.openxmlformats.org/drawingml/2006/main">
+          <a:bodyPr/>
+          <a:p/>
+        </p:txBody>
       </p:sp>
       <p:sp>
         <p:nvSpPr>
@@ -10506,6 +10802,10 @@
             </a:solidFill>
           </a:ln>
         </p:spPr>
+        <p:txBody xmlns:a="http://schemas.openxmlformats.org/drawingml/2006/main">
+          <a:bodyPr/>
+          <a:p/>
+        </p:txBody>
       </p:sp>
       <p:sp>
         <p:nvSpPr>
@@ -10536,6 +10836,10 @@
             </a:solidFill>
           </a:ln>
         </p:spPr>
+        <p:txBody xmlns:a="http://schemas.openxmlformats.org/drawingml/2006/main">
+          <a:bodyPr/>
+          <a:p/>
+        </p:txBody>
       </p:sp>
       <p:sp>
         <p:nvSpPr>
@@ -10566,6 +10870,10 @@
             </a:solidFill>
           </a:ln>
         </p:spPr>
+        <p:txBody xmlns:a="http://schemas.openxmlformats.org/drawingml/2006/main">
+          <a:bodyPr/>
+          <a:p/>
+        </p:txBody>
       </p:sp>
       <p:sp>
         <p:nvSpPr>
@@ -10596,6 +10904,10 @@
             </a:solidFill>
           </a:ln>
         </p:spPr>
+        <p:txBody xmlns:a="http://schemas.openxmlformats.org/drawingml/2006/main">
+          <a:bodyPr/>
+          <a:p/>
+        </p:txBody>
       </p:sp>
       <p:sp>
         <p:nvSpPr>
@@ -10626,6 +10938,10 @@
             </a:solidFill>
           </a:ln>
         </p:spPr>
+        <p:txBody xmlns:a="http://schemas.openxmlformats.org/drawingml/2006/main">
+          <a:bodyPr/>
+          <a:p/>
+        </p:txBody>
       </p:sp>
       <p:sp>
         <p:nvSpPr>
@@ -10656,6 +10972,10 @@
             </a:solidFill>
           </a:ln>
         </p:spPr>
+        <p:txBody xmlns:a="http://schemas.openxmlformats.org/drawingml/2006/main">
+          <a:bodyPr/>
+          <a:p/>
+        </p:txBody>
       </p:sp>
       <p:sp>
         <p:nvSpPr>
@@ -10686,6 +11006,10 @@
             </a:solidFill>
           </a:ln>
         </p:spPr>
+        <p:txBody xmlns:a="http://schemas.openxmlformats.org/drawingml/2006/main">
+          <a:bodyPr/>
+          <a:p/>
+        </p:txBody>
       </p:sp>
       <p:sp>
         <p:nvSpPr>
@@ -10716,6 +11040,10 @@
             </a:solidFill>
           </a:ln>
         </p:spPr>
+        <p:txBody xmlns:a="http://schemas.openxmlformats.org/drawingml/2006/main">
+          <a:bodyPr/>
+          <a:p/>
+        </p:txBody>
       </p:sp>
       <p:sp>
         <p:nvSpPr>
@@ -10746,6 +11074,10 @@
             </a:solidFill>
           </a:ln>
         </p:spPr>
+        <p:txBody xmlns:a="http://schemas.openxmlformats.org/drawingml/2006/main">
+          <a:bodyPr/>
+          <a:p/>
+        </p:txBody>
       </p:sp>
       <p:sp>
         <p:nvSpPr>
@@ -10776,6 +11108,10 @@
             </a:solidFill>
           </a:ln>
         </p:spPr>
+        <p:txBody xmlns:a="http://schemas.openxmlformats.org/drawingml/2006/main">
+          <a:bodyPr/>
+          <a:p/>
+        </p:txBody>
       </p:sp>
       <p:sp>
         <p:nvSpPr>
@@ -10806,6 +11142,10 @@
             </a:solidFill>
           </a:ln>
         </p:spPr>
+        <p:txBody xmlns:a="http://schemas.openxmlformats.org/drawingml/2006/main">
+          <a:bodyPr/>
+          <a:p/>
+        </p:txBody>
       </p:sp>
       <p:sp>
         <p:nvSpPr>
@@ -10836,6 +11176,10 @@
             </a:solidFill>
           </a:ln>
         </p:spPr>
+        <p:txBody xmlns:a="http://schemas.openxmlformats.org/drawingml/2006/main">
+          <a:bodyPr/>
+          <a:p/>
+        </p:txBody>
       </p:sp>
       <p:sp>
         <p:nvSpPr>
@@ -10866,6 +11210,10 @@
             </a:solidFill>
           </a:ln>
         </p:spPr>
+        <p:txBody xmlns:a="http://schemas.openxmlformats.org/drawingml/2006/main">
+          <a:bodyPr/>
+          <a:p/>
+        </p:txBody>
       </p:sp>
       <p:sp>
         <p:nvSpPr>
@@ -10896,6 +11244,10 @@
             </a:solidFill>
           </a:ln>
         </p:spPr>
+        <p:txBody xmlns:a="http://schemas.openxmlformats.org/drawingml/2006/main">
+          <a:bodyPr/>
+          <a:p/>
+        </p:txBody>
       </p:sp>
       <p:sp>
         <p:nvSpPr>
@@ -10926,6 +11278,10 @@
             </a:solidFill>
           </a:ln>
         </p:spPr>
+        <p:txBody xmlns:a="http://schemas.openxmlformats.org/drawingml/2006/main">
+          <a:bodyPr/>
+          <a:p/>
+        </p:txBody>
       </p:sp>
       <p:sp>
         <p:nvSpPr>
@@ -10956,6 +11312,10 @@
             </a:solidFill>
           </a:ln>
         </p:spPr>
+        <p:txBody xmlns:a="http://schemas.openxmlformats.org/drawingml/2006/main">
+          <a:bodyPr/>
+          <a:p/>
+        </p:txBody>
       </p:sp>
       <p:sp>
         <p:nvSpPr>
@@ -10986,6 +11346,10 @@
             </a:solidFill>
           </a:ln>
         </p:spPr>
+        <p:txBody xmlns:a="http://schemas.openxmlformats.org/drawingml/2006/main">
+          <a:bodyPr/>
+          <a:p/>
+        </p:txBody>
       </p:sp>
       <p:sp>
         <p:nvSpPr>
@@ -11016,6 +11380,10 @@
             </a:solidFill>
           </a:ln>
         </p:spPr>
+        <p:txBody xmlns:a="http://schemas.openxmlformats.org/drawingml/2006/main">
+          <a:bodyPr/>
+          <a:p/>
+        </p:txBody>
       </p:sp>
       <p:sp>
         <p:nvSpPr>
@@ -11046,6 +11414,10 @@
             </a:solidFill>
           </a:ln>
         </p:spPr>
+        <p:txBody xmlns:a="http://schemas.openxmlformats.org/drawingml/2006/main">
+          <a:bodyPr/>
+          <a:p/>
+        </p:txBody>
       </p:sp>
       <p:sp>
         <p:nvSpPr>
@@ -11076,6 +11448,10 @@
             </a:solidFill>
           </a:ln>
         </p:spPr>
+        <p:txBody xmlns:a="http://schemas.openxmlformats.org/drawingml/2006/main">
+          <a:bodyPr/>
+          <a:p/>
+        </p:txBody>
       </p:sp>
       <p:sp>
         <p:nvSpPr>
@@ -11106,6 +11482,10 @@
             <a:noFill/>
           </a:ln>
         </p:spPr>
+        <p:txBody xmlns:a="http://schemas.openxmlformats.org/drawingml/2006/main">
+          <a:bodyPr/>
+          <a:p/>
+        </p:txBody>
       </p:sp>
       <p:sp>
         <p:nvSpPr>
@@ -11136,6 +11516,10 @@
             </a:solidFill>
           </a:ln>
         </p:spPr>
+        <p:txBody xmlns:a="http://schemas.openxmlformats.org/drawingml/2006/main">
+          <a:bodyPr/>
+          <a:p/>
+        </p:txBody>
       </p:sp>
       <p:sp>
         <p:nvSpPr>
@@ -11280,6 +11664,10 @@
             </a:solidFill>
           </a:ln>
         </p:spPr>
+        <p:txBody xmlns:a="http://schemas.openxmlformats.org/drawingml/2006/main">
+          <a:bodyPr/>
+          <a:p/>
+        </p:txBody>
       </p:sp>
       <p:sp>
         <p:nvSpPr>
@@ -11310,6 +11698,10 @@
             </a:solidFill>
           </a:ln>
         </p:spPr>
+        <p:txBody xmlns:a="http://schemas.openxmlformats.org/drawingml/2006/main">
+          <a:bodyPr/>
+          <a:p/>
+        </p:txBody>
       </p:sp>
       <p:sp>
         <p:nvSpPr>
@@ -11340,6 +11732,10 @@
             </a:solidFill>
           </a:ln>
         </p:spPr>
+        <p:txBody xmlns:a="http://schemas.openxmlformats.org/drawingml/2006/main">
+          <a:bodyPr/>
+          <a:p/>
+        </p:txBody>
       </p:sp>
       <p:sp>
         <p:nvSpPr>
@@ -11370,6 +11766,10 @@
             </a:solidFill>
           </a:ln>
         </p:spPr>
+        <p:txBody xmlns:a="http://schemas.openxmlformats.org/drawingml/2006/main">
+          <a:bodyPr/>
+          <a:p/>
+        </p:txBody>
       </p:sp>
       <p:sp>
         <p:nvSpPr>
@@ -11400,6 +11800,10 @@
             </a:solidFill>
           </a:ln>
         </p:spPr>
+        <p:txBody xmlns:a="http://schemas.openxmlformats.org/drawingml/2006/main">
+          <a:bodyPr/>
+          <a:p/>
+        </p:txBody>
       </p:sp>
       <p:sp>
         <p:nvSpPr>
@@ -11430,6 +11834,10 @@
             </a:solidFill>
           </a:ln>
         </p:spPr>
+        <p:txBody xmlns:a="http://schemas.openxmlformats.org/drawingml/2006/main">
+          <a:bodyPr/>
+          <a:p/>
+        </p:txBody>
       </p:sp>
       <p:sp>
         <p:nvSpPr>
@@ -11460,6 +11868,10 @@
             </a:solidFill>
           </a:ln>
         </p:spPr>
+        <p:txBody xmlns:a="http://schemas.openxmlformats.org/drawingml/2006/main">
+          <a:bodyPr/>
+          <a:p/>
+        </p:txBody>
       </p:sp>
       <p:sp>
         <p:nvSpPr>
@@ -11490,6 +11902,10 @@
             </a:solidFill>
           </a:ln>
         </p:spPr>
+        <p:txBody xmlns:a="http://schemas.openxmlformats.org/drawingml/2006/main">
+          <a:bodyPr/>
+          <a:p/>
+        </p:txBody>
       </p:sp>
       <p:sp>
         <p:nvSpPr>
@@ -11520,6 +11936,10 @@
             </a:solidFill>
           </a:ln>
         </p:spPr>
+        <p:txBody xmlns:a="http://schemas.openxmlformats.org/drawingml/2006/main">
+          <a:bodyPr/>
+          <a:p/>
+        </p:txBody>
       </p:sp>
       <p:sp>
         <p:nvSpPr>
@@ -11550,6 +11970,10 @@
             </a:solidFill>
           </a:ln>
         </p:spPr>
+        <p:txBody xmlns:a="http://schemas.openxmlformats.org/drawingml/2006/main">
+          <a:bodyPr/>
+          <a:p/>
+        </p:txBody>
       </p:sp>
       <p:sp>
         <p:nvSpPr>
@@ -11580,6 +12004,10 @@
             </a:solidFill>
           </a:ln>
         </p:spPr>
+        <p:txBody xmlns:a="http://schemas.openxmlformats.org/drawingml/2006/main">
+          <a:bodyPr/>
+          <a:p/>
+        </p:txBody>
       </p:sp>
       <p:sp>
         <p:nvSpPr>
@@ -11610,6 +12038,10 @@
             </a:solidFill>
           </a:ln>
         </p:spPr>
+        <p:txBody xmlns:a="http://schemas.openxmlformats.org/drawingml/2006/main">
+          <a:bodyPr/>
+          <a:p/>
+        </p:txBody>
       </p:sp>
       <p:sp>
         <p:nvSpPr>
@@ -11640,6 +12072,10 @@
             </a:solidFill>
           </a:ln>
         </p:spPr>
+        <p:txBody xmlns:a="http://schemas.openxmlformats.org/drawingml/2006/main">
+          <a:bodyPr/>
+          <a:p/>
+        </p:txBody>
       </p:sp>
       <p:sp>
         <p:nvSpPr>
@@ -11670,6 +12106,10 @@
             </a:solidFill>
           </a:ln>
         </p:spPr>
+        <p:txBody xmlns:a="http://schemas.openxmlformats.org/drawingml/2006/main">
+          <a:bodyPr/>
+          <a:p/>
+        </p:txBody>
       </p:sp>
       <p:sp>
         <p:nvSpPr>
@@ -11700,6 +12140,10 @@
             </a:solidFill>
           </a:ln>
         </p:spPr>
+        <p:txBody xmlns:a="http://schemas.openxmlformats.org/drawingml/2006/main">
+          <a:bodyPr/>
+          <a:p/>
+        </p:txBody>
       </p:sp>
       <p:sp>
         <p:nvSpPr>
@@ -11730,6 +12174,10 @@
             </a:solidFill>
           </a:ln>
         </p:spPr>
+        <p:txBody xmlns:a="http://schemas.openxmlformats.org/drawingml/2006/main">
+          <a:bodyPr/>
+          <a:p/>
+        </p:txBody>
       </p:sp>
       <p:sp>
         <p:nvSpPr>
@@ -11760,6 +12208,10 @@
             </a:solidFill>
           </a:ln>
         </p:spPr>
+        <p:txBody xmlns:a="http://schemas.openxmlformats.org/drawingml/2006/main">
+          <a:bodyPr/>
+          <a:p/>
+        </p:txBody>
       </p:sp>
       <p:sp>
         <p:nvSpPr>
@@ -11790,6 +12242,10 @@
             </a:solidFill>
           </a:ln>
         </p:spPr>
+        <p:txBody xmlns:a="http://schemas.openxmlformats.org/drawingml/2006/main">
+          <a:bodyPr/>
+          <a:p/>
+        </p:txBody>
       </p:sp>
       <p:sp>
         <p:nvSpPr>
@@ -11820,6 +12276,10 @@
             </a:solidFill>
           </a:ln>
         </p:spPr>
+        <p:txBody xmlns:a="http://schemas.openxmlformats.org/drawingml/2006/main">
+          <a:bodyPr/>
+          <a:p/>
+        </p:txBody>
       </p:sp>
       <p:sp>
         <p:nvSpPr>
@@ -11850,6 +12310,10 @@
             </a:solidFill>
           </a:ln>
         </p:spPr>
+        <p:txBody xmlns:a="http://schemas.openxmlformats.org/drawingml/2006/main">
+          <a:bodyPr/>
+          <a:p/>
+        </p:txBody>
       </p:sp>
       <p:sp>
         <p:nvSpPr>
@@ -11880,6 +12344,10 @@
             <a:noFill/>
           </a:ln>
         </p:spPr>
+        <p:txBody xmlns:a="http://schemas.openxmlformats.org/drawingml/2006/main">
+          <a:bodyPr/>
+          <a:p/>
+        </p:txBody>
       </p:sp>
       <p:sp>
         <p:nvSpPr>
@@ -11910,6 +12378,10 @@
             </a:solidFill>
           </a:ln>
         </p:spPr>
+        <p:txBody xmlns:a="http://schemas.openxmlformats.org/drawingml/2006/main">
+          <a:bodyPr/>
+          <a:p/>
+        </p:txBody>
       </p:sp>
       <p:sp>
         <p:nvSpPr>
@@ -11940,6 +12412,10 @@
             <a:noFill/>
           </a:ln>
         </p:spPr>
+        <p:txBody xmlns:a="http://schemas.openxmlformats.org/drawingml/2006/main">
+          <a:bodyPr/>
+          <a:p/>
+        </p:txBody>
       </p:sp>
       <p:sp>
         <p:nvSpPr>
@@ -12027,6 +12503,10 @@
             <a:noFill/>
           </a:ln>
         </p:spPr>
+        <p:txBody xmlns:a="http://schemas.openxmlformats.org/drawingml/2006/main">
+          <a:bodyPr/>
+          <a:p/>
+        </p:txBody>
       </p:sp>
       <p:sp>
         <p:nvSpPr>
@@ -12171,6 +12651,10 @@
             </a:solidFill>
           </a:ln>
         </p:spPr>
+        <p:txBody xmlns:a="http://schemas.openxmlformats.org/drawingml/2006/main">
+          <a:bodyPr/>
+          <a:p/>
+        </p:txBody>
       </p:sp>
       <p:sp>
         <p:nvSpPr>
@@ -12201,6 +12685,10 @@
             </a:solidFill>
           </a:ln>
         </p:spPr>
+        <p:txBody xmlns:a="http://schemas.openxmlformats.org/drawingml/2006/main">
+          <a:bodyPr/>
+          <a:p/>
+        </p:txBody>
       </p:sp>
       <p:sp>
         <p:nvSpPr>
@@ -12231,6 +12719,10 @@
             </a:solidFill>
           </a:ln>
         </p:spPr>
+        <p:txBody xmlns:a="http://schemas.openxmlformats.org/drawingml/2006/main">
+          <a:bodyPr/>
+          <a:p/>
+        </p:txBody>
       </p:sp>
       <p:sp>
         <p:nvSpPr>
@@ -12261,6 +12753,10 @@
             </a:solidFill>
           </a:ln>
         </p:spPr>
+        <p:txBody xmlns:a="http://schemas.openxmlformats.org/drawingml/2006/main">
+          <a:bodyPr/>
+          <a:p/>
+        </p:txBody>
       </p:sp>
       <p:sp>
         <p:nvSpPr>
@@ -12291,6 +12787,10 @@
             </a:solidFill>
           </a:ln>
         </p:spPr>
+        <p:txBody xmlns:a="http://schemas.openxmlformats.org/drawingml/2006/main">
+          <a:bodyPr/>
+          <a:p/>
+        </p:txBody>
       </p:sp>
       <p:sp>
         <p:nvSpPr>
@@ -12321,6 +12821,10 @@
             </a:solidFill>
           </a:ln>
         </p:spPr>
+        <p:txBody xmlns:a="http://schemas.openxmlformats.org/drawingml/2006/main">
+          <a:bodyPr/>
+          <a:p/>
+        </p:txBody>
       </p:sp>
       <p:sp>
         <p:nvSpPr>
@@ -12351,6 +12855,10 @@
             </a:solidFill>
           </a:ln>
         </p:spPr>
+        <p:txBody xmlns:a="http://schemas.openxmlformats.org/drawingml/2006/main">
+          <a:bodyPr/>
+          <a:p/>
+        </p:txBody>
       </p:sp>
       <p:sp>
         <p:nvSpPr>
@@ -12381,6 +12889,10 @@
             </a:solidFill>
           </a:ln>
         </p:spPr>
+        <p:txBody xmlns:a="http://schemas.openxmlformats.org/drawingml/2006/main">
+          <a:bodyPr/>
+          <a:p/>
+        </p:txBody>
       </p:sp>
       <p:sp>
         <p:nvSpPr>
@@ -12411,6 +12923,10 @@
             </a:solidFill>
           </a:ln>
         </p:spPr>
+        <p:txBody xmlns:a="http://schemas.openxmlformats.org/drawingml/2006/main">
+          <a:bodyPr/>
+          <a:p/>
+        </p:txBody>
       </p:sp>
       <p:sp>
         <p:nvSpPr>
@@ -12441,6 +12957,10 @@
             </a:solidFill>
           </a:ln>
         </p:spPr>
+        <p:txBody xmlns:a="http://schemas.openxmlformats.org/drawingml/2006/main">
+          <a:bodyPr/>
+          <a:p/>
+        </p:txBody>
       </p:sp>
       <p:sp>
         <p:nvSpPr>
@@ -12471,6 +12991,10 @@
             </a:solidFill>
           </a:ln>
         </p:spPr>
+        <p:txBody xmlns:a="http://schemas.openxmlformats.org/drawingml/2006/main">
+          <a:bodyPr/>
+          <a:p/>
+        </p:txBody>
       </p:sp>
       <p:sp>
         <p:nvSpPr>
@@ -12501,6 +13025,10 @@
             </a:solidFill>
           </a:ln>
         </p:spPr>
+        <p:txBody xmlns:a="http://schemas.openxmlformats.org/drawingml/2006/main">
+          <a:bodyPr/>
+          <a:p/>
+        </p:txBody>
       </p:sp>
       <p:sp>
         <p:nvSpPr>
@@ -12531,6 +13059,10 @@
             </a:solidFill>
           </a:ln>
         </p:spPr>
+        <p:txBody xmlns:a="http://schemas.openxmlformats.org/drawingml/2006/main">
+          <a:bodyPr/>
+          <a:p/>
+        </p:txBody>
       </p:sp>
       <p:sp>
         <p:nvSpPr>
@@ -12561,6 +13093,10 @@
             </a:solidFill>
           </a:ln>
         </p:spPr>
+        <p:txBody xmlns:a="http://schemas.openxmlformats.org/drawingml/2006/main">
+          <a:bodyPr/>
+          <a:p/>
+        </p:txBody>
       </p:sp>
       <p:sp>
         <p:nvSpPr>
@@ -12591,6 +13127,10 @@
             </a:solidFill>
           </a:ln>
         </p:spPr>
+        <p:txBody xmlns:a="http://schemas.openxmlformats.org/drawingml/2006/main">
+          <a:bodyPr/>
+          <a:p/>
+        </p:txBody>
       </p:sp>
       <p:sp>
         <p:nvSpPr>
@@ -12621,6 +13161,10 @@
             </a:solidFill>
           </a:ln>
         </p:spPr>
+        <p:txBody xmlns:a="http://schemas.openxmlformats.org/drawingml/2006/main">
+          <a:bodyPr/>
+          <a:p/>
+        </p:txBody>
       </p:sp>
       <p:sp>
         <p:nvSpPr>
@@ -12651,6 +13195,10 @@
             </a:solidFill>
           </a:ln>
         </p:spPr>
+        <p:txBody xmlns:a="http://schemas.openxmlformats.org/drawingml/2006/main">
+          <a:bodyPr/>
+          <a:p/>
+        </p:txBody>
       </p:sp>
       <p:sp>
         <p:nvSpPr>
@@ -12681,6 +13229,10 @@
             </a:solidFill>
           </a:ln>
         </p:spPr>
+        <p:txBody xmlns:a="http://schemas.openxmlformats.org/drawingml/2006/main">
+          <a:bodyPr/>
+          <a:p/>
+        </p:txBody>
       </p:sp>
       <p:sp>
         <p:nvSpPr>
@@ -12711,6 +13263,10 @@
             </a:solidFill>
           </a:ln>
         </p:spPr>
+        <p:txBody xmlns:a="http://schemas.openxmlformats.org/drawingml/2006/main">
+          <a:bodyPr/>
+          <a:p/>
+        </p:txBody>
       </p:sp>
       <p:sp>
         <p:nvSpPr>
@@ -12741,6 +13297,10 @@
             </a:solidFill>
           </a:ln>
         </p:spPr>
+        <p:txBody xmlns:a="http://schemas.openxmlformats.org/drawingml/2006/main">
+          <a:bodyPr/>
+          <a:p/>
+        </p:txBody>
       </p:sp>
       <p:sp>
         <p:nvSpPr>
@@ -12771,6 +13331,10 @@
             <a:noFill/>
           </a:ln>
         </p:spPr>
+        <p:txBody xmlns:a="http://schemas.openxmlformats.org/drawingml/2006/main">
+          <a:bodyPr/>
+          <a:p/>
+        </p:txBody>
       </p:sp>
       <p:sp>
         <p:nvSpPr>
@@ -12801,6 +13365,10 @@
             <a:noFill/>
           </a:ln>
         </p:spPr>
+        <p:txBody xmlns:a="http://schemas.openxmlformats.org/drawingml/2006/main">
+          <a:bodyPr/>
+          <a:p/>
+        </p:txBody>
       </p:sp>
       <p:sp>
         <p:nvSpPr>
@@ -12831,6 +13399,10 @@
             <a:noFill/>
           </a:ln>
         </p:spPr>
+        <p:txBody xmlns:a="http://schemas.openxmlformats.org/drawingml/2006/main">
+          <a:bodyPr/>
+          <a:p/>
+        </p:txBody>
       </p:sp>
       <p:sp>
         <p:nvSpPr>
@@ -12861,6 +13433,10 @@
             <a:noFill/>
           </a:ln>
         </p:spPr>
+        <p:txBody xmlns:a="http://schemas.openxmlformats.org/drawingml/2006/main">
+          <a:bodyPr/>
+          <a:p/>
+        </p:txBody>
       </p:sp>
       <p:sp>
         <p:nvSpPr>
@@ -12891,6 +13467,10 @@
             <a:noFill/>
           </a:ln>
         </p:spPr>
+        <p:txBody xmlns:a="http://schemas.openxmlformats.org/drawingml/2006/main">
+          <a:bodyPr/>
+          <a:p/>
+        </p:txBody>
       </p:sp>
       <p:sp>
         <p:nvSpPr>
@@ -12921,6 +13501,10 @@
             </a:solidFill>
           </a:ln>
         </p:spPr>
+        <p:txBody xmlns:a="http://schemas.openxmlformats.org/drawingml/2006/main">
+          <a:bodyPr/>
+          <a:p/>
+        </p:txBody>
       </p:sp>
       <p:sp>
         <p:nvSpPr>
@@ -13065,6 +13649,10 @@
             </a:solidFill>
           </a:ln>
         </p:spPr>
+        <p:txBody xmlns:a="http://schemas.openxmlformats.org/drawingml/2006/main">
+          <a:bodyPr/>
+          <a:p/>
+        </p:txBody>
       </p:sp>
       <p:sp>
         <p:nvSpPr>
@@ -13095,6 +13683,10 @@
             </a:solidFill>
           </a:ln>
         </p:spPr>
+        <p:txBody xmlns:a="http://schemas.openxmlformats.org/drawingml/2006/main">
+          <a:bodyPr/>
+          <a:p/>
+        </p:txBody>
       </p:sp>
       <p:sp>
         <p:nvSpPr>
@@ -13125,6 +13717,10 @@
             </a:solidFill>
           </a:ln>
         </p:spPr>
+        <p:txBody xmlns:a="http://schemas.openxmlformats.org/drawingml/2006/main">
+          <a:bodyPr/>
+          <a:p/>
+        </p:txBody>
       </p:sp>
       <p:sp>
         <p:nvSpPr>
@@ -13155,6 +13751,10 @@
             </a:solidFill>
           </a:ln>
         </p:spPr>
+        <p:txBody xmlns:a="http://schemas.openxmlformats.org/drawingml/2006/main">
+          <a:bodyPr/>
+          <a:p/>
+        </p:txBody>
       </p:sp>
       <p:sp>
         <p:nvSpPr>
@@ -13185,6 +13785,10 @@
             </a:solidFill>
           </a:ln>
         </p:spPr>
+        <p:txBody xmlns:a="http://schemas.openxmlformats.org/drawingml/2006/main">
+          <a:bodyPr/>
+          <a:p/>
+        </p:txBody>
       </p:sp>
       <p:sp>
         <p:nvSpPr>
@@ -13215,6 +13819,10 @@
             </a:solidFill>
           </a:ln>
         </p:spPr>
+        <p:txBody xmlns:a="http://schemas.openxmlformats.org/drawingml/2006/main">
+          <a:bodyPr/>
+          <a:p/>
+        </p:txBody>
       </p:sp>
       <p:sp>
         <p:nvSpPr>
@@ -13245,6 +13853,10 @@
             </a:solidFill>
           </a:ln>
         </p:spPr>
+        <p:txBody xmlns:a="http://schemas.openxmlformats.org/drawingml/2006/main">
+          <a:bodyPr/>
+          <a:p/>
+        </p:txBody>
       </p:sp>
       <p:sp>
         <p:nvSpPr>
@@ -13275,6 +13887,10 @@
             </a:solidFill>
           </a:ln>
         </p:spPr>
+        <p:txBody xmlns:a="http://schemas.openxmlformats.org/drawingml/2006/main">
+          <a:bodyPr/>
+          <a:p/>
+        </p:txBody>
       </p:sp>
       <p:sp>
         <p:nvSpPr>
@@ -13305,6 +13921,10 @@
             </a:solidFill>
           </a:ln>
         </p:spPr>
+        <p:txBody xmlns:a="http://schemas.openxmlformats.org/drawingml/2006/main">
+          <a:bodyPr/>
+          <a:p/>
+        </p:txBody>
       </p:sp>
       <p:sp>
         <p:nvSpPr>
@@ -13335,6 +13955,10 @@
             </a:solidFill>
           </a:ln>
         </p:spPr>
+        <p:txBody xmlns:a="http://schemas.openxmlformats.org/drawingml/2006/main">
+          <a:bodyPr/>
+          <a:p/>
+        </p:txBody>
       </p:sp>
       <p:sp>
         <p:nvSpPr>
@@ -13365,6 +13989,10 @@
             </a:solidFill>
           </a:ln>
         </p:spPr>
+        <p:txBody xmlns:a="http://schemas.openxmlformats.org/drawingml/2006/main">
+          <a:bodyPr/>
+          <a:p/>
+        </p:txBody>
       </p:sp>
       <p:sp>
         <p:nvSpPr>
@@ -13395,6 +14023,10 @@
             </a:solidFill>
           </a:ln>
         </p:spPr>
+        <p:txBody xmlns:a="http://schemas.openxmlformats.org/drawingml/2006/main">
+          <a:bodyPr/>
+          <a:p/>
+        </p:txBody>
       </p:sp>
       <p:sp>
         <p:nvSpPr>
@@ -13425,6 +14057,10 @@
             </a:solidFill>
           </a:ln>
         </p:spPr>
+        <p:txBody xmlns:a="http://schemas.openxmlformats.org/drawingml/2006/main">
+          <a:bodyPr/>
+          <a:p/>
+        </p:txBody>
       </p:sp>
       <p:sp>
         <p:nvSpPr>
@@ -13455,6 +14091,10 @@
             </a:solidFill>
           </a:ln>
         </p:spPr>
+        <p:txBody xmlns:a="http://schemas.openxmlformats.org/drawingml/2006/main">
+          <a:bodyPr/>
+          <a:p/>
+        </p:txBody>
       </p:sp>
       <p:sp>
         <p:nvSpPr>
@@ -13485,6 +14125,10 @@
             </a:solidFill>
           </a:ln>
         </p:spPr>
+        <p:txBody xmlns:a="http://schemas.openxmlformats.org/drawingml/2006/main">
+          <a:bodyPr/>
+          <a:p/>
+        </p:txBody>
       </p:sp>
       <p:sp>
         <p:nvSpPr>
@@ -13515,6 +14159,10 @@
             </a:solidFill>
           </a:ln>
         </p:spPr>
+        <p:txBody xmlns:a="http://schemas.openxmlformats.org/drawingml/2006/main">
+          <a:bodyPr/>
+          <a:p/>
+        </p:txBody>
       </p:sp>
       <p:sp>
         <p:nvSpPr>
@@ -13545,6 +14193,10 @@
             </a:solidFill>
           </a:ln>
         </p:spPr>
+        <p:txBody xmlns:a="http://schemas.openxmlformats.org/drawingml/2006/main">
+          <a:bodyPr/>
+          <a:p/>
+        </p:txBody>
       </p:sp>
       <p:sp>
         <p:nvSpPr>
@@ -13575,6 +14227,10 @@
             </a:solidFill>
           </a:ln>
         </p:spPr>
+        <p:txBody xmlns:a="http://schemas.openxmlformats.org/drawingml/2006/main">
+          <a:bodyPr/>
+          <a:p/>
+        </p:txBody>
       </p:sp>
       <p:sp>
         <p:nvSpPr>
@@ -13605,6 +14261,10 @@
             </a:solidFill>
           </a:ln>
         </p:spPr>
+        <p:txBody xmlns:a="http://schemas.openxmlformats.org/drawingml/2006/main">
+          <a:bodyPr/>
+          <a:p/>
+        </p:txBody>
       </p:sp>
       <p:sp>
         <p:nvSpPr>
@@ -13635,6 +14295,10 @@
             </a:solidFill>
           </a:ln>
         </p:spPr>
+        <p:txBody xmlns:a="http://schemas.openxmlformats.org/drawingml/2006/main">
+          <a:bodyPr/>
+          <a:p/>
+        </p:txBody>
       </p:sp>
       <p:sp>
         <p:nvSpPr>
@@ -13665,6 +14329,10 @@
             <a:noFill/>
           </a:ln>
         </p:spPr>
+        <p:txBody xmlns:a="http://schemas.openxmlformats.org/drawingml/2006/main">
+          <a:bodyPr/>
+          <a:p/>
+        </p:txBody>
       </p:sp>
       <p:sp>
         <p:nvSpPr>
@@ -13695,6 +14363,10 @@
             <a:noFill/>
           </a:ln>
         </p:spPr>
+        <p:txBody xmlns:a="http://schemas.openxmlformats.org/drawingml/2006/main">
+          <a:bodyPr/>
+          <a:p/>
+        </p:txBody>
       </p:sp>
       <p:sp>
         <p:nvSpPr>
@@ -13725,6 +14397,10 @@
             <a:noFill/>
           </a:ln>
         </p:spPr>
+        <p:txBody xmlns:a="http://schemas.openxmlformats.org/drawingml/2006/main">
+          <a:bodyPr/>
+          <a:p/>
+        </p:txBody>
       </p:sp>
       <p:sp>
         <p:nvSpPr>
@@ -13755,6 +14431,10 @@
             <a:noFill/>
           </a:ln>
         </p:spPr>
+        <p:txBody xmlns:a="http://schemas.openxmlformats.org/drawingml/2006/main">
+          <a:bodyPr/>
+          <a:p/>
+        </p:txBody>
       </p:sp>
       <p:sp>
         <p:nvSpPr>
@@ -13785,6 +14465,10 @@
             <a:noFill/>
           </a:ln>
         </p:spPr>
+        <p:txBody xmlns:a="http://schemas.openxmlformats.org/drawingml/2006/main">
+          <a:bodyPr/>
+          <a:p/>
+        </p:txBody>
       </p:sp>
       <p:sp>
         <p:nvSpPr>
@@ -13815,6 +14499,10 @@
             <a:noFill/>
           </a:ln>
         </p:spPr>
+        <p:txBody xmlns:a="http://schemas.openxmlformats.org/drawingml/2006/main">
+          <a:bodyPr/>
+          <a:p/>
+        </p:txBody>
       </p:sp>
       <p:sp>
         <p:nvSpPr>
@@ -13845,6 +14533,10 @@
             <a:noFill/>
           </a:ln>
         </p:spPr>
+        <p:txBody xmlns:a="http://schemas.openxmlformats.org/drawingml/2006/main">
+          <a:bodyPr/>
+          <a:p/>
+        </p:txBody>
       </p:sp>
       <p:sp>
         <p:nvSpPr>
@@ -13875,6 +14567,10 @@
             </a:solidFill>
           </a:ln>
         </p:spPr>
+        <p:txBody xmlns:a="http://schemas.openxmlformats.org/drawingml/2006/main">
+          <a:bodyPr/>
+          <a:p/>
+        </p:txBody>
       </p:sp>
       <p:sp>
         <p:nvSpPr>
@@ -13905,6 +14601,10 @@
             <a:noFill/>
           </a:ln>
         </p:spPr>
+        <p:txBody xmlns:a="http://schemas.openxmlformats.org/drawingml/2006/main">
+          <a:bodyPr/>
+          <a:p/>
+        </p:txBody>
       </p:sp>
       <p:sp>
         <p:nvSpPr>
@@ -14049,6 +14749,10 @@
             </a:solidFill>
           </a:ln>
         </p:spPr>
+        <p:txBody xmlns:a="http://schemas.openxmlformats.org/drawingml/2006/main">
+          <a:bodyPr/>
+          <a:p/>
+        </p:txBody>
       </p:sp>
       <p:sp>
         <p:nvSpPr>
@@ -14079,6 +14783,10 @@
             </a:solidFill>
           </a:ln>
         </p:spPr>
+        <p:txBody xmlns:a="http://schemas.openxmlformats.org/drawingml/2006/main">
+          <a:bodyPr/>
+          <a:p/>
+        </p:txBody>
       </p:sp>
       <p:sp>
         <p:nvSpPr>
@@ -14109,6 +14817,10 @@
             </a:solidFill>
           </a:ln>
         </p:spPr>
+        <p:txBody xmlns:a="http://schemas.openxmlformats.org/drawingml/2006/main">
+          <a:bodyPr/>
+          <a:p/>
+        </p:txBody>
       </p:sp>
       <p:sp>
         <p:nvSpPr>
@@ -14139,6 +14851,10 @@
             </a:solidFill>
           </a:ln>
         </p:spPr>
+        <p:txBody xmlns:a="http://schemas.openxmlformats.org/drawingml/2006/main">
+          <a:bodyPr/>
+          <a:p/>
+        </p:txBody>
       </p:sp>
       <p:sp>
         <p:nvSpPr>
@@ -14169,6 +14885,10 @@
             </a:solidFill>
           </a:ln>
         </p:spPr>
+        <p:txBody xmlns:a="http://schemas.openxmlformats.org/drawingml/2006/main">
+          <a:bodyPr/>
+          <a:p/>
+        </p:txBody>
       </p:sp>
       <p:sp>
         <p:nvSpPr>
@@ -14199,6 +14919,10 @@
             </a:solidFill>
           </a:ln>
         </p:spPr>
+        <p:txBody xmlns:a="http://schemas.openxmlformats.org/drawingml/2006/main">
+          <a:bodyPr/>
+          <a:p/>
+        </p:txBody>
       </p:sp>
       <p:sp>
         <p:nvSpPr>
@@ -14229,6 +14953,10 @@
             </a:solidFill>
           </a:ln>
         </p:spPr>
+        <p:txBody xmlns:a="http://schemas.openxmlformats.org/drawingml/2006/main">
+          <a:bodyPr/>
+          <a:p/>
+        </p:txBody>
       </p:sp>
       <p:sp>
         <p:nvSpPr>
@@ -14259,6 +14987,10 @@
             </a:solidFill>
           </a:ln>
         </p:spPr>
+        <p:txBody xmlns:a="http://schemas.openxmlformats.org/drawingml/2006/main">
+          <a:bodyPr/>
+          <a:p/>
+        </p:txBody>
       </p:sp>
       <p:sp>
         <p:nvSpPr>
@@ -14289,6 +15021,10 @@
             </a:solidFill>
           </a:ln>
         </p:spPr>
+        <p:txBody xmlns:a="http://schemas.openxmlformats.org/drawingml/2006/main">
+          <a:bodyPr/>
+          <a:p/>
+        </p:txBody>
       </p:sp>
       <p:sp>
         <p:nvSpPr>
@@ -14319,6 +15055,10 @@
             </a:solidFill>
           </a:ln>
         </p:spPr>
+        <p:txBody xmlns:a="http://schemas.openxmlformats.org/drawingml/2006/main">
+          <a:bodyPr/>
+          <a:p/>
+        </p:txBody>
       </p:sp>
       <p:sp>
         <p:nvSpPr>
@@ -14349,6 +15089,10 @@
             </a:solidFill>
           </a:ln>
         </p:spPr>
+        <p:txBody xmlns:a="http://schemas.openxmlformats.org/drawingml/2006/main">
+          <a:bodyPr/>
+          <a:p/>
+        </p:txBody>
       </p:sp>
       <p:sp>
         <p:nvSpPr>
@@ -14379,6 +15123,10 @@
             </a:solidFill>
           </a:ln>
         </p:spPr>
+        <p:txBody xmlns:a="http://schemas.openxmlformats.org/drawingml/2006/main">
+          <a:bodyPr/>
+          <a:p/>
+        </p:txBody>
       </p:sp>
       <p:sp>
         <p:nvSpPr>
@@ -14409,6 +15157,10 @@
             </a:solidFill>
           </a:ln>
         </p:spPr>
+        <p:txBody xmlns:a="http://schemas.openxmlformats.org/drawingml/2006/main">
+          <a:bodyPr/>
+          <a:p/>
+        </p:txBody>
       </p:sp>
       <p:sp>
         <p:nvSpPr>
@@ -14439,6 +15191,10 @@
             </a:solidFill>
           </a:ln>
         </p:spPr>
+        <p:txBody xmlns:a="http://schemas.openxmlformats.org/drawingml/2006/main">
+          <a:bodyPr/>
+          <a:p/>
+        </p:txBody>
       </p:sp>
       <p:sp>
         <p:nvSpPr>
@@ -14469,6 +15225,10 @@
             </a:solidFill>
           </a:ln>
         </p:spPr>
+        <p:txBody xmlns:a="http://schemas.openxmlformats.org/drawingml/2006/main">
+          <a:bodyPr/>
+          <a:p/>
+        </p:txBody>
       </p:sp>
       <p:sp>
         <p:nvSpPr>
@@ -14499,6 +15259,10 @@
             </a:solidFill>
           </a:ln>
         </p:spPr>
+        <p:txBody xmlns:a="http://schemas.openxmlformats.org/drawingml/2006/main">
+          <a:bodyPr/>
+          <a:p/>
+        </p:txBody>
       </p:sp>
       <p:sp>
         <p:nvSpPr>
@@ -14529,6 +15293,10 @@
             </a:solidFill>
           </a:ln>
         </p:spPr>
+        <p:txBody xmlns:a="http://schemas.openxmlformats.org/drawingml/2006/main">
+          <a:bodyPr/>
+          <a:p/>
+        </p:txBody>
       </p:sp>
       <p:sp>
         <p:nvSpPr>
@@ -14559,6 +15327,10 @@
             </a:solidFill>
           </a:ln>
         </p:spPr>
+        <p:txBody xmlns:a="http://schemas.openxmlformats.org/drawingml/2006/main">
+          <a:bodyPr/>
+          <a:p/>
+        </p:txBody>
       </p:sp>
       <p:sp>
         <p:nvSpPr>
@@ -14589,6 +15361,10 @@
             </a:solidFill>
           </a:ln>
         </p:spPr>
+        <p:txBody xmlns:a="http://schemas.openxmlformats.org/drawingml/2006/main">
+          <a:bodyPr/>
+          <a:p/>
+        </p:txBody>
       </p:sp>
       <p:sp>
         <p:nvSpPr>
@@ -14619,6 +15395,10 @@
             </a:solidFill>
           </a:ln>
         </p:spPr>
+        <p:txBody xmlns:a="http://schemas.openxmlformats.org/drawingml/2006/main">
+          <a:bodyPr/>
+          <a:p/>
+        </p:txBody>
       </p:sp>
       <p:sp>
         <p:nvSpPr>
@@ -14651,6 +15431,10 @@
             </a:solidFill>
           </a:ln>
         </p:spPr>
+        <p:txBody xmlns:a="http://schemas.openxmlformats.org/drawingml/2006/main">
+          <a:bodyPr/>
+          <a:p/>
+        </p:txBody>
       </p:sp>
       <p:sp>
         <p:nvSpPr>
@@ -14683,6 +15467,10 @@
             </a:solidFill>
           </a:ln>
         </p:spPr>
+        <p:txBody xmlns:a="http://schemas.openxmlformats.org/drawingml/2006/main">
+          <a:bodyPr/>
+          <a:p/>
+        </p:txBody>
       </p:sp>
       <p:sp>
         <p:nvSpPr>
@@ -14715,6 +15503,10 @@
             </a:solidFill>
           </a:ln>
         </p:spPr>
+        <p:txBody xmlns:a="http://schemas.openxmlformats.org/drawingml/2006/main">
+          <a:bodyPr/>
+          <a:p/>
+        </p:txBody>
       </p:sp>
       <p:sp>
         <p:nvSpPr>
@@ -14747,6 +15539,10 @@
             </a:solidFill>
           </a:ln>
         </p:spPr>
+        <p:txBody xmlns:a="http://schemas.openxmlformats.org/drawingml/2006/main">
+          <a:bodyPr/>
+          <a:p/>
+        </p:txBody>
       </p:sp>
       <p:sp>
         <p:nvSpPr>
@@ -14779,6 +15575,10 @@
             </a:solidFill>
           </a:ln>
         </p:spPr>
+        <p:txBody xmlns:a="http://schemas.openxmlformats.org/drawingml/2006/main">
+          <a:bodyPr/>
+          <a:p/>
+        </p:txBody>
       </p:sp>
       <p:sp>
         <p:nvSpPr>
@@ -14811,6 +15611,10 @@
             </a:solidFill>
           </a:ln>
         </p:spPr>
+        <p:txBody xmlns:a="http://schemas.openxmlformats.org/drawingml/2006/main">
+          <a:bodyPr/>
+          <a:p/>
+        </p:txBody>
       </p:sp>
       <p:sp>
         <p:nvSpPr>
@@ -14841,6 +15645,10 @@
             </a:solidFill>
           </a:ln>
         </p:spPr>
+        <p:txBody xmlns:a="http://schemas.openxmlformats.org/drawingml/2006/main">
+          <a:bodyPr/>
+          <a:p/>
+        </p:txBody>
       </p:sp>
       <p:sp>
         <p:nvSpPr>
@@ -14871,6 +15679,10 @@
             <a:noFill/>
           </a:ln>
         </p:spPr>
+        <p:txBody xmlns:a="http://schemas.openxmlformats.org/drawingml/2006/main">
+          <a:bodyPr/>
+          <a:p/>
+        </p:txBody>
       </p:sp>
       <p:sp>
         <p:nvSpPr>
@@ -15072,6 +15884,10 @@
             </a:solidFill>
           </a:ln>
         </p:spPr>
+        <p:txBody xmlns:a="http://schemas.openxmlformats.org/drawingml/2006/main">
+          <a:bodyPr/>
+          <a:p/>
+        </p:txBody>
       </p:sp>
       <p:sp>
         <p:nvSpPr>
@@ -15102,6 +15918,10 @@
             </a:solidFill>
           </a:ln>
         </p:spPr>
+        <p:txBody xmlns:a="http://schemas.openxmlformats.org/drawingml/2006/main">
+          <a:bodyPr/>
+          <a:p/>
+        </p:txBody>
       </p:sp>
       <p:sp>
         <p:nvSpPr>
@@ -15132,6 +15952,10 @@
             </a:solidFill>
           </a:ln>
         </p:spPr>
+        <p:txBody xmlns:a="http://schemas.openxmlformats.org/drawingml/2006/main">
+          <a:bodyPr/>
+          <a:p/>
+        </p:txBody>
       </p:sp>
       <p:sp>
         <p:nvSpPr>
@@ -15162,6 +15986,10 @@
             </a:solidFill>
           </a:ln>
         </p:spPr>
+        <p:txBody xmlns:a="http://schemas.openxmlformats.org/drawingml/2006/main">
+          <a:bodyPr/>
+          <a:p/>
+        </p:txBody>
       </p:sp>
       <p:sp>
         <p:nvSpPr>
@@ -15192,6 +16020,10 @@
             </a:solidFill>
           </a:ln>
         </p:spPr>
+        <p:txBody xmlns:a="http://schemas.openxmlformats.org/drawingml/2006/main">
+          <a:bodyPr/>
+          <a:p/>
+        </p:txBody>
       </p:sp>
       <p:sp>
         <p:nvSpPr>
@@ -15222,6 +16054,10 @@
             </a:solidFill>
           </a:ln>
         </p:spPr>
+        <p:txBody xmlns:a="http://schemas.openxmlformats.org/drawingml/2006/main">
+          <a:bodyPr/>
+          <a:p/>
+        </p:txBody>
       </p:sp>
       <p:sp>
         <p:nvSpPr>
@@ -15252,6 +16088,10 @@
             </a:solidFill>
           </a:ln>
         </p:spPr>
+        <p:txBody xmlns:a="http://schemas.openxmlformats.org/drawingml/2006/main">
+          <a:bodyPr/>
+          <a:p/>
+        </p:txBody>
       </p:sp>
       <p:sp>
         <p:nvSpPr>
@@ -15282,6 +16122,10 @@
             </a:solidFill>
           </a:ln>
         </p:spPr>
+        <p:txBody xmlns:a="http://schemas.openxmlformats.org/drawingml/2006/main">
+          <a:bodyPr/>
+          <a:p/>
+        </p:txBody>
       </p:sp>
       <p:sp>
         <p:nvSpPr>
@@ -15312,6 +16156,10 @@
             </a:solidFill>
           </a:ln>
         </p:spPr>
+        <p:txBody xmlns:a="http://schemas.openxmlformats.org/drawingml/2006/main">
+          <a:bodyPr/>
+          <a:p/>
+        </p:txBody>
       </p:sp>
       <p:sp>
         <p:nvSpPr>
@@ -15342,6 +16190,10 @@
             </a:solidFill>
           </a:ln>
         </p:spPr>
+        <p:txBody xmlns:a="http://schemas.openxmlformats.org/drawingml/2006/main">
+          <a:bodyPr/>
+          <a:p/>
+        </p:txBody>
       </p:sp>
       <p:sp>
         <p:nvSpPr>
@@ -15372,6 +16224,10 @@
             </a:solidFill>
           </a:ln>
         </p:spPr>
+        <p:txBody xmlns:a="http://schemas.openxmlformats.org/drawingml/2006/main">
+          <a:bodyPr/>
+          <a:p/>
+        </p:txBody>
       </p:sp>
       <p:sp>
         <p:nvSpPr>
@@ -15402,6 +16258,10 @@
             </a:solidFill>
           </a:ln>
         </p:spPr>
+        <p:txBody xmlns:a="http://schemas.openxmlformats.org/drawingml/2006/main">
+          <a:bodyPr/>
+          <a:p/>
+        </p:txBody>
       </p:sp>
       <p:sp>
         <p:nvSpPr>
@@ -15432,6 +16292,10 @@
             </a:solidFill>
           </a:ln>
         </p:spPr>
+        <p:txBody xmlns:a="http://schemas.openxmlformats.org/drawingml/2006/main">
+          <a:bodyPr/>
+          <a:p/>
+        </p:txBody>
       </p:sp>
       <p:sp>
         <p:nvSpPr>
@@ -15462,6 +16326,10 @@
             </a:solidFill>
           </a:ln>
         </p:spPr>
+        <p:txBody xmlns:a="http://schemas.openxmlformats.org/drawingml/2006/main">
+          <a:bodyPr/>
+          <a:p/>
+        </p:txBody>
       </p:sp>
       <p:sp>
         <p:nvSpPr>
@@ -15492,6 +16360,10 @@
             </a:solidFill>
           </a:ln>
         </p:spPr>
+        <p:txBody xmlns:a="http://schemas.openxmlformats.org/drawingml/2006/main">
+          <a:bodyPr/>
+          <a:p/>
+        </p:txBody>
       </p:sp>
       <p:sp>
         <p:nvSpPr>
@@ -15522,6 +16394,10 @@
             </a:solidFill>
           </a:ln>
         </p:spPr>
+        <p:txBody xmlns:a="http://schemas.openxmlformats.org/drawingml/2006/main">
+          <a:bodyPr/>
+          <a:p/>
+        </p:txBody>
       </p:sp>
       <p:sp>
         <p:nvSpPr>
@@ -15552,6 +16428,10 @@
             </a:solidFill>
           </a:ln>
         </p:spPr>
+        <p:txBody xmlns:a="http://schemas.openxmlformats.org/drawingml/2006/main">
+          <a:bodyPr/>
+          <a:p/>
+        </p:txBody>
       </p:sp>
       <p:sp>
         <p:nvSpPr>
@@ -15582,6 +16462,10 @@
             </a:solidFill>
           </a:ln>
         </p:spPr>
+        <p:txBody xmlns:a="http://schemas.openxmlformats.org/drawingml/2006/main">
+          <a:bodyPr/>
+          <a:p/>
+        </p:txBody>
       </p:sp>
       <p:sp>
         <p:nvSpPr>
@@ -15612,6 +16496,10 @@
             </a:solidFill>
           </a:ln>
         </p:spPr>
+        <p:txBody xmlns:a="http://schemas.openxmlformats.org/drawingml/2006/main">
+          <a:bodyPr/>
+          <a:p/>
+        </p:txBody>
       </p:sp>
       <p:sp>
         <p:nvSpPr>
@@ -15642,6 +16530,10 @@
             </a:solidFill>
           </a:ln>
         </p:spPr>
+        <p:txBody xmlns:a="http://schemas.openxmlformats.org/drawingml/2006/main">
+          <a:bodyPr/>
+          <a:p/>
+        </p:txBody>
       </p:sp>
       <p:sp>
         <p:nvSpPr>
@@ -15672,6 +16564,10 @@
             <a:noFill/>
           </a:ln>
         </p:spPr>
+        <p:txBody xmlns:a="http://schemas.openxmlformats.org/drawingml/2006/main">
+          <a:bodyPr/>
+          <a:p/>
+        </p:txBody>
       </p:sp>
       <p:sp>
         <p:nvSpPr>
@@ -15702,6 +16598,10 @@
             <a:noFill/>
           </a:ln>
         </p:spPr>
+        <p:txBody xmlns:a="http://schemas.openxmlformats.org/drawingml/2006/main">
+          <a:bodyPr/>
+          <a:p/>
+        </p:txBody>
       </p:sp>
       <p:sp>
         <p:nvSpPr>
@@ -15732,6 +16632,10 @@
             <a:noFill/>
           </a:ln>
         </p:spPr>
+        <p:txBody xmlns:a="http://schemas.openxmlformats.org/drawingml/2006/main">
+          <a:bodyPr/>
+          <a:p/>
+        </p:txBody>
       </p:sp>
       <p:sp>
         <p:nvSpPr>
@@ -15762,6 +16666,10 @@
             <a:noFill/>
           </a:ln>
         </p:spPr>
+        <p:txBody xmlns:a="http://schemas.openxmlformats.org/drawingml/2006/main">
+          <a:bodyPr/>
+          <a:p/>
+        </p:txBody>
       </p:sp>
       <p:sp>
         <p:nvSpPr>
@@ -15792,6 +16700,10 @@
             <a:noFill/>
           </a:ln>
         </p:spPr>
+        <p:txBody xmlns:a="http://schemas.openxmlformats.org/drawingml/2006/main">
+          <a:bodyPr/>
+          <a:p/>
+        </p:txBody>
       </p:sp>
       <p:sp>
         <p:nvSpPr>
@@ -15822,6 +16734,10 @@
             <a:noFill/>
           </a:ln>
         </p:spPr>
+        <p:txBody xmlns:a="http://schemas.openxmlformats.org/drawingml/2006/main">
+          <a:bodyPr/>
+          <a:p/>
+        </p:txBody>
       </p:sp>
       <p:sp>
         <p:nvSpPr>
@@ -15852,6 +16768,10 @@
             <a:noFill/>
           </a:ln>
         </p:spPr>
+        <p:txBody xmlns:a="http://schemas.openxmlformats.org/drawingml/2006/main">
+          <a:bodyPr/>
+          <a:p/>
+        </p:txBody>
       </p:sp>
       <p:sp>
         <p:nvSpPr>
@@ -15882,6 +16802,10 @@
             <a:noFill/>
           </a:ln>
         </p:spPr>
+        <p:txBody xmlns:a="http://schemas.openxmlformats.org/drawingml/2006/main">
+          <a:bodyPr/>
+          <a:p/>
+        </p:txBody>
       </p:sp>
       <p:sp>
         <p:nvSpPr>
@@ -15912,6 +16836,10 @@
             <a:noFill/>
           </a:ln>
         </p:spPr>
+        <p:txBody xmlns:a="http://schemas.openxmlformats.org/drawingml/2006/main">
+          <a:bodyPr/>
+          <a:p/>
+        </p:txBody>
       </p:sp>
       <p:sp>
         <p:nvSpPr>
@@ -15942,6 +16870,10 @@
             <a:noFill/>
           </a:ln>
         </p:spPr>
+        <p:txBody xmlns:a="http://schemas.openxmlformats.org/drawingml/2006/main">
+          <a:bodyPr/>
+          <a:p/>
+        </p:txBody>
       </p:sp>
       <p:sp>
         <p:nvSpPr>
@@ -15972,6 +16904,10 @@
             <a:noFill/>
           </a:ln>
         </p:spPr>
+        <p:txBody xmlns:a="http://schemas.openxmlformats.org/drawingml/2006/main">
+          <a:bodyPr/>
+          <a:p/>
+        </p:txBody>
       </p:sp>
       <p:sp>
         <p:nvSpPr>
@@ -16002,6 +16938,10 @@
             <a:noFill/>
           </a:ln>
         </p:spPr>
+        <p:txBody xmlns:a="http://schemas.openxmlformats.org/drawingml/2006/main">
+          <a:bodyPr/>
+          <a:p/>
+        </p:txBody>
       </p:sp>
       <p:sp>
         <p:nvSpPr>
@@ -16032,6 +16972,10 @@
             <a:noFill/>
           </a:ln>
         </p:spPr>
+        <p:txBody xmlns:a="http://schemas.openxmlformats.org/drawingml/2006/main">
+          <a:bodyPr/>
+          <a:p/>
+        </p:txBody>
       </p:sp>
       <p:sp>
         <p:nvSpPr>
@@ -16062,6 +17006,10 @@
             <a:noFill/>
           </a:ln>
         </p:spPr>
+        <p:txBody xmlns:a="http://schemas.openxmlformats.org/drawingml/2006/main">
+          <a:bodyPr/>
+          <a:p/>
+        </p:txBody>
       </p:sp>
       <p:sp>
         <p:nvSpPr>
@@ -16092,6 +17040,10 @@
             <a:noFill/>
           </a:ln>
         </p:spPr>
+        <p:txBody xmlns:a="http://schemas.openxmlformats.org/drawingml/2006/main">
+          <a:bodyPr/>
+          <a:p/>
+        </p:txBody>
       </p:sp>
       <p:sp>
         <p:nvSpPr>
@@ -16122,6 +17074,10 @@
             <a:noFill/>
           </a:ln>
         </p:spPr>
+        <p:txBody xmlns:a="http://schemas.openxmlformats.org/drawingml/2006/main">
+          <a:bodyPr/>
+          <a:p/>
+        </p:txBody>
       </p:sp>
       <p:sp>
         <p:nvSpPr>
@@ -16152,6 +17108,10 @@
             <a:noFill/>
           </a:ln>
         </p:spPr>
+        <p:txBody xmlns:a="http://schemas.openxmlformats.org/drawingml/2006/main">
+          <a:bodyPr/>
+          <a:p/>
+        </p:txBody>
       </p:sp>
       <p:sp>
         <p:nvSpPr>
@@ -16182,6 +17142,10 @@
             <a:noFill/>
           </a:ln>
         </p:spPr>
+        <p:txBody xmlns:a="http://schemas.openxmlformats.org/drawingml/2006/main">
+          <a:bodyPr/>
+          <a:p/>
+        </p:txBody>
       </p:sp>
       <p:sp>
         <p:nvSpPr>
@@ -16212,6 +17176,10 @@
             <a:noFill/>
           </a:ln>
         </p:spPr>
+        <p:txBody xmlns:a="http://schemas.openxmlformats.org/drawingml/2006/main">
+          <a:bodyPr/>
+          <a:p/>
+        </p:txBody>
       </p:sp>
       <p:sp>
         <p:nvSpPr>
@@ -16242,6 +17210,10 @@
             </a:solidFill>
           </a:ln>
         </p:spPr>
+        <p:txBody xmlns:a="http://schemas.openxmlformats.org/drawingml/2006/main">
+          <a:bodyPr/>
+          <a:p/>
+        </p:txBody>
       </p:sp>
       <p:sp>
         <p:nvSpPr>
@@ -16272,6 +17244,10 @@
             <a:noFill/>
           </a:ln>
         </p:spPr>
+        <p:txBody xmlns:a="http://schemas.openxmlformats.org/drawingml/2006/main">
+          <a:bodyPr/>
+          <a:p/>
+        </p:txBody>
       </p:sp>
       <p:sp>
         <p:nvSpPr>
@@ -16416,6 +17392,10 @@
             </a:solidFill>
           </a:ln>
         </p:spPr>
+        <p:txBody xmlns:a="http://schemas.openxmlformats.org/drawingml/2006/main">
+          <a:bodyPr/>
+          <a:p/>
+        </p:txBody>
       </p:sp>
       <p:sp>
         <p:nvSpPr>
@@ -16446,6 +17426,10 @@
             </a:solidFill>
           </a:ln>
         </p:spPr>
+        <p:txBody xmlns:a="http://schemas.openxmlformats.org/drawingml/2006/main">
+          <a:bodyPr/>
+          <a:p/>
+        </p:txBody>
       </p:sp>
       <p:sp>
         <p:nvSpPr>
@@ -16476,6 +17460,10 @@
             </a:solidFill>
           </a:ln>
         </p:spPr>
+        <p:txBody xmlns:a="http://schemas.openxmlformats.org/drawingml/2006/main">
+          <a:bodyPr/>
+          <a:p/>
+        </p:txBody>
       </p:sp>
       <p:sp>
         <p:nvSpPr>
@@ -16506,6 +17494,10 @@
             </a:solidFill>
           </a:ln>
         </p:spPr>
+        <p:txBody xmlns:a="http://schemas.openxmlformats.org/drawingml/2006/main">
+          <a:bodyPr/>
+          <a:p/>
+        </p:txBody>
       </p:sp>
       <p:sp>
         <p:nvSpPr>
@@ -16536,6 +17528,10 @@
             </a:solidFill>
           </a:ln>
         </p:spPr>
+        <p:txBody xmlns:a="http://schemas.openxmlformats.org/drawingml/2006/main">
+          <a:bodyPr/>
+          <a:p/>
+        </p:txBody>
       </p:sp>
       <p:sp>
         <p:nvSpPr>
@@ -16566,6 +17562,10 @@
             </a:solidFill>
           </a:ln>
         </p:spPr>
+        <p:txBody xmlns:a="http://schemas.openxmlformats.org/drawingml/2006/main">
+          <a:bodyPr/>
+          <a:p/>
+        </p:txBody>
       </p:sp>
       <p:sp>
         <p:nvSpPr>
@@ -16596,6 +17596,10 @@
             </a:solidFill>
           </a:ln>
         </p:spPr>
+        <p:txBody xmlns:a="http://schemas.openxmlformats.org/drawingml/2006/main">
+          <a:bodyPr/>
+          <a:p/>
+        </p:txBody>
       </p:sp>
       <p:sp>
         <p:nvSpPr>
@@ -16626,6 +17630,10 @@
             </a:solidFill>
           </a:ln>
         </p:spPr>
+        <p:txBody xmlns:a="http://schemas.openxmlformats.org/drawingml/2006/main">
+          <a:bodyPr/>
+          <a:p/>
+        </p:txBody>
       </p:sp>
       <p:sp>
         <p:nvSpPr>
@@ -16656,6 +17664,10 @@
             </a:solidFill>
           </a:ln>
         </p:spPr>
+        <p:txBody xmlns:a="http://schemas.openxmlformats.org/drawingml/2006/main">
+          <a:bodyPr/>
+          <a:p/>
+        </p:txBody>
       </p:sp>
       <p:sp>
         <p:nvSpPr>
@@ -16686,6 +17698,10 @@
             </a:solidFill>
           </a:ln>
         </p:spPr>
+        <p:txBody xmlns:a="http://schemas.openxmlformats.org/drawingml/2006/main">
+          <a:bodyPr/>
+          <a:p/>
+        </p:txBody>
       </p:sp>
       <p:sp>
         <p:nvSpPr>
@@ -16716,6 +17732,10 @@
             </a:solidFill>
           </a:ln>
         </p:spPr>
+        <p:txBody xmlns:a="http://schemas.openxmlformats.org/drawingml/2006/main">
+          <a:bodyPr/>
+          <a:p/>
+        </p:txBody>
       </p:sp>
       <p:sp>
         <p:nvSpPr>
@@ -16746,6 +17766,10 @@
             </a:solidFill>
           </a:ln>
         </p:spPr>
+        <p:txBody xmlns:a="http://schemas.openxmlformats.org/drawingml/2006/main">
+          <a:bodyPr/>
+          <a:p/>
+        </p:txBody>
       </p:sp>
       <p:sp>
         <p:nvSpPr>
@@ -16776,6 +17800,10 @@
             </a:solidFill>
           </a:ln>
         </p:spPr>
+        <p:txBody xmlns:a="http://schemas.openxmlformats.org/drawingml/2006/main">
+          <a:bodyPr/>
+          <a:p/>
+        </p:txBody>
       </p:sp>
       <p:sp>
         <p:nvSpPr>
@@ -16806,6 +17834,10 @@
             </a:solidFill>
           </a:ln>
         </p:spPr>
+        <p:txBody xmlns:a="http://schemas.openxmlformats.org/drawingml/2006/main">
+          <a:bodyPr/>
+          <a:p/>
+        </p:txBody>
       </p:sp>
       <p:sp>
         <p:nvSpPr>
@@ -16836,6 +17868,10 @@
             </a:solidFill>
           </a:ln>
         </p:spPr>
+        <p:txBody xmlns:a="http://schemas.openxmlformats.org/drawingml/2006/main">
+          <a:bodyPr/>
+          <a:p/>
+        </p:txBody>
       </p:sp>
       <p:sp>
         <p:nvSpPr>
@@ -16866,6 +17902,10 @@
             </a:solidFill>
           </a:ln>
         </p:spPr>
+        <p:txBody xmlns:a="http://schemas.openxmlformats.org/drawingml/2006/main">
+          <a:bodyPr/>
+          <a:p/>
+        </p:txBody>
       </p:sp>
       <p:sp>
         <p:nvSpPr>
@@ -16896,6 +17936,10 @@
             </a:solidFill>
           </a:ln>
         </p:spPr>
+        <p:txBody xmlns:a="http://schemas.openxmlformats.org/drawingml/2006/main">
+          <a:bodyPr/>
+          <a:p/>
+        </p:txBody>
       </p:sp>
       <p:sp>
         <p:nvSpPr>
@@ -16926,6 +17970,10 @@
             </a:solidFill>
           </a:ln>
         </p:spPr>
+        <p:txBody xmlns:a="http://schemas.openxmlformats.org/drawingml/2006/main">
+          <a:bodyPr/>
+          <a:p/>
+        </p:txBody>
       </p:sp>
       <p:sp>
         <p:nvSpPr>
@@ -16956,6 +18004,10 @@
             </a:solidFill>
           </a:ln>
         </p:spPr>
+        <p:txBody xmlns:a="http://schemas.openxmlformats.org/drawingml/2006/main">
+          <a:bodyPr/>
+          <a:p/>
+        </p:txBody>
       </p:sp>
       <p:sp>
         <p:nvSpPr>
@@ -16986,6 +18038,10 @@
             </a:solidFill>
           </a:ln>
         </p:spPr>
+        <p:txBody xmlns:a="http://schemas.openxmlformats.org/drawingml/2006/main">
+          <a:bodyPr/>
+          <a:p/>
+        </p:txBody>
       </p:sp>
       <p:sp>
         <p:nvSpPr>
@@ -17016,6 +18072,10 @@
             <a:noFill/>
           </a:ln>
         </p:spPr>
+        <p:txBody xmlns:a="http://schemas.openxmlformats.org/drawingml/2006/main">
+          <a:bodyPr/>
+          <a:p/>
+        </p:txBody>
       </p:sp>
       <p:sp>
         <p:nvSpPr>
@@ -17046,6 +18106,10 @@
             <a:noFill/>
           </a:ln>
         </p:spPr>
+        <p:txBody xmlns:a="http://schemas.openxmlformats.org/drawingml/2006/main">
+          <a:bodyPr/>
+          <a:p/>
+        </p:txBody>
       </p:sp>
       <p:sp>
         <p:nvSpPr>
@@ -17076,6 +18140,10 @@
             <a:noFill/>
           </a:ln>
         </p:spPr>
+        <p:txBody xmlns:a="http://schemas.openxmlformats.org/drawingml/2006/main">
+          <a:bodyPr/>
+          <a:p/>
+        </p:txBody>
       </p:sp>
       <p:sp>
         <p:nvSpPr>
@@ -17106,6 +18174,10 @@
             <a:noFill/>
           </a:ln>
         </p:spPr>
+        <p:txBody xmlns:a="http://schemas.openxmlformats.org/drawingml/2006/main">
+          <a:bodyPr/>
+          <a:p/>
+        </p:txBody>
       </p:sp>
       <p:sp>
         <p:nvSpPr>
@@ -17136,6 +18208,10 @@
             <a:noFill/>
           </a:ln>
         </p:spPr>
+        <p:txBody xmlns:a="http://schemas.openxmlformats.org/drawingml/2006/main">
+          <a:bodyPr/>
+          <a:p/>
+        </p:txBody>
       </p:sp>
       <p:sp>
         <p:nvSpPr>
@@ -17166,6 +18242,10 @@
             <a:noFill/>
           </a:ln>
         </p:spPr>
+        <p:txBody xmlns:a="http://schemas.openxmlformats.org/drawingml/2006/main">
+          <a:bodyPr/>
+          <a:p/>
+        </p:txBody>
       </p:sp>
       <p:sp>
         <p:nvSpPr>
@@ -17196,6 +18276,10 @@
             <a:noFill/>
           </a:ln>
         </p:spPr>
+        <p:txBody xmlns:a="http://schemas.openxmlformats.org/drawingml/2006/main">
+          <a:bodyPr/>
+          <a:p/>
+        </p:txBody>
       </p:sp>
       <p:sp>
         <p:nvSpPr>
@@ -17226,6 +18310,10 @@
             <a:noFill/>
           </a:ln>
         </p:spPr>
+        <p:txBody xmlns:a="http://schemas.openxmlformats.org/drawingml/2006/main">
+          <a:bodyPr/>
+          <a:p/>
+        </p:txBody>
       </p:sp>
       <p:sp>
         <p:nvSpPr>
@@ -17256,6 +18344,10 @@
             <a:noFill/>
           </a:ln>
         </p:spPr>
+        <p:txBody xmlns:a="http://schemas.openxmlformats.org/drawingml/2006/main">
+          <a:bodyPr/>
+          <a:p/>
+        </p:txBody>
       </p:sp>
       <p:sp>
         <p:nvSpPr>
@@ -17286,6 +18378,10 @@
             <a:noFill/>
           </a:ln>
         </p:spPr>
+        <p:txBody xmlns:a="http://schemas.openxmlformats.org/drawingml/2006/main">
+          <a:bodyPr/>
+          <a:p/>
+        </p:txBody>
       </p:sp>
       <p:sp>
         <p:nvSpPr>
@@ -17316,6 +18412,10 @@
             <a:noFill/>
           </a:ln>
         </p:spPr>
+        <p:txBody xmlns:a="http://schemas.openxmlformats.org/drawingml/2006/main">
+          <a:bodyPr/>
+          <a:p/>
+        </p:txBody>
       </p:sp>
       <p:sp>
         <p:nvSpPr>
@@ -17346,6 +18446,10 @@
             <a:noFill/>
           </a:ln>
         </p:spPr>
+        <p:txBody xmlns:a="http://schemas.openxmlformats.org/drawingml/2006/main">
+          <a:bodyPr/>
+          <a:p/>
+        </p:txBody>
       </p:sp>
       <p:sp>
         <p:nvSpPr>
@@ -17376,6 +18480,10 @@
             <a:noFill/>
           </a:ln>
         </p:spPr>
+        <p:txBody xmlns:a="http://schemas.openxmlformats.org/drawingml/2006/main">
+          <a:bodyPr/>
+          <a:p/>
+        </p:txBody>
       </p:sp>
       <p:sp>
         <p:nvSpPr>
@@ -17406,6 +18514,10 @@
             <a:noFill/>
           </a:ln>
         </p:spPr>
+        <p:txBody xmlns:a="http://schemas.openxmlformats.org/drawingml/2006/main">
+          <a:bodyPr/>
+          <a:p/>
+        </p:txBody>
       </p:sp>
       <p:sp>
         <p:nvSpPr>
@@ -17436,6 +18548,10 @@
             <a:noFill/>
           </a:ln>
         </p:spPr>
+        <p:txBody xmlns:a="http://schemas.openxmlformats.org/drawingml/2006/main">
+          <a:bodyPr/>
+          <a:p/>
+        </p:txBody>
       </p:sp>
       <p:sp>
         <p:nvSpPr>
@@ -17466,6 +18582,10 @@
             <a:noFill/>
           </a:ln>
         </p:spPr>
+        <p:txBody xmlns:a="http://schemas.openxmlformats.org/drawingml/2006/main">
+          <a:bodyPr/>
+          <a:p/>
+        </p:txBody>
       </p:sp>
       <p:sp>
         <p:nvSpPr>
@@ -17496,6 +18616,10 @@
             <a:noFill/>
           </a:ln>
         </p:spPr>
+        <p:txBody xmlns:a="http://schemas.openxmlformats.org/drawingml/2006/main">
+          <a:bodyPr/>
+          <a:p/>
+        </p:txBody>
       </p:sp>
       <p:sp>
         <p:nvSpPr>
@@ -17526,6 +18650,10 @@
             <a:noFill/>
           </a:ln>
         </p:spPr>
+        <p:txBody xmlns:a="http://schemas.openxmlformats.org/drawingml/2006/main">
+          <a:bodyPr/>
+          <a:p/>
+        </p:txBody>
       </p:sp>
       <p:sp>
         <p:nvSpPr>
@@ -17556,6 +18684,10 @@
             </a:solidFill>
           </a:ln>
         </p:spPr>
+        <p:txBody xmlns:a="http://schemas.openxmlformats.org/drawingml/2006/main">
+          <a:bodyPr/>
+          <a:p/>
+        </p:txBody>
       </p:sp>
       <p:sp>
         <p:nvSpPr>
@@ -17586,6 +18718,10 @@
             <a:noFill/>
           </a:ln>
         </p:spPr>
+        <p:txBody xmlns:a="http://schemas.openxmlformats.org/drawingml/2006/main">
+          <a:bodyPr/>
+          <a:p/>
+        </p:txBody>
       </p:sp>
       <p:sp>
         <p:nvSpPr>
@@ -17787,6 +18923,10 @@
             </a:solidFill>
           </a:ln>
         </p:spPr>
+        <p:txBody xmlns:a="http://schemas.openxmlformats.org/drawingml/2006/main">
+          <a:bodyPr/>
+          <a:p/>
+        </p:txBody>
       </p:sp>
       <p:sp>
         <p:nvSpPr>
@@ -17817,6 +18957,10 @@
             </a:solidFill>
           </a:ln>
         </p:spPr>
+        <p:txBody xmlns:a="http://schemas.openxmlformats.org/drawingml/2006/main">
+          <a:bodyPr/>
+          <a:p/>
+        </p:txBody>
       </p:sp>
       <p:sp>
         <p:nvSpPr>
@@ -17847,6 +18991,10 @@
             </a:solidFill>
           </a:ln>
         </p:spPr>
+        <p:txBody xmlns:a="http://schemas.openxmlformats.org/drawingml/2006/main">
+          <a:bodyPr/>
+          <a:p/>
+        </p:txBody>
       </p:sp>
       <p:sp>
         <p:nvSpPr>
@@ -17877,6 +19025,10 @@
             </a:solidFill>
           </a:ln>
         </p:spPr>
+        <p:txBody xmlns:a="http://schemas.openxmlformats.org/drawingml/2006/main">
+          <a:bodyPr/>
+          <a:p/>
+        </p:txBody>
       </p:sp>
       <p:sp>
         <p:nvSpPr>
@@ -17907,6 +19059,10 @@
             </a:solidFill>
           </a:ln>
         </p:spPr>
+        <p:txBody xmlns:a="http://schemas.openxmlformats.org/drawingml/2006/main">
+          <a:bodyPr/>
+          <a:p/>
+        </p:txBody>
       </p:sp>
       <p:sp>
         <p:nvSpPr>
@@ -17937,6 +19093,10 @@
             </a:solidFill>
           </a:ln>
         </p:spPr>
+        <p:txBody xmlns:a="http://schemas.openxmlformats.org/drawingml/2006/main">
+          <a:bodyPr/>
+          <a:p/>
+        </p:txBody>
       </p:sp>
       <p:sp>
         <p:nvSpPr>
@@ -17967,6 +19127,10 @@
             </a:solidFill>
           </a:ln>
         </p:spPr>
+        <p:txBody xmlns:a="http://schemas.openxmlformats.org/drawingml/2006/main">
+          <a:bodyPr/>
+          <a:p/>
+        </p:txBody>
       </p:sp>
       <p:sp>
         <p:nvSpPr>
@@ -17997,6 +19161,10 @@
             </a:solidFill>
           </a:ln>
         </p:spPr>
+        <p:txBody xmlns:a="http://schemas.openxmlformats.org/drawingml/2006/main">
+          <a:bodyPr/>
+          <a:p/>
+        </p:txBody>
       </p:sp>
       <p:sp>
         <p:nvSpPr>
@@ -18027,6 +19195,10 @@
             </a:solidFill>
           </a:ln>
         </p:spPr>
+        <p:txBody xmlns:a="http://schemas.openxmlformats.org/drawingml/2006/main">
+          <a:bodyPr/>
+          <a:p/>
+        </p:txBody>
       </p:sp>
       <p:sp>
         <p:nvSpPr>
@@ -18057,6 +19229,10 @@
             </a:solidFill>
           </a:ln>
         </p:spPr>
+        <p:txBody xmlns:a="http://schemas.openxmlformats.org/drawingml/2006/main">
+          <a:bodyPr/>
+          <a:p/>
+        </p:txBody>
       </p:sp>
       <p:sp>
         <p:nvSpPr>
@@ -18087,6 +19263,10 @@
             </a:solidFill>
           </a:ln>
         </p:spPr>
+        <p:txBody xmlns:a="http://schemas.openxmlformats.org/drawingml/2006/main">
+          <a:bodyPr/>
+          <a:p/>
+        </p:txBody>
       </p:sp>
       <p:sp>
         <p:nvSpPr>
@@ -18117,6 +19297,10 @@
             </a:solidFill>
           </a:ln>
         </p:spPr>
+        <p:txBody xmlns:a="http://schemas.openxmlformats.org/drawingml/2006/main">
+          <a:bodyPr/>
+          <a:p/>
+        </p:txBody>
       </p:sp>
       <p:sp>
         <p:nvSpPr>
@@ -18147,6 +19331,10 @@
             </a:solidFill>
           </a:ln>
         </p:spPr>
+        <p:txBody xmlns:a="http://schemas.openxmlformats.org/drawingml/2006/main">
+          <a:bodyPr/>
+          <a:p/>
+        </p:txBody>
       </p:sp>
       <p:sp>
         <p:nvSpPr>
@@ -18177,6 +19365,10 @@
             </a:solidFill>
           </a:ln>
         </p:spPr>
+        <p:txBody xmlns:a="http://schemas.openxmlformats.org/drawingml/2006/main">
+          <a:bodyPr/>
+          <a:p/>
+        </p:txBody>
       </p:sp>
       <p:sp>
         <p:nvSpPr>
@@ -18207,6 +19399,10 @@
             </a:solidFill>
           </a:ln>
         </p:spPr>
+        <p:txBody xmlns:a="http://schemas.openxmlformats.org/drawingml/2006/main">
+          <a:bodyPr/>
+          <a:p/>
+        </p:txBody>
       </p:sp>
       <p:sp>
         <p:nvSpPr>
@@ -18237,6 +19433,10 @@
             </a:solidFill>
           </a:ln>
         </p:spPr>
+        <p:txBody xmlns:a="http://schemas.openxmlformats.org/drawingml/2006/main">
+          <a:bodyPr/>
+          <a:p/>
+        </p:txBody>
       </p:sp>
       <p:sp>
         <p:nvSpPr>
@@ -18267,6 +19467,10 @@
             </a:solidFill>
           </a:ln>
         </p:spPr>
+        <p:txBody xmlns:a="http://schemas.openxmlformats.org/drawingml/2006/main">
+          <a:bodyPr/>
+          <a:p/>
+        </p:txBody>
       </p:sp>
       <p:sp>
         <p:nvSpPr>
@@ -18297,6 +19501,10 @@
             </a:solidFill>
           </a:ln>
         </p:spPr>
+        <p:txBody xmlns:a="http://schemas.openxmlformats.org/drawingml/2006/main">
+          <a:bodyPr/>
+          <a:p/>
+        </p:txBody>
       </p:sp>
       <p:sp>
         <p:nvSpPr>
@@ -18327,6 +19535,10 @@
             </a:solidFill>
           </a:ln>
         </p:spPr>
+        <p:txBody xmlns:a="http://schemas.openxmlformats.org/drawingml/2006/main">
+          <a:bodyPr/>
+          <a:p/>
+        </p:txBody>
       </p:sp>
       <p:sp>
         <p:nvSpPr>
@@ -18357,6 +19569,10 @@
             </a:solidFill>
           </a:ln>
         </p:spPr>
+        <p:txBody xmlns:a="http://schemas.openxmlformats.org/drawingml/2006/main">
+          <a:bodyPr/>
+          <a:p/>
+        </p:txBody>
       </p:sp>
       <p:sp>
         <p:nvSpPr>
@@ -18387,6 +19603,10 @@
             <a:noFill/>
           </a:ln>
         </p:spPr>
+        <p:txBody xmlns:a="http://schemas.openxmlformats.org/drawingml/2006/main">
+          <a:bodyPr/>
+          <a:p/>
+        </p:txBody>
       </p:sp>
       <p:sp>
         <p:nvSpPr>
@@ -18417,6 +19637,10 @@
             </a:solidFill>
           </a:ln>
         </p:spPr>
+        <p:txBody xmlns:a="http://schemas.openxmlformats.org/drawingml/2006/main">
+          <a:bodyPr/>
+          <a:p/>
+        </p:txBody>
       </p:sp>
       <p:sp>
         <p:nvSpPr>
@@ -18447,6 +19671,10 @@
             <a:noFill/>
           </a:ln>
         </p:spPr>
+        <p:txBody xmlns:a="http://schemas.openxmlformats.org/drawingml/2006/main">
+          <a:bodyPr/>
+          <a:p/>
+        </p:txBody>
       </p:sp>
       <p:sp>
         <p:nvSpPr>
@@ -18591,6 +19819,10 @@
             </a:solidFill>
           </a:ln>
         </p:spPr>
+        <p:txBody xmlns:a="http://schemas.openxmlformats.org/drawingml/2006/main">
+          <a:bodyPr/>
+          <a:p/>
+        </p:txBody>
       </p:sp>
       <p:sp>
         <p:nvSpPr>
@@ -18621,6 +19853,10 @@
             </a:solidFill>
           </a:ln>
         </p:spPr>
+        <p:txBody xmlns:a="http://schemas.openxmlformats.org/drawingml/2006/main">
+          <a:bodyPr/>
+          <a:p/>
+        </p:txBody>
       </p:sp>
       <p:sp>
         <p:nvSpPr>
@@ -18651,6 +19887,10 @@
             </a:solidFill>
           </a:ln>
         </p:spPr>
+        <p:txBody xmlns:a="http://schemas.openxmlformats.org/drawingml/2006/main">
+          <a:bodyPr/>
+          <a:p/>
+        </p:txBody>
       </p:sp>
       <p:sp>
         <p:nvSpPr>
@@ -18681,6 +19921,10 @@
             </a:solidFill>
           </a:ln>
         </p:spPr>
+        <p:txBody xmlns:a="http://schemas.openxmlformats.org/drawingml/2006/main">
+          <a:bodyPr/>
+          <a:p/>
+        </p:txBody>
       </p:sp>
       <p:sp>
         <p:nvSpPr>
@@ -18711,6 +19955,10 @@
             </a:solidFill>
           </a:ln>
         </p:spPr>
+        <p:txBody xmlns:a="http://schemas.openxmlformats.org/drawingml/2006/main">
+          <a:bodyPr/>
+          <a:p/>
+        </p:txBody>
       </p:sp>
       <p:sp>
         <p:nvSpPr>
@@ -18741,6 +19989,10 @@
             </a:solidFill>
           </a:ln>
         </p:spPr>
+        <p:txBody xmlns:a="http://schemas.openxmlformats.org/drawingml/2006/main">
+          <a:bodyPr/>
+          <a:p/>
+        </p:txBody>
       </p:sp>
       <p:sp>
         <p:nvSpPr>
@@ -18771,6 +20023,10 @@
             </a:solidFill>
           </a:ln>
         </p:spPr>
+        <p:txBody xmlns:a="http://schemas.openxmlformats.org/drawingml/2006/main">
+          <a:bodyPr/>
+          <a:p/>
+        </p:txBody>
       </p:sp>
       <p:sp>
         <p:nvSpPr>
@@ -18801,6 +20057,10 @@
             </a:solidFill>
           </a:ln>
         </p:spPr>
+        <p:txBody xmlns:a="http://schemas.openxmlformats.org/drawingml/2006/main">
+          <a:bodyPr/>
+          <a:p/>
+        </p:txBody>
       </p:sp>
       <p:sp>
         <p:nvSpPr>
@@ -18831,6 +20091,10 @@
             </a:solidFill>
           </a:ln>
         </p:spPr>
+        <p:txBody xmlns:a="http://schemas.openxmlformats.org/drawingml/2006/main">
+          <a:bodyPr/>
+          <a:p/>
+        </p:txBody>
       </p:sp>
       <p:sp>
         <p:nvSpPr>
@@ -18861,6 +20125,10 @@
             </a:solidFill>
           </a:ln>
         </p:spPr>
+        <p:txBody xmlns:a="http://schemas.openxmlformats.org/drawingml/2006/main">
+          <a:bodyPr/>
+          <a:p/>
+        </p:txBody>
       </p:sp>
       <p:sp>
         <p:nvSpPr>
@@ -18891,6 +20159,10 @@
             </a:solidFill>
           </a:ln>
         </p:spPr>
+        <p:txBody xmlns:a="http://schemas.openxmlformats.org/drawingml/2006/main">
+          <a:bodyPr/>
+          <a:p/>
+        </p:txBody>
       </p:sp>
       <p:sp>
         <p:nvSpPr>
@@ -18921,6 +20193,10 @@
             </a:solidFill>
           </a:ln>
         </p:spPr>
+        <p:txBody xmlns:a="http://schemas.openxmlformats.org/drawingml/2006/main">
+          <a:bodyPr/>
+          <a:p/>
+        </p:txBody>
       </p:sp>
       <p:sp>
         <p:nvSpPr>
@@ -18951,6 +20227,10 @@
             </a:solidFill>
           </a:ln>
         </p:spPr>
+        <p:txBody xmlns:a="http://schemas.openxmlformats.org/drawingml/2006/main">
+          <a:bodyPr/>
+          <a:p/>
+        </p:txBody>
       </p:sp>
       <p:sp>
         <p:nvSpPr>
@@ -18981,6 +20261,10 @@
             </a:solidFill>
           </a:ln>
         </p:spPr>
+        <p:txBody xmlns:a="http://schemas.openxmlformats.org/drawingml/2006/main">
+          <a:bodyPr/>
+          <a:p/>
+        </p:txBody>
       </p:sp>
       <p:sp>
         <p:nvSpPr>
@@ -19011,6 +20295,10 @@
             </a:solidFill>
           </a:ln>
         </p:spPr>
+        <p:txBody xmlns:a="http://schemas.openxmlformats.org/drawingml/2006/main">
+          <a:bodyPr/>
+          <a:p/>
+        </p:txBody>
       </p:sp>
       <p:sp>
         <p:nvSpPr>
@@ -19041,6 +20329,10 @@
             </a:solidFill>
           </a:ln>
         </p:spPr>
+        <p:txBody xmlns:a="http://schemas.openxmlformats.org/drawingml/2006/main">
+          <a:bodyPr/>
+          <a:p/>
+        </p:txBody>
       </p:sp>
       <p:sp>
         <p:nvSpPr>
@@ -19071,6 +20363,10 @@
             </a:solidFill>
           </a:ln>
         </p:spPr>
+        <p:txBody xmlns:a="http://schemas.openxmlformats.org/drawingml/2006/main">
+          <a:bodyPr/>
+          <a:p/>
+        </p:txBody>
       </p:sp>
       <p:sp>
         <p:nvSpPr>
@@ -19101,6 +20397,10 @@
             </a:solidFill>
           </a:ln>
         </p:spPr>
+        <p:txBody xmlns:a="http://schemas.openxmlformats.org/drawingml/2006/main">
+          <a:bodyPr/>
+          <a:p/>
+        </p:txBody>
       </p:sp>
       <p:sp>
         <p:nvSpPr>
@@ -19131,6 +20431,10 @@
             </a:solidFill>
           </a:ln>
         </p:spPr>
+        <p:txBody xmlns:a="http://schemas.openxmlformats.org/drawingml/2006/main">
+          <a:bodyPr/>
+          <a:p/>
+        </p:txBody>
       </p:sp>
       <p:sp>
         <p:nvSpPr>
@@ -19161,6 +20465,10 @@
             </a:solidFill>
           </a:ln>
         </p:spPr>
+        <p:txBody xmlns:a="http://schemas.openxmlformats.org/drawingml/2006/main">
+          <a:bodyPr/>
+          <a:p/>
+        </p:txBody>
       </p:sp>
       <p:sp>
         <p:nvSpPr>
@@ -19191,6 +20499,10 @@
             <a:noFill/>
           </a:ln>
         </p:spPr>
+        <p:txBody xmlns:a="http://schemas.openxmlformats.org/drawingml/2006/main">
+          <a:bodyPr/>
+          <a:p/>
+        </p:txBody>
       </p:sp>
       <p:sp>
         <p:nvSpPr>
@@ -19221,6 +20533,10 @@
             <a:noFill/>
           </a:ln>
         </p:spPr>
+        <p:txBody xmlns:a="http://schemas.openxmlformats.org/drawingml/2006/main">
+          <a:bodyPr/>
+          <a:p/>
+        </p:txBody>
       </p:sp>
       <p:sp>
         <p:nvSpPr>
@@ -19251,6 +20567,10 @@
             <a:noFill/>
           </a:ln>
         </p:spPr>
+        <p:txBody xmlns:a="http://schemas.openxmlformats.org/drawingml/2006/main">
+          <a:bodyPr/>
+          <a:p/>
+        </p:txBody>
       </p:sp>
       <p:sp>
         <p:nvSpPr>
@@ -19281,6 +20601,10 @@
             </a:solidFill>
           </a:ln>
         </p:spPr>
+        <p:txBody xmlns:a="http://schemas.openxmlformats.org/drawingml/2006/main">
+          <a:bodyPr/>
+          <a:p/>
+        </p:txBody>
       </p:sp>
       <p:sp>
         <p:nvSpPr>
@@ -19425,6 +20749,10 @@
             </a:solidFill>
           </a:ln>
         </p:spPr>
+        <p:txBody xmlns:a="http://schemas.openxmlformats.org/drawingml/2006/main">
+          <a:bodyPr/>
+          <a:p/>
+        </p:txBody>
       </p:sp>
       <p:sp>
         <p:nvSpPr>
@@ -19455,6 +20783,10 @@
             </a:solidFill>
           </a:ln>
         </p:spPr>
+        <p:txBody xmlns:a="http://schemas.openxmlformats.org/drawingml/2006/main">
+          <a:bodyPr/>
+          <a:p/>
+        </p:txBody>
       </p:sp>
       <p:sp>
         <p:nvSpPr>
@@ -19485,6 +20817,10 @@
             </a:solidFill>
           </a:ln>
         </p:spPr>
+        <p:txBody xmlns:a="http://schemas.openxmlformats.org/drawingml/2006/main">
+          <a:bodyPr/>
+          <a:p/>
+        </p:txBody>
       </p:sp>
       <p:sp>
         <p:nvSpPr>
@@ -19515,6 +20851,10 @@
             </a:solidFill>
           </a:ln>
         </p:spPr>
+        <p:txBody xmlns:a="http://schemas.openxmlformats.org/drawingml/2006/main">
+          <a:bodyPr/>
+          <a:p/>
+        </p:txBody>
       </p:sp>
       <p:sp>
         <p:nvSpPr>
@@ -19545,6 +20885,10 @@
             </a:solidFill>
           </a:ln>
         </p:spPr>
+        <p:txBody xmlns:a="http://schemas.openxmlformats.org/drawingml/2006/main">
+          <a:bodyPr/>
+          <a:p/>
+        </p:txBody>
       </p:sp>
       <p:sp>
         <p:nvSpPr>
@@ -19575,6 +20919,10 @@
             </a:solidFill>
           </a:ln>
         </p:spPr>
+        <p:txBody xmlns:a="http://schemas.openxmlformats.org/drawingml/2006/main">
+          <a:bodyPr/>
+          <a:p/>
+        </p:txBody>
       </p:sp>
       <p:sp>
         <p:nvSpPr>
@@ -19605,6 +20953,10 @@
             </a:solidFill>
           </a:ln>
         </p:spPr>
+        <p:txBody xmlns:a="http://schemas.openxmlformats.org/drawingml/2006/main">
+          <a:bodyPr/>
+          <a:p/>
+        </p:txBody>
       </p:sp>
       <p:sp>
         <p:nvSpPr>
@@ -19635,6 +20987,10 @@
             </a:solidFill>
           </a:ln>
         </p:spPr>
+        <p:txBody xmlns:a="http://schemas.openxmlformats.org/drawingml/2006/main">
+          <a:bodyPr/>
+          <a:p/>
+        </p:txBody>
       </p:sp>
       <p:sp>
         <p:nvSpPr>
@@ -19665,6 +21021,10 @@
             </a:solidFill>
           </a:ln>
         </p:spPr>
+        <p:txBody xmlns:a="http://schemas.openxmlformats.org/drawingml/2006/main">
+          <a:bodyPr/>
+          <a:p/>
+        </p:txBody>
       </p:sp>
       <p:sp>
         <p:nvSpPr>
@@ -19695,6 +21055,10 @@
             </a:solidFill>
           </a:ln>
         </p:spPr>
+        <p:txBody xmlns:a="http://schemas.openxmlformats.org/drawingml/2006/main">
+          <a:bodyPr/>
+          <a:p/>
+        </p:txBody>
       </p:sp>
       <p:sp>
         <p:nvSpPr>
@@ -19725,6 +21089,10 @@
             </a:solidFill>
           </a:ln>
         </p:spPr>
+        <p:txBody xmlns:a="http://schemas.openxmlformats.org/drawingml/2006/main">
+          <a:bodyPr/>
+          <a:p/>
+        </p:txBody>
       </p:sp>
       <p:sp>
         <p:nvSpPr>
@@ -19755,6 +21123,10 @@
             </a:solidFill>
           </a:ln>
         </p:spPr>
+        <p:txBody xmlns:a="http://schemas.openxmlformats.org/drawingml/2006/main">
+          <a:bodyPr/>
+          <a:p/>
+        </p:txBody>
       </p:sp>
       <p:sp>
         <p:nvSpPr>
@@ -19785,6 +21157,10 @@
             </a:solidFill>
           </a:ln>
         </p:spPr>
+        <p:txBody xmlns:a="http://schemas.openxmlformats.org/drawingml/2006/main">
+          <a:bodyPr/>
+          <a:p/>
+        </p:txBody>
       </p:sp>
       <p:sp>
         <p:nvSpPr>
@@ -19815,6 +21191,10 @@
             </a:solidFill>
           </a:ln>
         </p:spPr>
+        <p:txBody xmlns:a="http://schemas.openxmlformats.org/drawingml/2006/main">
+          <a:bodyPr/>
+          <a:p/>
+        </p:txBody>
       </p:sp>
       <p:sp>
         <p:nvSpPr>
@@ -19845,6 +21225,10 @@
             </a:solidFill>
           </a:ln>
         </p:spPr>
+        <p:txBody xmlns:a="http://schemas.openxmlformats.org/drawingml/2006/main">
+          <a:bodyPr/>
+          <a:p/>
+        </p:txBody>
       </p:sp>
       <p:sp>
         <p:nvSpPr>
@@ -19875,6 +21259,10 @@
             </a:solidFill>
           </a:ln>
         </p:spPr>
+        <p:txBody xmlns:a="http://schemas.openxmlformats.org/drawingml/2006/main">
+          <a:bodyPr/>
+          <a:p/>
+        </p:txBody>
       </p:sp>
       <p:sp>
         <p:nvSpPr>
@@ -19905,6 +21293,10 @@
             </a:solidFill>
           </a:ln>
         </p:spPr>
+        <p:txBody xmlns:a="http://schemas.openxmlformats.org/drawingml/2006/main">
+          <a:bodyPr/>
+          <a:p/>
+        </p:txBody>
       </p:sp>
       <p:sp>
         <p:nvSpPr>
@@ -19935,6 +21327,10 @@
             </a:solidFill>
           </a:ln>
         </p:spPr>
+        <p:txBody xmlns:a="http://schemas.openxmlformats.org/drawingml/2006/main">
+          <a:bodyPr/>
+          <a:p/>
+        </p:txBody>
       </p:sp>
       <p:sp>
         <p:nvSpPr>
@@ -19965,6 +21361,10 @@
             </a:solidFill>
           </a:ln>
         </p:spPr>
+        <p:txBody xmlns:a="http://schemas.openxmlformats.org/drawingml/2006/main">
+          <a:bodyPr/>
+          <a:p/>
+        </p:txBody>
       </p:sp>
       <p:sp>
         <p:nvSpPr>
@@ -19995,6 +21395,10 @@
             </a:solidFill>
           </a:ln>
         </p:spPr>
+        <p:txBody xmlns:a="http://schemas.openxmlformats.org/drawingml/2006/main">
+          <a:bodyPr/>
+          <a:p/>
+        </p:txBody>
       </p:sp>
       <p:sp>
         <p:nvSpPr>
@@ -20025,6 +21429,10 @@
             <a:noFill/>
           </a:ln>
         </p:spPr>
+        <p:txBody xmlns:a="http://schemas.openxmlformats.org/drawingml/2006/main">
+          <a:bodyPr/>
+          <a:p/>
+        </p:txBody>
       </p:sp>
       <p:sp>
         <p:nvSpPr>
@@ -20055,6 +21463,10 @@
             </a:solidFill>
           </a:ln>
         </p:spPr>
+        <p:txBody xmlns:a="http://schemas.openxmlformats.org/drawingml/2006/main">
+          <a:bodyPr/>
+          <a:p/>
+        </p:txBody>
       </p:sp>
       <p:sp>
         <p:nvSpPr>
@@ -20085,6 +21497,10 @@
             <a:noFill/>
           </a:ln>
         </p:spPr>
+        <p:txBody xmlns:a="http://schemas.openxmlformats.org/drawingml/2006/main">
+          <a:bodyPr/>
+          <a:p/>
+        </p:txBody>
       </p:sp>
       <p:sp>
         <p:nvSpPr>
@@ -20229,6 +21645,10 @@
             </a:solidFill>
           </a:ln>
         </p:spPr>
+        <p:txBody xmlns:a="http://schemas.openxmlformats.org/drawingml/2006/main">
+          <a:bodyPr/>
+          <a:p/>
+        </p:txBody>
       </p:sp>
       <p:sp>
         <p:nvSpPr>
@@ -20259,6 +21679,10 @@
             </a:solidFill>
           </a:ln>
         </p:spPr>
+        <p:txBody xmlns:a="http://schemas.openxmlformats.org/drawingml/2006/main">
+          <a:bodyPr/>
+          <a:p/>
+        </p:txBody>
       </p:sp>
       <p:sp>
         <p:nvSpPr>
@@ -20289,6 +21713,10 @@
             </a:solidFill>
           </a:ln>
         </p:spPr>
+        <p:txBody xmlns:a="http://schemas.openxmlformats.org/drawingml/2006/main">
+          <a:bodyPr/>
+          <a:p/>
+        </p:txBody>
       </p:sp>
       <p:sp>
         <p:nvSpPr>
@@ -20319,6 +21747,10 @@
             </a:solidFill>
           </a:ln>
         </p:spPr>
+        <p:txBody xmlns:a="http://schemas.openxmlformats.org/drawingml/2006/main">
+          <a:bodyPr/>
+          <a:p/>
+        </p:txBody>
       </p:sp>
       <p:sp>
         <p:nvSpPr>
@@ -20349,6 +21781,10 @@
             </a:solidFill>
           </a:ln>
         </p:spPr>
+        <p:txBody xmlns:a="http://schemas.openxmlformats.org/drawingml/2006/main">
+          <a:bodyPr/>
+          <a:p/>
+        </p:txBody>
       </p:sp>
       <p:sp>
         <p:nvSpPr>
@@ -20379,6 +21815,10 @@
             </a:solidFill>
           </a:ln>
         </p:spPr>
+        <p:txBody xmlns:a="http://schemas.openxmlformats.org/drawingml/2006/main">
+          <a:bodyPr/>
+          <a:p/>
+        </p:txBody>
       </p:sp>
       <p:sp>
         <p:nvSpPr>
@@ -20409,6 +21849,10 @@
             </a:solidFill>
           </a:ln>
         </p:spPr>
+        <p:txBody xmlns:a="http://schemas.openxmlformats.org/drawingml/2006/main">
+          <a:bodyPr/>
+          <a:p/>
+        </p:txBody>
       </p:sp>
       <p:sp>
         <p:nvSpPr>
@@ -20439,6 +21883,10 @@
             </a:solidFill>
           </a:ln>
         </p:spPr>
+        <p:txBody xmlns:a="http://schemas.openxmlformats.org/drawingml/2006/main">
+          <a:bodyPr/>
+          <a:p/>
+        </p:txBody>
       </p:sp>
       <p:sp>
         <p:nvSpPr>
@@ -20469,6 +21917,10 @@
             </a:solidFill>
           </a:ln>
         </p:spPr>
+        <p:txBody xmlns:a="http://schemas.openxmlformats.org/drawingml/2006/main">
+          <a:bodyPr/>
+          <a:p/>
+        </p:txBody>
       </p:sp>
       <p:sp>
         <p:nvSpPr>
@@ -20499,6 +21951,10 @@
             </a:solidFill>
           </a:ln>
         </p:spPr>
+        <p:txBody xmlns:a="http://schemas.openxmlformats.org/drawingml/2006/main">
+          <a:bodyPr/>
+          <a:p/>
+        </p:txBody>
       </p:sp>
       <p:sp>
         <p:nvSpPr>
@@ -20529,6 +21985,10 @@
             </a:solidFill>
           </a:ln>
         </p:spPr>
+        <p:txBody xmlns:a="http://schemas.openxmlformats.org/drawingml/2006/main">
+          <a:bodyPr/>
+          <a:p/>
+        </p:txBody>
       </p:sp>
       <p:sp>
         <p:nvSpPr>
@@ -20559,6 +22019,10 @@
             </a:solidFill>
           </a:ln>
         </p:spPr>
+        <p:txBody xmlns:a="http://schemas.openxmlformats.org/drawingml/2006/main">
+          <a:bodyPr/>
+          <a:p/>
+        </p:txBody>
       </p:sp>
       <p:sp>
         <p:nvSpPr>
@@ -20589,6 +22053,10 @@
             </a:solidFill>
           </a:ln>
         </p:spPr>
+        <p:txBody xmlns:a="http://schemas.openxmlformats.org/drawingml/2006/main">
+          <a:bodyPr/>
+          <a:p/>
+        </p:txBody>
       </p:sp>
       <p:sp>
         <p:nvSpPr>
@@ -20619,6 +22087,10 @@
             </a:solidFill>
           </a:ln>
         </p:spPr>
+        <p:txBody xmlns:a="http://schemas.openxmlformats.org/drawingml/2006/main">
+          <a:bodyPr/>
+          <a:p/>
+        </p:txBody>
       </p:sp>
       <p:sp>
         <p:nvSpPr>
@@ -20649,6 +22121,10 @@
             </a:solidFill>
           </a:ln>
         </p:spPr>
+        <p:txBody xmlns:a="http://schemas.openxmlformats.org/drawingml/2006/main">
+          <a:bodyPr/>
+          <a:p/>
+        </p:txBody>
       </p:sp>
       <p:sp>
         <p:nvSpPr>
@@ -20679,6 +22155,10 @@
             </a:solidFill>
           </a:ln>
         </p:spPr>
+        <p:txBody xmlns:a="http://schemas.openxmlformats.org/drawingml/2006/main">
+          <a:bodyPr/>
+          <a:p/>
+        </p:txBody>
       </p:sp>
       <p:sp>
         <p:nvSpPr>
@@ -20709,6 +22189,10 @@
             </a:solidFill>
           </a:ln>
         </p:spPr>
+        <p:txBody xmlns:a="http://schemas.openxmlformats.org/drawingml/2006/main">
+          <a:bodyPr/>
+          <a:p/>
+        </p:txBody>
       </p:sp>
       <p:sp>
         <p:nvSpPr>
@@ -20739,6 +22223,10 @@
             </a:solidFill>
           </a:ln>
         </p:spPr>
+        <p:txBody xmlns:a="http://schemas.openxmlformats.org/drawingml/2006/main">
+          <a:bodyPr/>
+          <a:p/>
+        </p:txBody>
       </p:sp>
       <p:sp>
         <p:nvSpPr>
@@ -20769,6 +22257,10 @@
             </a:solidFill>
           </a:ln>
         </p:spPr>
+        <p:txBody xmlns:a="http://schemas.openxmlformats.org/drawingml/2006/main">
+          <a:bodyPr/>
+          <a:p/>
+        </p:txBody>
       </p:sp>
       <p:sp>
         <p:nvSpPr>
@@ -20799,6 +22291,10 @@
             </a:solidFill>
           </a:ln>
         </p:spPr>
+        <p:txBody xmlns:a="http://schemas.openxmlformats.org/drawingml/2006/main">
+          <a:bodyPr/>
+          <a:p/>
+        </p:txBody>
       </p:sp>
       <p:sp>
         <p:nvSpPr>
@@ -20829,6 +22325,10 @@
             <a:noFill/>
           </a:ln>
         </p:spPr>
+        <p:txBody xmlns:a="http://schemas.openxmlformats.org/drawingml/2006/main">
+          <a:bodyPr/>
+          <a:p/>
+        </p:txBody>
       </p:sp>
       <p:sp>
         <p:nvSpPr>
@@ -20859,6 +22359,10 @@
             </a:solidFill>
           </a:ln>
         </p:spPr>
+        <p:txBody xmlns:a="http://schemas.openxmlformats.org/drawingml/2006/main">
+          <a:bodyPr/>
+          <a:p/>
+        </p:txBody>
       </p:sp>
       <p:sp>
         <p:nvSpPr>
@@ -21003,6 +22507,10 @@
             </a:solidFill>
           </a:ln>
         </p:spPr>
+        <p:txBody xmlns:a="http://schemas.openxmlformats.org/drawingml/2006/main">
+          <a:bodyPr/>
+          <a:p/>
+        </p:txBody>
       </p:sp>
       <p:sp>
         <p:nvSpPr>
@@ -21033,6 +22541,10 @@
             </a:solidFill>
           </a:ln>
         </p:spPr>
+        <p:txBody xmlns:a="http://schemas.openxmlformats.org/drawingml/2006/main">
+          <a:bodyPr/>
+          <a:p/>
+        </p:txBody>
       </p:sp>
       <p:sp>
         <p:nvSpPr>
@@ -21063,6 +22575,10 @@
             </a:solidFill>
           </a:ln>
         </p:spPr>
+        <p:txBody xmlns:a="http://schemas.openxmlformats.org/drawingml/2006/main">
+          <a:bodyPr/>
+          <a:p/>
+        </p:txBody>
       </p:sp>
       <p:sp>
         <p:nvSpPr>
@@ -21093,6 +22609,10 @@
             </a:solidFill>
           </a:ln>
         </p:spPr>
+        <p:txBody xmlns:a="http://schemas.openxmlformats.org/drawingml/2006/main">
+          <a:bodyPr/>
+          <a:p/>
+        </p:txBody>
       </p:sp>
       <p:sp>
         <p:nvSpPr>
@@ -21123,6 +22643,10 @@
             </a:solidFill>
           </a:ln>
         </p:spPr>
+        <p:txBody xmlns:a="http://schemas.openxmlformats.org/drawingml/2006/main">
+          <a:bodyPr/>
+          <a:p/>
+        </p:txBody>
       </p:sp>
       <p:sp>
         <p:nvSpPr>
@@ -21153,6 +22677,10 @@
             </a:solidFill>
           </a:ln>
         </p:spPr>
+        <p:txBody xmlns:a="http://schemas.openxmlformats.org/drawingml/2006/main">
+          <a:bodyPr/>
+          <a:p/>
+        </p:txBody>
       </p:sp>
       <p:sp>
         <p:nvSpPr>
@@ -21183,6 +22711,10 @@
             </a:solidFill>
           </a:ln>
         </p:spPr>
+        <p:txBody xmlns:a="http://schemas.openxmlformats.org/drawingml/2006/main">
+          <a:bodyPr/>
+          <a:p/>
+        </p:txBody>
       </p:sp>
       <p:sp>
         <p:nvSpPr>
@@ -21213,6 +22745,10 @@
             </a:solidFill>
           </a:ln>
         </p:spPr>
+        <p:txBody xmlns:a="http://schemas.openxmlformats.org/drawingml/2006/main">
+          <a:bodyPr/>
+          <a:p/>
+        </p:txBody>
       </p:sp>
       <p:sp>
         <p:nvSpPr>
@@ -21243,6 +22779,10 @@
             </a:solidFill>
           </a:ln>
         </p:spPr>
+        <p:txBody xmlns:a="http://schemas.openxmlformats.org/drawingml/2006/main">
+          <a:bodyPr/>
+          <a:p/>
+        </p:txBody>
       </p:sp>
       <p:sp>
         <p:nvSpPr>
@@ -21273,6 +22813,10 @@
             </a:solidFill>
           </a:ln>
         </p:spPr>
+        <p:txBody xmlns:a="http://schemas.openxmlformats.org/drawingml/2006/main">
+          <a:bodyPr/>
+          <a:p/>
+        </p:txBody>
       </p:sp>
       <p:sp>
         <p:nvSpPr>
@@ -21303,6 +22847,10 @@
             </a:solidFill>
           </a:ln>
         </p:spPr>
+        <p:txBody xmlns:a="http://schemas.openxmlformats.org/drawingml/2006/main">
+          <a:bodyPr/>
+          <a:p/>
+        </p:txBody>
       </p:sp>
       <p:sp>
         <p:nvSpPr>
@@ -21333,6 +22881,10 @@
             </a:solidFill>
           </a:ln>
         </p:spPr>
+        <p:txBody xmlns:a="http://schemas.openxmlformats.org/drawingml/2006/main">
+          <a:bodyPr/>
+          <a:p/>
+        </p:txBody>
       </p:sp>
       <p:sp>
         <p:nvSpPr>
@@ -21363,6 +22915,10 @@
             </a:solidFill>
           </a:ln>
         </p:spPr>
+        <p:txBody xmlns:a="http://schemas.openxmlformats.org/drawingml/2006/main">
+          <a:bodyPr/>
+          <a:p/>
+        </p:txBody>
       </p:sp>
       <p:sp>
         <p:nvSpPr>
@@ -21393,6 +22949,10 @@
             </a:solidFill>
           </a:ln>
         </p:spPr>
+        <p:txBody xmlns:a="http://schemas.openxmlformats.org/drawingml/2006/main">
+          <a:bodyPr/>
+          <a:p/>
+        </p:txBody>
       </p:sp>
       <p:sp>
         <p:nvSpPr>
@@ -21423,6 +22983,10 @@
             </a:solidFill>
           </a:ln>
         </p:spPr>
+        <p:txBody xmlns:a="http://schemas.openxmlformats.org/drawingml/2006/main">
+          <a:bodyPr/>
+          <a:p/>
+        </p:txBody>
       </p:sp>
       <p:sp>
         <p:nvSpPr>
@@ -21453,6 +23017,10 @@
             </a:solidFill>
           </a:ln>
         </p:spPr>
+        <p:txBody xmlns:a="http://schemas.openxmlformats.org/drawingml/2006/main">
+          <a:bodyPr/>
+          <a:p/>
+        </p:txBody>
       </p:sp>
       <p:sp>
         <p:nvSpPr>
@@ -21483,6 +23051,10 @@
             </a:solidFill>
           </a:ln>
         </p:spPr>
+        <p:txBody xmlns:a="http://schemas.openxmlformats.org/drawingml/2006/main">
+          <a:bodyPr/>
+          <a:p/>
+        </p:txBody>
       </p:sp>
       <p:sp>
         <p:nvSpPr>
@@ -21513,6 +23085,10 @@
             </a:solidFill>
           </a:ln>
         </p:spPr>
+        <p:txBody xmlns:a="http://schemas.openxmlformats.org/drawingml/2006/main">
+          <a:bodyPr/>
+          <a:p/>
+        </p:txBody>
       </p:sp>
       <p:sp>
         <p:nvSpPr>
@@ -21543,6 +23119,10 @@
             </a:solidFill>
           </a:ln>
         </p:spPr>
+        <p:txBody xmlns:a="http://schemas.openxmlformats.org/drawingml/2006/main">
+          <a:bodyPr/>
+          <a:p/>
+        </p:txBody>
       </p:sp>
       <p:sp>
         <p:nvSpPr>
@@ -21573,6 +23153,10 @@
             </a:solidFill>
           </a:ln>
         </p:spPr>
+        <p:txBody xmlns:a="http://schemas.openxmlformats.org/drawingml/2006/main">
+          <a:bodyPr/>
+          <a:p/>
+        </p:txBody>
       </p:sp>
       <p:sp>
         <p:nvSpPr>
@@ -21603,6 +23187,10 @@
             <a:noFill/>
           </a:ln>
         </p:spPr>
+        <p:txBody xmlns:a="http://schemas.openxmlformats.org/drawingml/2006/main">
+          <a:bodyPr/>
+          <a:p/>
+        </p:txBody>
       </p:sp>
       <p:sp>
         <p:nvSpPr>
@@ -21633,6 +23221,10 @@
             </a:solidFill>
           </a:ln>
         </p:spPr>
+        <p:txBody xmlns:a="http://schemas.openxmlformats.org/drawingml/2006/main">
+          <a:bodyPr/>
+          <a:p/>
+        </p:txBody>
       </p:sp>
       <p:sp>
         <p:nvSpPr>
@@ -21663,6 +23255,10 @@
             <a:noFill/>
           </a:ln>
         </p:spPr>
+        <p:txBody xmlns:a="http://schemas.openxmlformats.org/drawingml/2006/main">
+          <a:bodyPr/>
+          <a:p/>
+        </p:txBody>
       </p:sp>
       <p:sp>
         <p:nvSpPr>
@@ -21750,6 +23346,10 @@
             <a:noFill/>
           </a:ln>
         </p:spPr>
+        <p:txBody xmlns:a="http://schemas.openxmlformats.org/drawingml/2006/main">
+          <a:bodyPr/>
+          <a:p/>
+        </p:txBody>
       </p:sp>
       <p:sp>
         <p:nvSpPr>
@@ -21894,6 +23494,10 @@
             </a:solidFill>
           </a:ln>
         </p:spPr>
+        <p:txBody xmlns:a="http://schemas.openxmlformats.org/drawingml/2006/main">
+          <a:bodyPr/>
+          <a:p/>
+        </p:txBody>
       </p:sp>
       <p:sp>
         <p:nvSpPr>
@@ -21924,6 +23528,10 @@
             </a:solidFill>
           </a:ln>
         </p:spPr>
+        <p:txBody xmlns:a="http://schemas.openxmlformats.org/drawingml/2006/main">
+          <a:bodyPr/>
+          <a:p/>
+        </p:txBody>
       </p:sp>
       <p:sp>
         <p:nvSpPr>
@@ -21954,6 +23562,10 @@
             </a:solidFill>
           </a:ln>
         </p:spPr>
+        <p:txBody xmlns:a="http://schemas.openxmlformats.org/drawingml/2006/main">
+          <a:bodyPr/>
+          <a:p/>
+        </p:txBody>
       </p:sp>
       <p:sp>
         <p:nvSpPr>
@@ -21984,6 +23596,10 @@
             </a:solidFill>
           </a:ln>
         </p:spPr>
+        <p:txBody xmlns:a="http://schemas.openxmlformats.org/drawingml/2006/main">
+          <a:bodyPr/>
+          <a:p/>
+        </p:txBody>
       </p:sp>
       <p:sp>
         <p:nvSpPr>
@@ -22014,6 +23630,10 @@
             </a:solidFill>
           </a:ln>
         </p:spPr>
+        <p:txBody xmlns:a="http://schemas.openxmlformats.org/drawingml/2006/main">
+          <a:bodyPr/>
+          <a:p/>
+        </p:txBody>
       </p:sp>
       <p:sp>
         <p:nvSpPr>
@@ -22044,6 +23664,10 @@
             </a:solidFill>
           </a:ln>
         </p:spPr>
+        <p:txBody xmlns:a="http://schemas.openxmlformats.org/drawingml/2006/main">
+          <a:bodyPr/>
+          <a:p/>
+        </p:txBody>
       </p:sp>
       <p:sp>
         <p:nvSpPr>
@@ -22074,6 +23698,10 @@
             </a:solidFill>
           </a:ln>
         </p:spPr>
+        <p:txBody xmlns:a="http://schemas.openxmlformats.org/drawingml/2006/main">
+          <a:bodyPr/>
+          <a:p/>
+        </p:txBody>
       </p:sp>
       <p:sp>
         <p:nvSpPr>
@@ -22104,6 +23732,10 @@
             </a:solidFill>
           </a:ln>
         </p:spPr>
+        <p:txBody xmlns:a="http://schemas.openxmlformats.org/drawingml/2006/main">
+          <a:bodyPr/>
+          <a:p/>
+        </p:txBody>
       </p:sp>
       <p:sp>
         <p:nvSpPr>
@@ -22134,6 +23766,10 @@
             </a:solidFill>
           </a:ln>
         </p:spPr>
+        <p:txBody xmlns:a="http://schemas.openxmlformats.org/drawingml/2006/main">
+          <a:bodyPr/>
+          <a:p/>
+        </p:txBody>
       </p:sp>
       <p:sp>
         <p:nvSpPr>
@@ -22164,6 +23800,10 @@
             </a:solidFill>
           </a:ln>
         </p:spPr>
+        <p:txBody xmlns:a="http://schemas.openxmlformats.org/drawingml/2006/main">
+          <a:bodyPr/>
+          <a:p/>
+        </p:txBody>
       </p:sp>
       <p:sp>
         <p:nvSpPr>
@@ -22194,6 +23834,10 @@
             </a:solidFill>
           </a:ln>
         </p:spPr>
+        <p:txBody xmlns:a="http://schemas.openxmlformats.org/drawingml/2006/main">
+          <a:bodyPr/>
+          <a:p/>
+        </p:txBody>
       </p:sp>
       <p:sp>
         <p:nvSpPr>
@@ -22224,6 +23868,10 @@
             </a:solidFill>
           </a:ln>
         </p:spPr>
+        <p:txBody xmlns:a="http://schemas.openxmlformats.org/drawingml/2006/main">
+          <a:bodyPr/>
+          <a:p/>
+        </p:txBody>
       </p:sp>
       <p:sp>
         <p:nvSpPr>
@@ -22254,6 +23902,10 @@
             </a:solidFill>
           </a:ln>
         </p:spPr>
+        <p:txBody xmlns:a="http://schemas.openxmlformats.org/drawingml/2006/main">
+          <a:bodyPr/>
+          <a:p/>
+        </p:txBody>
       </p:sp>
       <p:sp>
         <p:nvSpPr>
@@ -22284,6 +23936,10 @@
             </a:solidFill>
           </a:ln>
         </p:spPr>
+        <p:txBody xmlns:a="http://schemas.openxmlformats.org/drawingml/2006/main">
+          <a:bodyPr/>
+          <a:p/>
+        </p:txBody>
       </p:sp>
       <p:sp>
         <p:nvSpPr>
@@ -22314,6 +23970,10 @@
             </a:solidFill>
           </a:ln>
         </p:spPr>
+        <p:txBody xmlns:a="http://schemas.openxmlformats.org/drawingml/2006/main">
+          <a:bodyPr/>
+          <a:p/>
+        </p:txBody>
       </p:sp>
       <p:sp>
         <p:nvSpPr>
@@ -22344,6 +24004,10 @@
             </a:solidFill>
           </a:ln>
         </p:spPr>
+        <p:txBody xmlns:a="http://schemas.openxmlformats.org/drawingml/2006/main">
+          <a:bodyPr/>
+          <a:p/>
+        </p:txBody>
       </p:sp>
       <p:sp>
         <p:nvSpPr>
@@ -22374,6 +24038,10 @@
             </a:solidFill>
           </a:ln>
         </p:spPr>
+        <p:txBody xmlns:a="http://schemas.openxmlformats.org/drawingml/2006/main">
+          <a:bodyPr/>
+          <a:p/>
+        </p:txBody>
       </p:sp>
       <p:sp>
         <p:nvSpPr>
@@ -22404,6 +24072,10 @@
             </a:solidFill>
           </a:ln>
         </p:spPr>
+        <p:txBody xmlns:a="http://schemas.openxmlformats.org/drawingml/2006/main">
+          <a:bodyPr/>
+          <a:p/>
+        </p:txBody>
       </p:sp>
       <p:sp>
         <p:nvSpPr>
@@ -22434,6 +24106,10 @@
             </a:solidFill>
           </a:ln>
         </p:spPr>
+        <p:txBody xmlns:a="http://schemas.openxmlformats.org/drawingml/2006/main">
+          <a:bodyPr/>
+          <a:p/>
+        </p:txBody>
       </p:sp>
       <p:sp>
         <p:nvSpPr>
@@ -22464,6 +24140,10 @@
             </a:solidFill>
           </a:ln>
         </p:spPr>
+        <p:txBody xmlns:a="http://schemas.openxmlformats.org/drawingml/2006/main">
+          <a:bodyPr/>
+          <a:p/>
+        </p:txBody>
       </p:sp>
       <p:sp>
         <p:nvSpPr>
@@ -22496,6 +24176,10 @@
             </a:solidFill>
           </a:ln>
         </p:spPr>
+        <p:txBody xmlns:a="http://schemas.openxmlformats.org/drawingml/2006/main">
+          <a:bodyPr/>
+          <a:p/>
+        </p:txBody>
       </p:sp>
       <p:sp>
         <p:nvSpPr>
@@ -22528,6 +24212,10 @@
             </a:solidFill>
           </a:ln>
         </p:spPr>
+        <p:txBody xmlns:a="http://schemas.openxmlformats.org/drawingml/2006/main">
+          <a:bodyPr/>
+          <a:p/>
+        </p:txBody>
       </p:sp>
       <p:sp>
         <p:nvSpPr>
@@ -22558,6 +24246,10 @@
             </a:solidFill>
           </a:ln>
         </p:spPr>
+        <p:txBody xmlns:a="http://schemas.openxmlformats.org/drawingml/2006/main">
+          <a:bodyPr/>
+          <a:p/>
+        </p:txBody>
       </p:sp>
       <p:sp>
         <p:nvSpPr>
@@ -22702,6 +24394,10 @@
             </a:solidFill>
           </a:ln>
         </p:spPr>
+        <p:txBody xmlns:a="http://schemas.openxmlformats.org/drawingml/2006/main">
+          <a:bodyPr/>
+          <a:p/>
+        </p:txBody>
       </p:sp>
       <p:sp>
         <p:nvSpPr>
@@ -22732,6 +24428,10 @@
             </a:solidFill>
           </a:ln>
         </p:spPr>
+        <p:txBody xmlns:a="http://schemas.openxmlformats.org/drawingml/2006/main">
+          <a:bodyPr/>
+          <a:p/>
+        </p:txBody>
       </p:sp>
       <p:sp>
         <p:nvSpPr>
@@ -22762,6 +24462,10 @@
             </a:solidFill>
           </a:ln>
         </p:spPr>
+        <p:txBody xmlns:a="http://schemas.openxmlformats.org/drawingml/2006/main">
+          <a:bodyPr/>
+          <a:p/>
+        </p:txBody>
       </p:sp>
       <p:sp>
         <p:nvSpPr>
@@ -22792,6 +24496,10 @@
             </a:solidFill>
           </a:ln>
         </p:spPr>
+        <p:txBody xmlns:a="http://schemas.openxmlformats.org/drawingml/2006/main">
+          <a:bodyPr/>
+          <a:p/>
+        </p:txBody>
       </p:sp>
       <p:sp>
         <p:nvSpPr>
@@ -22822,6 +24530,10 @@
             </a:solidFill>
           </a:ln>
         </p:spPr>
+        <p:txBody xmlns:a="http://schemas.openxmlformats.org/drawingml/2006/main">
+          <a:bodyPr/>
+          <a:p/>
+        </p:txBody>
       </p:sp>
       <p:sp>
         <p:nvSpPr>
@@ -22852,6 +24564,10 @@
             </a:solidFill>
           </a:ln>
         </p:spPr>
+        <p:txBody xmlns:a="http://schemas.openxmlformats.org/drawingml/2006/main">
+          <a:bodyPr/>
+          <a:p/>
+        </p:txBody>
       </p:sp>
       <p:sp>
         <p:nvSpPr>
@@ -22882,6 +24598,10 @@
             </a:solidFill>
           </a:ln>
         </p:spPr>
+        <p:txBody xmlns:a="http://schemas.openxmlformats.org/drawingml/2006/main">
+          <a:bodyPr/>
+          <a:p/>
+        </p:txBody>
       </p:sp>
       <p:sp>
         <p:nvSpPr>
@@ -22912,6 +24632,10 @@
             </a:solidFill>
           </a:ln>
         </p:spPr>
+        <p:txBody xmlns:a="http://schemas.openxmlformats.org/drawingml/2006/main">
+          <a:bodyPr/>
+          <a:p/>
+        </p:txBody>
       </p:sp>
       <p:sp>
         <p:nvSpPr>
@@ -22942,6 +24666,10 @@
             </a:solidFill>
           </a:ln>
         </p:spPr>
+        <p:txBody xmlns:a="http://schemas.openxmlformats.org/drawingml/2006/main">
+          <a:bodyPr/>
+          <a:p/>
+        </p:txBody>
       </p:sp>
       <p:sp>
         <p:nvSpPr>
@@ -22972,6 +24700,10 @@
             </a:solidFill>
           </a:ln>
         </p:spPr>
+        <p:txBody xmlns:a="http://schemas.openxmlformats.org/drawingml/2006/main">
+          <a:bodyPr/>
+          <a:p/>
+        </p:txBody>
       </p:sp>
       <p:sp>
         <p:nvSpPr>
@@ -23002,6 +24734,10 @@
             </a:solidFill>
           </a:ln>
         </p:spPr>
+        <p:txBody xmlns:a="http://schemas.openxmlformats.org/drawingml/2006/main">
+          <a:bodyPr/>
+          <a:p/>
+        </p:txBody>
       </p:sp>
       <p:sp>
         <p:nvSpPr>
@@ -23032,6 +24768,10 @@
             </a:solidFill>
           </a:ln>
         </p:spPr>
+        <p:txBody xmlns:a="http://schemas.openxmlformats.org/drawingml/2006/main">
+          <a:bodyPr/>
+          <a:p/>
+        </p:txBody>
       </p:sp>
       <p:sp>
         <p:nvSpPr>
@@ -23062,6 +24802,10 @@
             </a:solidFill>
           </a:ln>
         </p:spPr>
+        <p:txBody xmlns:a="http://schemas.openxmlformats.org/drawingml/2006/main">
+          <a:bodyPr/>
+          <a:p/>
+        </p:txBody>
       </p:sp>
       <p:sp>
         <p:nvSpPr>
@@ -23092,6 +24836,10 @@
             </a:solidFill>
           </a:ln>
         </p:spPr>
+        <p:txBody xmlns:a="http://schemas.openxmlformats.org/drawingml/2006/main">
+          <a:bodyPr/>
+          <a:p/>
+        </p:txBody>
       </p:sp>
       <p:sp>
         <p:nvSpPr>
@@ -23122,6 +24870,10 @@
             </a:solidFill>
           </a:ln>
         </p:spPr>
+        <p:txBody xmlns:a="http://schemas.openxmlformats.org/drawingml/2006/main">
+          <a:bodyPr/>
+          <a:p/>
+        </p:txBody>
       </p:sp>
       <p:sp>
         <p:nvSpPr>
@@ -23152,6 +24904,10 @@
             </a:solidFill>
           </a:ln>
         </p:spPr>
+        <p:txBody xmlns:a="http://schemas.openxmlformats.org/drawingml/2006/main">
+          <a:bodyPr/>
+          <a:p/>
+        </p:txBody>
       </p:sp>
       <p:sp>
         <p:nvSpPr>
@@ -23182,6 +24938,10 @@
             </a:solidFill>
           </a:ln>
         </p:spPr>
+        <p:txBody xmlns:a="http://schemas.openxmlformats.org/drawingml/2006/main">
+          <a:bodyPr/>
+          <a:p/>
+        </p:txBody>
       </p:sp>
       <p:sp>
         <p:nvSpPr>
@@ -23212,6 +24972,10 @@
             </a:solidFill>
           </a:ln>
         </p:spPr>
+        <p:txBody xmlns:a="http://schemas.openxmlformats.org/drawingml/2006/main">
+          <a:bodyPr/>
+          <a:p/>
+        </p:txBody>
       </p:sp>
       <p:sp>
         <p:nvSpPr>
@@ -23242,6 +25006,10 @@
             </a:solidFill>
           </a:ln>
         </p:spPr>
+        <p:txBody xmlns:a="http://schemas.openxmlformats.org/drawingml/2006/main">
+          <a:bodyPr/>
+          <a:p/>
+        </p:txBody>
       </p:sp>
       <p:sp>
         <p:nvSpPr>
@@ -23272,6 +25040,10 @@
             </a:solidFill>
           </a:ln>
         </p:spPr>
+        <p:txBody xmlns:a="http://schemas.openxmlformats.org/drawingml/2006/main">
+          <a:bodyPr/>
+          <a:p/>
+        </p:txBody>
       </p:sp>
       <p:sp>
         <p:nvSpPr>
@@ -23302,6 +25074,10 @@
             <a:noFill/>
           </a:ln>
         </p:spPr>
+        <p:txBody xmlns:a="http://schemas.openxmlformats.org/drawingml/2006/main">
+          <a:bodyPr/>
+          <a:p/>
+        </p:txBody>
       </p:sp>
       <p:sp>
         <p:nvSpPr>
@@ -23332,6 +25108,10 @@
             <a:noFill/>
           </a:ln>
         </p:spPr>
+        <p:txBody xmlns:a="http://schemas.openxmlformats.org/drawingml/2006/main">
+          <a:bodyPr/>
+          <a:p/>
+        </p:txBody>
       </p:sp>
       <p:sp>
         <p:nvSpPr>
@@ -23362,6 +25142,10 @@
             <a:noFill/>
           </a:ln>
         </p:spPr>
+        <p:txBody xmlns:a="http://schemas.openxmlformats.org/drawingml/2006/main">
+          <a:bodyPr/>
+          <a:p/>
+        </p:txBody>
       </p:sp>
       <p:sp>
         <p:nvSpPr>
@@ -23392,6 +25176,10 @@
             </a:solidFill>
           </a:ln>
         </p:spPr>
+        <p:txBody xmlns:a="http://schemas.openxmlformats.org/drawingml/2006/main">
+          <a:bodyPr/>
+          <a:p/>
+        </p:txBody>
       </p:sp>
       <p:sp>
         <p:nvSpPr>
@@ -23422,6 +25210,10 @@
             <a:noFill/>
           </a:ln>
         </p:spPr>
+        <p:txBody xmlns:a="http://schemas.openxmlformats.org/drawingml/2006/main">
+          <a:bodyPr/>
+          <a:p/>
+        </p:txBody>
       </p:sp>
       <p:sp>
         <p:nvSpPr>
@@ -23509,6 +25301,10 @@
             <a:noFill/>
           </a:ln>
         </p:spPr>
+        <p:txBody xmlns:a="http://schemas.openxmlformats.org/drawingml/2006/main">
+          <a:bodyPr/>
+          <a:p/>
+        </p:txBody>
       </p:sp>
       <p:sp>
         <p:nvSpPr>
@@ -23596,6 +25392,10 @@
             <a:noFill/>
           </a:ln>
         </p:spPr>
+        <p:txBody xmlns:a="http://schemas.openxmlformats.org/drawingml/2006/main">
+          <a:bodyPr/>
+          <a:p/>
+        </p:txBody>
       </p:sp>
       <p:sp>
         <p:nvSpPr>
@@ -23685,6 +25485,10 @@
             </a:solidFill>
           </a:ln>
         </p:spPr>
+        <p:txBody xmlns:a="http://schemas.openxmlformats.org/drawingml/2006/main">
+          <a:bodyPr/>
+          <a:p/>
+        </p:txBody>
       </p:sp>
       <p:sp>
         <p:nvSpPr>
@@ -23772,6 +25576,10 @@
             <a:noFill/>
           </a:ln>
         </p:spPr>
+        <p:txBody xmlns:a="http://schemas.openxmlformats.org/drawingml/2006/main">
+          <a:bodyPr/>
+          <a:p/>
+        </p:txBody>
       </p:sp>
       <p:sp>
         <p:nvSpPr>
@@ -23882,7 +25690,7 @@
                 <a:ea typeface="Arial"/>
                 <a:cs typeface="Arial"/>
               </a:rPr>
-              <a:t>As of Sep 26, 2026</a:t>
+              <a:t>As of Sep 29, 2026</a:t>
             </a:r>
           </a:p>
         </p:txBody>
@@ -24230,6 +26038,10 @@
             <a:noFill/>
           </a:ln>
         </p:spPr>
+        <p:txBody xmlns:a="http://schemas.openxmlformats.org/drawingml/2006/main">
+          <a:bodyPr/>
+          <a:p/>
+        </p:txBody>
       </p:sp>
       <p:sp>
         <p:nvSpPr>
@@ -24602,6 +26414,10 @@
             <a:noFill/>
           </a:ln>
         </p:spPr>
+        <p:txBody xmlns:a="http://schemas.openxmlformats.org/drawingml/2006/main">
+          <a:bodyPr/>
+          <a:p/>
+        </p:txBody>
       </p:sp>
       <p:sp>
         <p:nvSpPr>
@@ -24860,6 +26676,10 @@
             </a:solidFill>
           </a:ln>
         </p:spPr>
+        <p:txBody xmlns:a="http://schemas.openxmlformats.org/drawingml/2006/main">
+          <a:bodyPr/>
+          <a:p/>
+        </p:txBody>
       </p:sp>
       <p:sp>
         <p:nvSpPr>
@@ -24890,6 +26710,10 @@
             </a:solidFill>
           </a:ln>
         </p:spPr>
+        <p:txBody xmlns:a="http://schemas.openxmlformats.org/drawingml/2006/main">
+          <a:bodyPr/>
+          <a:p/>
+        </p:txBody>
       </p:sp>
       <p:sp>
         <p:nvSpPr>
@@ -24920,6 +26744,10 @@
             </a:solidFill>
           </a:ln>
         </p:spPr>
+        <p:txBody xmlns:a="http://schemas.openxmlformats.org/drawingml/2006/main">
+          <a:bodyPr/>
+          <a:p/>
+        </p:txBody>
       </p:sp>
       <p:sp>
         <p:nvSpPr>
@@ -24950,6 +26778,10 @@
             <a:noFill/>
           </a:ln>
         </p:spPr>
+        <p:txBody xmlns:a="http://schemas.openxmlformats.org/drawingml/2006/main">
+          <a:bodyPr/>
+          <a:p/>
+        </p:txBody>
       </p:sp>
       <p:sp>
         <p:nvSpPr>
@@ -24980,6 +26812,10 @@
             </a:solidFill>
           </a:ln>
         </p:spPr>
+        <p:txBody xmlns:a="http://schemas.openxmlformats.org/drawingml/2006/main">
+          <a:bodyPr/>
+          <a:p/>
+        </p:txBody>
       </p:sp>
       <p:sp>
         <p:nvSpPr>
@@ -25010,6 +26846,10 @@
             <a:noFill/>
           </a:ln>
         </p:spPr>
+        <p:txBody xmlns:a="http://schemas.openxmlformats.org/drawingml/2006/main">
+          <a:bodyPr/>
+          <a:p/>
+        </p:txBody>
       </p:sp>
       <p:sp>
         <p:nvSpPr>
@@ -25211,6 +27051,10 @@
             </a:solidFill>
           </a:ln>
         </p:spPr>
+        <p:txBody xmlns:a="http://schemas.openxmlformats.org/drawingml/2006/main">
+          <a:bodyPr/>
+          <a:p/>
+        </p:txBody>
       </p:sp>
       <p:sp>
         <p:nvSpPr>
@@ -25241,6 +27085,10 @@
             </a:solidFill>
           </a:ln>
         </p:spPr>
+        <p:txBody xmlns:a="http://schemas.openxmlformats.org/drawingml/2006/main">
+          <a:bodyPr/>
+          <a:p/>
+        </p:txBody>
       </p:sp>
       <p:sp>
         <p:nvSpPr>
@@ -25271,6 +27119,10 @@
             </a:solidFill>
           </a:ln>
         </p:spPr>
+        <p:txBody xmlns:a="http://schemas.openxmlformats.org/drawingml/2006/main">
+          <a:bodyPr/>
+          <a:p/>
+        </p:txBody>
       </p:sp>
       <p:sp>
         <p:nvSpPr>
@@ -25301,6 +27153,10 @@
             <a:noFill/>
           </a:ln>
         </p:spPr>
+        <p:txBody xmlns:a="http://schemas.openxmlformats.org/drawingml/2006/main">
+          <a:bodyPr/>
+          <a:p/>
+        </p:txBody>
       </p:sp>
       <p:sp>
         <p:nvSpPr>
@@ -25331,6 +27187,10 @@
             </a:solidFill>
           </a:ln>
         </p:spPr>
+        <p:txBody xmlns:a="http://schemas.openxmlformats.org/drawingml/2006/main">
+          <a:bodyPr/>
+          <a:p/>
+        </p:txBody>
       </p:sp>
       <p:sp>
         <p:nvSpPr>
@@ -25532,6 +27392,10 @@
             </a:solidFill>
           </a:ln>
         </p:spPr>
+        <p:txBody xmlns:a="http://schemas.openxmlformats.org/drawingml/2006/main">
+          <a:bodyPr/>
+          <a:p/>
+        </p:txBody>
       </p:sp>
       <p:sp>
         <p:nvSpPr>
@@ -25562,6 +27426,10 @@
             </a:solidFill>
           </a:ln>
         </p:spPr>
+        <p:txBody xmlns:a="http://schemas.openxmlformats.org/drawingml/2006/main">
+          <a:bodyPr/>
+          <a:p/>
+        </p:txBody>
       </p:sp>
       <p:sp>
         <p:nvSpPr>
@@ -25592,6 +27460,10 @@
             </a:solidFill>
           </a:ln>
         </p:spPr>
+        <p:txBody xmlns:a="http://schemas.openxmlformats.org/drawingml/2006/main">
+          <a:bodyPr/>
+          <a:p/>
+        </p:txBody>
       </p:sp>
       <p:sp>
         <p:nvSpPr>
@@ -25622,6 +27494,10 @@
             <a:noFill/>
           </a:ln>
         </p:spPr>
+        <p:txBody xmlns:a="http://schemas.openxmlformats.org/drawingml/2006/main">
+          <a:bodyPr/>
+          <a:p/>
+        </p:txBody>
       </p:sp>
       <p:sp>
         <p:nvSpPr>
@@ -25652,6 +27528,10 @@
             </a:solidFill>
           </a:ln>
         </p:spPr>
+        <p:txBody xmlns:a="http://schemas.openxmlformats.org/drawingml/2006/main">
+          <a:bodyPr/>
+          <a:p/>
+        </p:txBody>
       </p:sp>
       <p:sp>
         <p:nvSpPr>
@@ -25682,6 +27562,10 @@
             <a:noFill/>
           </a:ln>
         </p:spPr>
+        <p:txBody xmlns:a="http://schemas.openxmlformats.org/drawingml/2006/main">
+          <a:bodyPr/>
+          <a:p/>
+        </p:txBody>
       </p:sp>
       <p:sp>
         <p:nvSpPr>
@@ -25769,6 +27653,10 @@
             <a:noFill/>
           </a:ln>
         </p:spPr>
+        <p:txBody xmlns:a="http://schemas.openxmlformats.org/drawingml/2006/main">
+          <a:bodyPr/>
+          <a:p/>
+        </p:txBody>
       </p:sp>
       <p:sp>
         <p:nvSpPr>
@@ -25970,6 +27858,10 @@
             </a:solidFill>
           </a:ln>
         </p:spPr>
+        <p:txBody xmlns:a="http://schemas.openxmlformats.org/drawingml/2006/main">
+          <a:bodyPr/>
+          <a:p/>
+        </p:txBody>
       </p:sp>
       <p:sp>
         <p:nvSpPr>
@@ -26000,6 +27892,10 @@
             </a:solidFill>
           </a:ln>
         </p:spPr>
+        <p:txBody xmlns:a="http://schemas.openxmlformats.org/drawingml/2006/main">
+          <a:bodyPr/>
+          <a:p/>
+        </p:txBody>
       </p:sp>
       <p:sp>
         <p:nvSpPr>
@@ -26030,6 +27926,10 @@
             </a:solidFill>
           </a:ln>
         </p:spPr>
+        <p:txBody xmlns:a="http://schemas.openxmlformats.org/drawingml/2006/main">
+          <a:bodyPr/>
+          <a:p/>
+        </p:txBody>
       </p:sp>
       <p:sp>
         <p:nvSpPr>
@@ -26060,6 +27960,10 @@
             <a:noFill/>
           </a:ln>
         </p:spPr>
+        <p:txBody xmlns:a="http://schemas.openxmlformats.org/drawingml/2006/main">
+          <a:bodyPr/>
+          <a:p/>
+        </p:txBody>
       </p:sp>
       <p:sp>
         <p:nvSpPr>
@@ -26090,6 +27994,10 @@
             </a:solidFill>
           </a:ln>
         </p:spPr>
+        <p:txBody xmlns:a="http://schemas.openxmlformats.org/drawingml/2006/main">
+          <a:bodyPr/>
+          <a:p/>
+        </p:txBody>
       </p:sp>
       <p:sp>
         <p:nvSpPr>
@@ -26291,6 +28199,10 @@
             </a:solidFill>
           </a:ln>
         </p:spPr>
+        <p:txBody xmlns:a="http://schemas.openxmlformats.org/drawingml/2006/main">
+          <a:bodyPr/>
+          <a:p/>
+        </p:txBody>
       </p:sp>
       <p:sp>
         <p:nvSpPr>
@@ -26321,6 +28233,10 @@
             </a:solidFill>
           </a:ln>
         </p:spPr>
+        <p:txBody xmlns:a="http://schemas.openxmlformats.org/drawingml/2006/main">
+          <a:bodyPr/>
+          <a:p/>
+        </p:txBody>
       </p:sp>
       <p:sp>
         <p:nvSpPr>
@@ -26351,6 +28267,10 @@
             </a:solidFill>
           </a:ln>
         </p:spPr>
+        <p:txBody xmlns:a="http://schemas.openxmlformats.org/drawingml/2006/main">
+          <a:bodyPr/>
+          <a:p/>
+        </p:txBody>
       </p:sp>
       <p:sp>
         <p:nvSpPr>
@@ -26381,6 +28301,10 @@
             <a:noFill/>
           </a:ln>
         </p:spPr>
+        <p:txBody xmlns:a="http://schemas.openxmlformats.org/drawingml/2006/main">
+          <a:bodyPr/>
+          <a:p/>
+        </p:txBody>
       </p:sp>
       <p:sp>
         <p:nvSpPr>
@@ -26411,6 +28335,10 @@
             </a:solidFill>
           </a:ln>
         </p:spPr>
+        <p:txBody xmlns:a="http://schemas.openxmlformats.org/drawingml/2006/main">
+          <a:bodyPr/>
+          <a:p/>
+        </p:txBody>
       </p:sp>
       <p:sp>
         <p:nvSpPr>
@@ -26441,6 +28369,10 @@
             <a:noFill/>
           </a:ln>
         </p:spPr>
+        <p:txBody xmlns:a="http://schemas.openxmlformats.org/drawingml/2006/main">
+          <a:bodyPr/>
+          <a:p/>
+        </p:txBody>
       </p:sp>
       <p:sp>
         <p:nvSpPr>
@@ -26642,6 +28574,10 @@
             </a:solidFill>
           </a:ln>
         </p:spPr>
+        <p:txBody xmlns:a="http://schemas.openxmlformats.org/drawingml/2006/main">
+          <a:bodyPr/>
+          <a:p/>
+        </p:txBody>
       </p:sp>
       <p:sp>
         <p:nvSpPr>
@@ -26672,6 +28608,10 @@
             </a:solidFill>
           </a:ln>
         </p:spPr>
+        <p:txBody xmlns:a="http://schemas.openxmlformats.org/drawingml/2006/main">
+          <a:bodyPr/>
+          <a:p/>
+        </p:txBody>
       </p:sp>
       <p:sp>
         <p:nvSpPr>
@@ -26702,6 +28642,10 @@
             </a:solidFill>
           </a:ln>
         </p:spPr>
+        <p:txBody xmlns:a="http://schemas.openxmlformats.org/drawingml/2006/main">
+          <a:bodyPr/>
+          <a:p/>
+        </p:txBody>
       </p:sp>
       <p:sp>
         <p:nvSpPr>
@@ -26732,6 +28676,10 @@
             <a:noFill/>
           </a:ln>
         </p:spPr>
+        <p:txBody xmlns:a="http://schemas.openxmlformats.org/drawingml/2006/main">
+          <a:bodyPr/>
+          <a:p/>
+        </p:txBody>
       </p:sp>
       <p:sp>
         <p:nvSpPr>
@@ -26762,6 +28710,10 @@
             </a:solidFill>
           </a:ln>
         </p:spPr>
+        <p:txBody xmlns:a="http://schemas.openxmlformats.org/drawingml/2006/main">
+          <a:bodyPr/>
+          <a:p/>
+        </p:txBody>
       </p:sp>
       <p:sp>
         <p:nvSpPr>
@@ -26792,6 +28744,10 @@
             <a:noFill/>
           </a:ln>
         </p:spPr>
+        <p:txBody xmlns:a="http://schemas.openxmlformats.org/drawingml/2006/main">
+          <a:bodyPr/>
+          <a:p/>
+        </p:txBody>
       </p:sp>
       <p:sp>
         <p:nvSpPr>
@@ -26902,7 +28858,7 @@
                 <a:ea typeface="Arial"/>
                 <a:cs typeface="Arial"/>
               </a:rPr>
-              <a:t>8. Map BioLangFusion methods to our inputs</a:t>
+              <a:t>8. Map BioLangFusion/IsoFormer inputs incl. DNA</a:t>
             </a:r>
           </a:p>
         </p:txBody>
@@ -27050,6 +29006,10 @@
             </a:solidFill>
           </a:ln>
         </p:spPr>
+        <p:txBody xmlns:a="http://schemas.openxmlformats.org/drawingml/2006/main">
+          <a:bodyPr/>
+          <a:p/>
+        </p:txBody>
       </p:sp>
       <p:sp>
         <p:nvSpPr>
@@ -27080,6 +29040,10 @@
             </a:solidFill>
           </a:ln>
         </p:spPr>
+        <p:txBody xmlns:a="http://schemas.openxmlformats.org/drawingml/2006/main">
+          <a:bodyPr/>
+          <a:p/>
+        </p:txBody>
       </p:sp>
       <p:sp>
         <p:nvSpPr>
@@ -27110,6 +29074,10 @@
             </a:solidFill>
           </a:ln>
         </p:spPr>
+        <p:txBody xmlns:a="http://schemas.openxmlformats.org/drawingml/2006/main">
+          <a:bodyPr/>
+          <a:p/>
+        </p:txBody>
       </p:sp>
       <p:sp>
         <p:nvSpPr>
@@ -27140,6 +29108,10 @@
             <a:noFill/>
           </a:ln>
         </p:spPr>
+        <p:txBody xmlns:a="http://schemas.openxmlformats.org/drawingml/2006/main">
+          <a:bodyPr/>
+          <a:p/>
+        </p:txBody>
       </p:sp>
       <p:sp>
         <p:nvSpPr>
@@ -27170,6 +29142,10 @@
             </a:solidFill>
           </a:ln>
         </p:spPr>
+        <p:txBody xmlns:a="http://schemas.openxmlformats.org/drawingml/2006/main">
+          <a:bodyPr/>
+          <a:p/>
+        </p:txBody>
       </p:sp>
       <p:sp>
         <p:nvSpPr>
@@ -27200,6 +29176,10 @@
             <a:noFill/>
           </a:ln>
         </p:spPr>
+        <p:txBody xmlns:a="http://schemas.openxmlformats.org/drawingml/2006/main">
+          <a:bodyPr/>
+          <a:p/>
+        </p:txBody>
       </p:sp>
       <p:sp>
         <p:nvSpPr>
@@ -27401,6 +29381,10 @@
             </a:solidFill>
           </a:ln>
         </p:spPr>
+        <p:txBody xmlns:a="http://schemas.openxmlformats.org/drawingml/2006/main">
+          <a:bodyPr/>
+          <a:p/>
+        </p:txBody>
       </p:sp>
       <p:sp>
         <p:nvSpPr>
@@ -27431,6 +29415,10 @@
             </a:solidFill>
           </a:ln>
         </p:spPr>
+        <p:txBody xmlns:a="http://schemas.openxmlformats.org/drawingml/2006/main">
+          <a:bodyPr/>
+          <a:p/>
+        </p:txBody>
       </p:sp>
       <p:sp>
         <p:nvSpPr>
@@ -27461,6 +29449,10 @@
             </a:solidFill>
           </a:ln>
         </p:spPr>
+        <p:txBody xmlns:a="http://schemas.openxmlformats.org/drawingml/2006/main">
+          <a:bodyPr/>
+          <a:p/>
+        </p:txBody>
       </p:sp>
       <p:sp>
         <p:nvSpPr>
@@ -27491,6 +29483,10 @@
             <a:noFill/>
           </a:ln>
         </p:spPr>
+        <p:txBody xmlns:a="http://schemas.openxmlformats.org/drawingml/2006/main">
+          <a:bodyPr/>
+          <a:p/>
+        </p:txBody>
       </p:sp>
       <p:sp>
         <p:nvSpPr>
@@ -27521,6 +29517,10 @@
             </a:solidFill>
           </a:ln>
         </p:spPr>
+        <p:txBody xmlns:a="http://schemas.openxmlformats.org/drawingml/2006/main">
+          <a:bodyPr/>
+          <a:p/>
+        </p:txBody>
       </p:sp>
       <p:sp>
         <p:nvSpPr>
@@ -27722,6 +29722,10 @@
             </a:solidFill>
           </a:ln>
         </p:spPr>
+        <p:txBody xmlns:a="http://schemas.openxmlformats.org/drawingml/2006/main">
+          <a:bodyPr/>
+          <a:p/>
+        </p:txBody>
       </p:sp>
       <p:sp>
         <p:nvSpPr>
@@ -27752,6 +29756,10 @@
             </a:solidFill>
           </a:ln>
         </p:spPr>
+        <p:txBody xmlns:a="http://schemas.openxmlformats.org/drawingml/2006/main">
+          <a:bodyPr/>
+          <a:p/>
+        </p:txBody>
       </p:sp>
       <p:sp>
         <p:nvSpPr>
@@ -27782,6 +29790,10 @@
             </a:solidFill>
           </a:ln>
         </p:spPr>
+        <p:txBody xmlns:a="http://schemas.openxmlformats.org/drawingml/2006/main">
+          <a:bodyPr/>
+          <a:p/>
+        </p:txBody>
       </p:sp>
       <p:sp>
         <p:nvSpPr>
@@ -27812,6 +29824,10 @@
             <a:noFill/>
           </a:ln>
         </p:spPr>
+        <p:txBody xmlns:a="http://schemas.openxmlformats.org/drawingml/2006/main">
+          <a:bodyPr/>
+          <a:p/>
+        </p:txBody>
       </p:sp>
       <p:sp>
         <p:nvSpPr>
@@ -27842,6 +29858,10 @@
             </a:solidFill>
           </a:ln>
         </p:spPr>
+        <p:txBody xmlns:a="http://schemas.openxmlformats.org/drawingml/2006/main">
+          <a:bodyPr/>
+          <a:p/>
+        </p:txBody>
       </p:sp>
       <p:sp>
         <p:nvSpPr>
@@ -27872,6 +29892,10 @@
             <a:noFill/>
           </a:ln>
         </p:spPr>
+        <p:txBody xmlns:a="http://schemas.openxmlformats.org/drawingml/2006/main">
+          <a:bodyPr/>
+          <a:p/>
+        </p:txBody>
       </p:sp>
       <p:sp>
         <p:nvSpPr>
@@ -28073,6 +30097,10 @@
             </a:solidFill>
           </a:ln>
         </p:spPr>
+        <p:txBody xmlns:a="http://schemas.openxmlformats.org/drawingml/2006/main">
+          <a:bodyPr/>
+          <a:p/>
+        </p:txBody>
       </p:sp>
       <p:sp>
         <p:nvSpPr>
@@ -28103,6 +30131,10 @@
             </a:solidFill>
           </a:ln>
         </p:spPr>
+        <p:txBody xmlns:a="http://schemas.openxmlformats.org/drawingml/2006/main">
+          <a:bodyPr/>
+          <a:p/>
+        </p:txBody>
       </p:sp>
       <p:sp>
         <p:nvSpPr>
@@ -28133,6 +30165,10 @@
             </a:solidFill>
           </a:ln>
         </p:spPr>
+        <p:txBody xmlns:a="http://schemas.openxmlformats.org/drawingml/2006/main">
+          <a:bodyPr/>
+          <a:p/>
+        </p:txBody>
       </p:sp>
       <p:sp>
         <p:nvSpPr>
@@ -28163,6 +30199,10 @@
             <a:noFill/>
           </a:ln>
         </p:spPr>
+        <p:txBody xmlns:a="http://schemas.openxmlformats.org/drawingml/2006/main">
+          <a:bodyPr/>
+          <a:p/>
+        </p:txBody>
       </p:sp>
       <p:sp>
         <p:nvSpPr>
@@ -28193,6 +30233,10 @@
             </a:solidFill>
           </a:ln>
         </p:spPr>
+        <p:txBody xmlns:a="http://schemas.openxmlformats.org/drawingml/2006/main">
+          <a:bodyPr/>
+          <a:p/>
+        </p:txBody>
       </p:sp>
       <p:sp>
         <p:nvSpPr>
@@ -28223,6 +30267,10 @@
             <a:noFill/>
           </a:ln>
         </p:spPr>
+        <p:txBody xmlns:a="http://schemas.openxmlformats.org/drawingml/2006/main">
+          <a:bodyPr/>
+          <a:p/>
+        </p:txBody>
       </p:sp>
       <p:sp>
         <p:nvSpPr>
@@ -28481,6 +30529,10 @@
             </a:solidFill>
           </a:ln>
         </p:spPr>
+        <p:txBody xmlns:a="http://schemas.openxmlformats.org/drawingml/2006/main">
+          <a:bodyPr/>
+          <a:p/>
+        </p:txBody>
       </p:sp>
       <p:sp>
         <p:nvSpPr>
@@ -28511,6 +30563,10 @@
             </a:solidFill>
           </a:ln>
         </p:spPr>
+        <p:txBody xmlns:a="http://schemas.openxmlformats.org/drawingml/2006/main">
+          <a:bodyPr/>
+          <a:p/>
+        </p:txBody>
       </p:sp>
       <p:sp>
         <p:nvSpPr>
@@ -28541,6 +30597,10 @@
             </a:solidFill>
           </a:ln>
         </p:spPr>
+        <p:txBody xmlns:a="http://schemas.openxmlformats.org/drawingml/2006/main">
+          <a:bodyPr/>
+          <a:p/>
+        </p:txBody>
       </p:sp>
       <p:sp>
         <p:nvSpPr>
@@ -28571,6 +30631,10 @@
             <a:noFill/>
           </a:ln>
         </p:spPr>
+        <p:txBody xmlns:a="http://schemas.openxmlformats.org/drawingml/2006/main">
+          <a:bodyPr/>
+          <a:p/>
+        </p:txBody>
       </p:sp>
       <p:sp>
         <p:nvSpPr>
@@ -28601,6 +30665,10 @@
             </a:solidFill>
           </a:ln>
         </p:spPr>
+        <p:txBody xmlns:a="http://schemas.openxmlformats.org/drawingml/2006/main">
+          <a:bodyPr/>
+          <a:p/>
+        </p:txBody>
       </p:sp>
       <p:sp>
         <p:nvSpPr>
@@ -28631,6 +30699,10 @@
             <a:noFill/>
           </a:ln>
         </p:spPr>
+        <p:txBody xmlns:a="http://schemas.openxmlformats.org/drawingml/2006/main">
+          <a:bodyPr/>
+          <a:p/>
+        </p:txBody>
       </p:sp>
       <p:sp>
         <p:nvSpPr>
@@ -28832,6 +30904,10 @@
             </a:solidFill>
           </a:ln>
         </p:spPr>
+        <p:txBody xmlns:a="http://schemas.openxmlformats.org/drawingml/2006/main">
+          <a:bodyPr/>
+          <a:p/>
+        </p:txBody>
       </p:sp>
       <p:sp>
         <p:nvSpPr>
@@ -28862,6 +30938,10 @@
             </a:solidFill>
           </a:ln>
         </p:spPr>
+        <p:txBody xmlns:a="http://schemas.openxmlformats.org/drawingml/2006/main">
+          <a:bodyPr/>
+          <a:p/>
+        </p:txBody>
       </p:sp>
       <p:sp>
         <p:nvSpPr>
@@ -28892,6 +30972,10 @@
             </a:solidFill>
           </a:ln>
         </p:spPr>
+        <p:txBody xmlns:a="http://schemas.openxmlformats.org/drawingml/2006/main">
+          <a:bodyPr/>
+          <a:p/>
+        </p:txBody>
       </p:sp>
       <p:sp>
         <p:nvSpPr>
@@ -28922,6 +31006,10 @@
             <a:noFill/>
           </a:ln>
         </p:spPr>
+        <p:txBody xmlns:a="http://schemas.openxmlformats.org/drawingml/2006/main">
+          <a:bodyPr/>
+          <a:p/>
+        </p:txBody>
       </p:sp>
       <p:sp>
         <p:nvSpPr>
@@ -28952,6 +31040,10 @@
             </a:solidFill>
           </a:ln>
         </p:spPr>
+        <p:txBody xmlns:a="http://schemas.openxmlformats.org/drawingml/2006/main">
+          <a:bodyPr/>
+          <a:p/>
+        </p:txBody>
       </p:sp>
       <p:sp>
         <p:nvSpPr>
@@ -29153,6 +31245,10 @@
             </a:solidFill>
           </a:ln>
         </p:spPr>
+        <p:txBody xmlns:a="http://schemas.openxmlformats.org/drawingml/2006/main">
+          <a:bodyPr/>
+          <a:p/>
+        </p:txBody>
       </p:sp>
       <p:sp>
         <p:nvSpPr>
@@ -29183,6 +31279,10 @@
             </a:solidFill>
           </a:ln>
         </p:spPr>
+        <p:txBody xmlns:a="http://schemas.openxmlformats.org/drawingml/2006/main">
+          <a:bodyPr/>
+          <a:p/>
+        </p:txBody>
       </p:sp>
       <p:sp>
         <p:nvSpPr>
@@ -29213,6 +31313,10 @@
             </a:solidFill>
           </a:ln>
         </p:spPr>
+        <p:txBody xmlns:a="http://schemas.openxmlformats.org/drawingml/2006/main">
+          <a:bodyPr/>
+          <a:p/>
+        </p:txBody>
       </p:sp>
       <p:sp>
         <p:nvSpPr>
@@ -29243,6 +31347,10 @@
             <a:noFill/>
           </a:ln>
         </p:spPr>
+        <p:txBody xmlns:a="http://schemas.openxmlformats.org/drawingml/2006/main">
+          <a:bodyPr/>
+          <a:p/>
+        </p:txBody>
       </p:sp>
       <p:sp>
         <p:nvSpPr>
@@ -29273,6 +31381,10 @@
             </a:solidFill>
           </a:ln>
         </p:spPr>
+        <p:txBody xmlns:a="http://schemas.openxmlformats.org/drawingml/2006/main">
+          <a:bodyPr/>
+          <a:p/>
+        </p:txBody>
       </p:sp>
       <p:sp>
         <p:nvSpPr>
@@ -29303,6 +31415,10 @@
             <a:noFill/>
           </a:ln>
         </p:spPr>
+        <p:txBody xmlns:a="http://schemas.openxmlformats.org/drawingml/2006/main">
+          <a:bodyPr/>
+          <a:p/>
+        </p:txBody>
       </p:sp>
       <p:sp>
         <p:nvSpPr>
@@ -29504,6 +31620,10 @@
             </a:solidFill>
           </a:ln>
         </p:spPr>
+        <p:txBody xmlns:a="http://schemas.openxmlformats.org/drawingml/2006/main">
+          <a:bodyPr/>
+          <a:p/>
+        </p:txBody>
       </p:sp>
       <p:sp>
         <p:nvSpPr>
@@ -29534,6 +31654,10 @@
             </a:solidFill>
           </a:ln>
         </p:spPr>
+        <p:txBody xmlns:a="http://schemas.openxmlformats.org/drawingml/2006/main">
+          <a:bodyPr/>
+          <a:p/>
+        </p:txBody>
       </p:sp>
       <p:sp>
         <p:nvSpPr>
@@ -29564,6 +31688,10 @@
             </a:solidFill>
           </a:ln>
         </p:spPr>
+        <p:txBody xmlns:a="http://schemas.openxmlformats.org/drawingml/2006/main">
+          <a:bodyPr/>
+          <a:p/>
+        </p:txBody>
       </p:sp>
       <p:sp>
         <p:nvSpPr>
@@ -29594,6 +31722,10 @@
             <a:noFill/>
           </a:ln>
         </p:spPr>
+        <p:txBody xmlns:a="http://schemas.openxmlformats.org/drawingml/2006/main">
+          <a:bodyPr/>
+          <a:p/>
+        </p:txBody>
       </p:sp>
       <p:sp>
         <p:nvSpPr>
@@ -29624,6 +31756,10 @@
             </a:solidFill>
           </a:ln>
         </p:spPr>
+        <p:txBody xmlns:a="http://schemas.openxmlformats.org/drawingml/2006/main">
+          <a:bodyPr/>
+          <a:p/>
+        </p:txBody>
       </p:sp>
       <p:sp>
         <p:nvSpPr>
@@ -29654,6 +31790,10 @@
             <a:noFill/>
           </a:ln>
         </p:spPr>
+        <p:txBody xmlns:a="http://schemas.openxmlformats.org/drawingml/2006/main">
+          <a:bodyPr/>
+          <a:p/>
+        </p:txBody>
       </p:sp>
       <p:sp>
         <p:nvSpPr>
@@ -29741,6 +31881,10 @@
             <a:noFill/>
           </a:ln>
         </p:spPr>
+        <p:txBody xmlns:a="http://schemas.openxmlformats.org/drawingml/2006/main">
+          <a:bodyPr/>
+          <a:p/>
+        </p:txBody>
       </p:sp>
       <p:sp>
         <p:nvSpPr>
@@ -29828,6 +31972,10 @@
             <a:noFill/>
           </a:ln>
         </p:spPr>
+        <p:txBody xmlns:a="http://schemas.openxmlformats.org/drawingml/2006/main">
+          <a:bodyPr/>
+          <a:p/>
+        </p:txBody>
       </p:sp>
       <p:sp>
         <p:nvSpPr>
@@ -29917,6 +32065,10 @@
             </a:solidFill>
           </a:ln>
         </p:spPr>
+        <p:txBody xmlns:a="http://schemas.openxmlformats.org/drawingml/2006/main">
+          <a:bodyPr/>
+          <a:p/>
+        </p:txBody>
       </p:sp>
       <p:sp>
         <p:nvSpPr>
@@ -30004,6 +32156,10 @@
             <a:noFill/>
           </a:ln>
         </p:spPr>
+        <p:txBody xmlns:a="http://schemas.openxmlformats.org/drawingml/2006/main">
+          <a:bodyPr/>
+          <a:p/>
+        </p:txBody>
       </p:sp>
       <p:sp>
         <p:nvSpPr>
@@ -30114,7 +32270,7 @@
                 <a:ea typeface="Arial"/>
                 <a:cs typeface="Arial"/>
               </a:rPr>
-              <a:t>As of Sep 26, 2026</a:t>
+              <a:t>As of Sep 29, 2026</a:t>
             </a:r>
           </a:p>
         </p:txBody>
@@ -30462,6 +32618,10 @@
             <a:noFill/>
           </a:ln>
         </p:spPr>
+        <p:txBody xmlns:a="http://schemas.openxmlformats.org/drawingml/2006/main">
+          <a:bodyPr/>
+          <a:p/>
+        </p:txBody>
       </p:sp>
       <p:sp>
         <p:nvSpPr>
@@ -31119,6 +33279,10 @@
             <a:noFill/>
           </a:ln>
         </p:spPr>
+        <p:txBody xmlns:a="http://schemas.openxmlformats.org/drawingml/2006/main">
+          <a:bodyPr/>
+          <a:p/>
+        </p:txBody>
       </p:sp>
       <p:sp>
         <p:nvSpPr>
@@ -31377,6 +33541,10 @@
             </a:solidFill>
           </a:ln>
         </p:spPr>
+        <p:txBody xmlns:a="http://schemas.openxmlformats.org/drawingml/2006/main">
+          <a:bodyPr/>
+          <a:p/>
+        </p:txBody>
       </p:sp>
       <p:sp>
         <p:nvSpPr>
@@ -31407,6 +33575,10 @@
             </a:solidFill>
           </a:ln>
         </p:spPr>
+        <p:txBody xmlns:a="http://schemas.openxmlformats.org/drawingml/2006/main">
+          <a:bodyPr/>
+          <a:p/>
+        </p:txBody>
       </p:sp>
       <p:sp>
         <p:nvSpPr>
@@ -31437,6 +33609,10 @@
             </a:solidFill>
           </a:ln>
         </p:spPr>
+        <p:txBody xmlns:a="http://schemas.openxmlformats.org/drawingml/2006/main">
+          <a:bodyPr/>
+          <a:p/>
+        </p:txBody>
       </p:sp>
       <p:sp>
         <p:nvSpPr>
@@ -31467,6 +33643,10 @@
             </a:solidFill>
           </a:ln>
         </p:spPr>
+        <p:txBody xmlns:a="http://schemas.openxmlformats.org/drawingml/2006/main">
+          <a:bodyPr/>
+          <a:p/>
+        </p:txBody>
       </p:sp>
       <p:sp>
         <p:nvSpPr>
@@ -31497,6 +33677,10 @@
             </a:solidFill>
           </a:ln>
         </p:spPr>
+        <p:txBody xmlns:a="http://schemas.openxmlformats.org/drawingml/2006/main">
+          <a:bodyPr/>
+          <a:p/>
+        </p:txBody>
       </p:sp>
       <p:sp>
         <p:nvSpPr>
@@ -31527,6 +33711,10 @@
             </a:solidFill>
           </a:ln>
         </p:spPr>
+        <p:txBody xmlns:a="http://schemas.openxmlformats.org/drawingml/2006/main">
+          <a:bodyPr/>
+          <a:p/>
+        </p:txBody>
       </p:sp>
       <p:sp>
         <p:nvSpPr>
@@ -31557,6 +33745,10 @@
             </a:solidFill>
           </a:ln>
         </p:spPr>
+        <p:txBody xmlns:a="http://schemas.openxmlformats.org/drawingml/2006/main">
+          <a:bodyPr/>
+          <a:p/>
+        </p:txBody>
       </p:sp>
       <p:sp>
         <p:nvSpPr>
@@ -31587,6 +33779,10 @@
             </a:solidFill>
           </a:ln>
         </p:spPr>
+        <p:txBody xmlns:a="http://schemas.openxmlformats.org/drawingml/2006/main">
+          <a:bodyPr/>
+          <a:p/>
+        </p:txBody>
       </p:sp>
       <p:sp>
         <p:nvSpPr>
@@ -31617,6 +33813,10 @@
             <a:noFill/>
           </a:ln>
         </p:spPr>
+        <p:txBody xmlns:a="http://schemas.openxmlformats.org/drawingml/2006/main">
+          <a:bodyPr/>
+          <a:p/>
+        </p:txBody>
       </p:sp>
       <p:sp>
         <p:nvSpPr>
@@ -31647,6 +33847,10 @@
             </a:solidFill>
           </a:ln>
         </p:spPr>
+        <p:txBody xmlns:a="http://schemas.openxmlformats.org/drawingml/2006/main">
+          <a:bodyPr/>
+          <a:p/>
+        </p:txBody>
       </p:sp>
       <p:sp>
         <p:nvSpPr>
@@ -31677,6 +33881,10 @@
             <a:noFill/>
           </a:ln>
         </p:spPr>
+        <p:txBody xmlns:a="http://schemas.openxmlformats.org/drawingml/2006/main">
+          <a:bodyPr/>
+          <a:p/>
+        </p:txBody>
       </p:sp>
       <p:sp>
         <p:nvSpPr>
@@ -31878,6 +34086,10 @@
             </a:solidFill>
           </a:ln>
         </p:spPr>
+        <p:txBody xmlns:a="http://schemas.openxmlformats.org/drawingml/2006/main">
+          <a:bodyPr/>
+          <a:p/>
+        </p:txBody>
       </p:sp>
       <p:sp>
         <p:nvSpPr>
@@ -31908,6 +34120,10 @@
             </a:solidFill>
           </a:ln>
         </p:spPr>
+        <p:txBody xmlns:a="http://schemas.openxmlformats.org/drawingml/2006/main">
+          <a:bodyPr/>
+          <a:p/>
+        </p:txBody>
       </p:sp>
       <p:sp>
         <p:nvSpPr>
@@ -31938,6 +34154,10 @@
             </a:solidFill>
           </a:ln>
         </p:spPr>
+        <p:txBody xmlns:a="http://schemas.openxmlformats.org/drawingml/2006/main">
+          <a:bodyPr/>
+          <a:p/>
+        </p:txBody>
       </p:sp>
       <p:sp>
         <p:nvSpPr>
@@ -31968,6 +34188,10 @@
             </a:solidFill>
           </a:ln>
         </p:spPr>
+        <p:txBody xmlns:a="http://schemas.openxmlformats.org/drawingml/2006/main">
+          <a:bodyPr/>
+          <a:p/>
+        </p:txBody>
       </p:sp>
       <p:sp>
         <p:nvSpPr>
@@ -31998,6 +34222,10 @@
             </a:solidFill>
           </a:ln>
         </p:spPr>
+        <p:txBody xmlns:a="http://schemas.openxmlformats.org/drawingml/2006/main">
+          <a:bodyPr/>
+          <a:p/>
+        </p:txBody>
       </p:sp>
       <p:sp>
         <p:nvSpPr>
@@ -32028,6 +34256,10 @@
             </a:solidFill>
           </a:ln>
         </p:spPr>
+        <p:txBody xmlns:a="http://schemas.openxmlformats.org/drawingml/2006/main">
+          <a:bodyPr/>
+          <a:p/>
+        </p:txBody>
       </p:sp>
       <p:sp>
         <p:nvSpPr>
@@ -32058,6 +34290,10 @@
             </a:solidFill>
           </a:ln>
         </p:spPr>
+        <p:txBody xmlns:a="http://schemas.openxmlformats.org/drawingml/2006/main">
+          <a:bodyPr/>
+          <a:p/>
+        </p:txBody>
       </p:sp>
       <p:sp>
         <p:nvSpPr>
@@ -32088,6 +34324,10 @@
             </a:solidFill>
           </a:ln>
         </p:spPr>
+        <p:txBody xmlns:a="http://schemas.openxmlformats.org/drawingml/2006/main">
+          <a:bodyPr/>
+          <a:p/>
+        </p:txBody>
       </p:sp>
       <p:sp>
         <p:nvSpPr>
@@ -32118,6 +34358,10 @@
             <a:noFill/>
           </a:ln>
         </p:spPr>
+        <p:txBody xmlns:a="http://schemas.openxmlformats.org/drawingml/2006/main">
+          <a:bodyPr/>
+          <a:p/>
+        </p:txBody>
       </p:sp>
       <p:sp>
         <p:nvSpPr>
@@ -32148,6 +34392,10 @@
             </a:solidFill>
           </a:ln>
         </p:spPr>
+        <p:txBody xmlns:a="http://schemas.openxmlformats.org/drawingml/2006/main">
+          <a:bodyPr/>
+          <a:p/>
+        </p:txBody>
       </p:sp>
       <p:sp>
         <p:nvSpPr>
@@ -32349,6 +34597,10 @@
             </a:solidFill>
           </a:ln>
         </p:spPr>
+        <p:txBody xmlns:a="http://schemas.openxmlformats.org/drawingml/2006/main">
+          <a:bodyPr/>
+          <a:p/>
+        </p:txBody>
       </p:sp>
       <p:sp>
         <p:nvSpPr>
@@ -32379,6 +34631,10 @@
             </a:solidFill>
           </a:ln>
         </p:spPr>
+        <p:txBody xmlns:a="http://schemas.openxmlformats.org/drawingml/2006/main">
+          <a:bodyPr/>
+          <a:p/>
+        </p:txBody>
       </p:sp>
       <p:sp>
         <p:nvSpPr>
@@ -32409,6 +34665,10 @@
             </a:solidFill>
           </a:ln>
         </p:spPr>
+        <p:txBody xmlns:a="http://schemas.openxmlformats.org/drawingml/2006/main">
+          <a:bodyPr/>
+          <a:p/>
+        </p:txBody>
       </p:sp>
       <p:sp>
         <p:nvSpPr>
@@ -32439,6 +34699,10 @@
             </a:solidFill>
           </a:ln>
         </p:spPr>
+        <p:txBody xmlns:a="http://schemas.openxmlformats.org/drawingml/2006/main">
+          <a:bodyPr/>
+          <a:p/>
+        </p:txBody>
       </p:sp>
       <p:sp>
         <p:nvSpPr>
@@ -32469,6 +34733,10 @@
             </a:solidFill>
           </a:ln>
         </p:spPr>
+        <p:txBody xmlns:a="http://schemas.openxmlformats.org/drawingml/2006/main">
+          <a:bodyPr/>
+          <a:p/>
+        </p:txBody>
       </p:sp>
       <p:sp>
         <p:nvSpPr>
@@ -32499,6 +34767,10 @@
             </a:solidFill>
           </a:ln>
         </p:spPr>
+        <p:txBody xmlns:a="http://schemas.openxmlformats.org/drawingml/2006/main">
+          <a:bodyPr/>
+          <a:p/>
+        </p:txBody>
       </p:sp>
       <p:sp>
         <p:nvSpPr>
@@ -32529,6 +34801,10 @@
             </a:solidFill>
           </a:ln>
         </p:spPr>
+        <p:txBody xmlns:a="http://schemas.openxmlformats.org/drawingml/2006/main">
+          <a:bodyPr/>
+          <a:p/>
+        </p:txBody>
       </p:sp>
       <p:sp>
         <p:nvSpPr>
@@ -32559,6 +34835,10 @@
             </a:solidFill>
           </a:ln>
         </p:spPr>
+        <p:txBody xmlns:a="http://schemas.openxmlformats.org/drawingml/2006/main">
+          <a:bodyPr/>
+          <a:p/>
+        </p:txBody>
       </p:sp>
       <p:sp>
         <p:nvSpPr>
@@ -32589,6 +34869,10 @@
             <a:noFill/>
           </a:ln>
         </p:spPr>
+        <p:txBody xmlns:a="http://schemas.openxmlformats.org/drawingml/2006/main">
+          <a:bodyPr/>
+          <a:p/>
+        </p:txBody>
       </p:sp>
       <p:sp>
         <p:nvSpPr>
@@ -32619,6 +34903,10 @@
             </a:solidFill>
           </a:ln>
         </p:spPr>
+        <p:txBody xmlns:a="http://schemas.openxmlformats.org/drawingml/2006/main">
+          <a:bodyPr/>
+          <a:p/>
+        </p:txBody>
       </p:sp>
       <p:sp>
         <p:nvSpPr>
@@ -32649,6 +34937,10 @@
             <a:noFill/>
           </a:ln>
         </p:spPr>
+        <p:txBody xmlns:a="http://schemas.openxmlformats.org/drawingml/2006/main">
+          <a:bodyPr/>
+          <a:p/>
+        </p:txBody>
       </p:sp>
       <p:sp>
         <p:nvSpPr>
@@ -32850,6 +35142,10 @@
             </a:solidFill>
           </a:ln>
         </p:spPr>
+        <p:txBody xmlns:a="http://schemas.openxmlformats.org/drawingml/2006/main">
+          <a:bodyPr/>
+          <a:p/>
+        </p:txBody>
       </p:sp>
       <p:sp>
         <p:nvSpPr>
@@ -32880,6 +35176,10 @@
             </a:solidFill>
           </a:ln>
         </p:spPr>
+        <p:txBody xmlns:a="http://schemas.openxmlformats.org/drawingml/2006/main">
+          <a:bodyPr/>
+          <a:p/>
+        </p:txBody>
       </p:sp>
       <p:sp>
         <p:nvSpPr>
@@ -32910,6 +35210,10 @@
             </a:solidFill>
           </a:ln>
         </p:spPr>
+        <p:txBody xmlns:a="http://schemas.openxmlformats.org/drawingml/2006/main">
+          <a:bodyPr/>
+          <a:p/>
+        </p:txBody>
       </p:sp>
       <p:sp>
         <p:nvSpPr>
@@ -32940,6 +35244,10 @@
             </a:solidFill>
           </a:ln>
         </p:spPr>
+        <p:txBody xmlns:a="http://schemas.openxmlformats.org/drawingml/2006/main">
+          <a:bodyPr/>
+          <a:p/>
+        </p:txBody>
       </p:sp>
       <p:sp>
         <p:nvSpPr>
@@ -32970,6 +35278,10 @@
             </a:solidFill>
           </a:ln>
         </p:spPr>
+        <p:txBody xmlns:a="http://schemas.openxmlformats.org/drawingml/2006/main">
+          <a:bodyPr/>
+          <a:p/>
+        </p:txBody>
       </p:sp>
       <p:sp>
         <p:nvSpPr>
@@ -33000,6 +35312,10 @@
             </a:solidFill>
           </a:ln>
         </p:spPr>
+        <p:txBody xmlns:a="http://schemas.openxmlformats.org/drawingml/2006/main">
+          <a:bodyPr/>
+          <a:p/>
+        </p:txBody>
       </p:sp>
       <p:sp>
         <p:nvSpPr>
@@ -33030,6 +35346,10 @@
             </a:solidFill>
           </a:ln>
         </p:spPr>
+        <p:txBody xmlns:a="http://schemas.openxmlformats.org/drawingml/2006/main">
+          <a:bodyPr/>
+          <a:p/>
+        </p:txBody>
       </p:sp>
       <p:sp>
         <p:nvSpPr>
@@ -33060,6 +35380,10 @@
             </a:solidFill>
           </a:ln>
         </p:spPr>
+        <p:txBody xmlns:a="http://schemas.openxmlformats.org/drawingml/2006/main">
+          <a:bodyPr/>
+          <a:p/>
+        </p:txBody>
       </p:sp>
       <p:sp>
         <p:nvSpPr>
@@ -33090,6 +35414,10 @@
             <a:noFill/>
           </a:ln>
         </p:spPr>
+        <p:txBody xmlns:a="http://schemas.openxmlformats.org/drawingml/2006/main">
+          <a:bodyPr/>
+          <a:p/>
+        </p:txBody>
       </p:sp>
       <p:sp>
         <p:nvSpPr>
@@ -33120,6 +35448,10 @@
             </a:solidFill>
           </a:ln>
         </p:spPr>
+        <p:txBody xmlns:a="http://schemas.openxmlformats.org/drawingml/2006/main">
+          <a:bodyPr/>
+          <a:p/>
+        </p:txBody>
       </p:sp>
       <p:sp>
         <p:nvSpPr>
@@ -33321,6 +35653,10 @@
             </a:solidFill>
           </a:ln>
         </p:spPr>
+        <p:txBody xmlns:a="http://schemas.openxmlformats.org/drawingml/2006/main">
+          <a:bodyPr/>
+          <a:p/>
+        </p:txBody>
       </p:sp>
       <p:sp>
         <p:nvSpPr>
@@ -33351,6 +35687,10 @@
             </a:solidFill>
           </a:ln>
         </p:spPr>
+        <p:txBody xmlns:a="http://schemas.openxmlformats.org/drawingml/2006/main">
+          <a:bodyPr/>
+          <a:p/>
+        </p:txBody>
       </p:sp>
       <p:sp>
         <p:nvSpPr>
@@ -33381,6 +35721,10 @@
             </a:solidFill>
           </a:ln>
         </p:spPr>
+        <p:txBody xmlns:a="http://schemas.openxmlformats.org/drawingml/2006/main">
+          <a:bodyPr/>
+          <a:p/>
+        </p:txBody>
       </p:sp>
       <p:sp>
         <p:nvSpPr>
@@ -33411,6 +35755,10 @@
             </a:solidFill>
           </a:ln>
         </p:spPr>
+        <p:txBody xmlns:a="http://schemas.openxmlformats.org/drawingml/2006/main">
+          <a:bodyPr/>
+          <a:p/>
+        </p:txBody>
       </p:sp>
       <p:sp>
         <p:nvSpPr>
@@ -33441,6 +35789,10 @@
             </a:solidFill>
           </a:ln>
         </p:spPr>
+        <p:txBody xmlns:a="http://schemas.openxmlformats.org/drawingml/2006/main">
+          <a:bodyPr/>
+          <a:p/>
+        </p:txBody>
       </p:sp>
       <p:sp>
         <p:nvSpPr>
@@ -33471,6 +35823,10 @@
             </a:solidFill>
           </a:ln>
         </p:spPr>
+        <p:txBody xmlns:a="http://schemas.openxmlformats.org/drawingml/2006/main">
+          <a:bodyPr/>
+          <a:p/>
+        </p:txBody>
       </p:sp>
       <p:sp>
         <p:nvSpPr>
@@ -33501,6 +35857,10 @@
             </a:solidFill>
           </a:ln>
         </p:spPr>
+        <p:txBody xmlns:a="http://schemas.openxmlformats.org/drawingml/2006/main">
+          <a:bodyPr/>
+          <a:p/>
+        </p:txBody>
       </p:sp>
       <p:sp>
         <p:nvSpPr>
@@ -33531,6 +35891,10 @@
             </a:solidFill>
           </a:ln>
         </p:spPr>
+        <p:txBody xmlns:a="http://schemas.openxmlformats.org/drawingml/2006/main">
+          <a:bodyPr/>
+          <a:p/>
+        </p:txBody>
       </p:sp>
       <p:sp>
         <p:nvSpPr>
@@ -33561,6 +35925,10 @@
             <a:noFill/>
           </a:ln>
         </p:spPr>
+        <p:txBody xmlns:a="http://schemas.openxmlformats.org/drawingml/2006/main">
+          <a:bodyPr/>
+          <a:p/>
+        </p:txBody>
       </p:sp>
       <p:sp>
         <p:nvSpPr>
@@ -33591,6 +35959,10 @@
             </a:solidFill>
           </a:ln>
         </p:spPr>
+        <p:txBody xmlns:a="http://schemas.openxmlformats.org/drawingml/2006/main">
+          <a:bodyPr/>
+          <a:p/>
+        </p:txBody>
       </p:sp>
       <p:sp>
         <p:nvSpPr>
@@ -33621,6 +35993,10 @@
             <a:noFill/>
           </a:ln>
         </p:spPr>
+        <p:txBody xmlns:a="http://schemas.openxmlformats.org/drawingml/2006/main">
+          <a:bodyPr/>
+          <a:p/>
+        </p:txBody>
       </p:sp>
       <p:sp>
         <p:nvSpPr>
@@ -33822,6 +36198,10 @@
             </a:solidFill>
           </a:ln>
         </p:spPr>
+        <p:txBody xmlns:a="http://schemas.openxmlformats.org/drawingml/2006/main">
+          <a:bodyPr/>
+          <a:p/>
+        </p:txBody>
       </p:sp>
       <p:sp>
         <p:nvSpPr>
@@ -33852,6 +36232,10 @@
             </a:solidFill>
           </a:ln>
         </p:spPr>
+        <p:txBody xmlns:a="http://schemas.openxmlformats.org/drawingml/2006/main">
+          <a:bodyPr/>
+          <a:p/>
+        </p:txBody>
       </p:sp>
       <p:sp>
         <p:nvSpPr>
@@ -33882,6 +36266,10 @@
             </a:solidFill>
           </a:ln>
         </p:spPr>
+        <p:txBody xmlns:a="http://schemas.openxmlformats.org/drawingml/2006/main">
+          <a:bodyPr/>
+          <a:p/>
+        </p:txBody>
       </p:sp>
       <p:sp>
         <p:nvSpPr>
@@ -33912,6 +36300,10 @@
             </a:solidFill>
           </a:ln>
         </p:spPr>
+        <p:txBody xmlns:a="http://schemas.openxmlformats.org/drawingml/2006/main">
+          <a:bodyPr/>
+          <a:p/>
+        </p:txBody>
       </p:sp>
       <p:sp>
         <p:nvSpPr>
@@ -33942,6 +36334,10 @@
             </a:solidFill>
           </a:ln>
         </p:spPr>
+        <p:txBody xmlns:a="http://schemas.openxmlformats.org/drawingml/2006/main">
+          <a:bodyPr/>
+          <a:p/>
+        </p:txBody>
       </p:sp>
       <p:sp>
         <p:nvSpPr>
@@ -33972,6 +36368,10 @@
             </a:solidFill>
           </a:ln>
         </p:spPr>
+        <p:txBody xmlns:a="http://schemas.openxmlformats.org/drawingml/2006/main">
+          <a:bodyPr/>
+          <a:p/>
+        </p:txBody>
       </p:sp>
       <p:sp>
         <p:nvSpPr>
@@ -34002,6 +36402,10 @@
             </a:solidFill>
           </a:ln>
         </p:spPr>
+        <p:txBody xmlns:a="http://schemas.openxmlformats.org/drawingml/2006/main">
+          <a:bodyPr/>
+          <a:p/>
+        </p:txBody>
       </p:sp>
       <p:sp>
         <p:nvSpPr>
@@ -34032,6 +36436,10 @@
             </a:solidFill>
           </a:ln>
         </p:spPr>
+        <p:txBody xmlns:a="http://schemas.openxmlformats.org/drawingml/2006/main">
+          <a:bodyPr/>
+          <a:p/>
+        </p:txBody>
       </p:sp>
       <p:sp>
         <p:nvSpPr>
@@ -34062,6 +36470,10 @@
             <a:noFill/>
           </a:ln>
         </p:spPr>
+        <p:txBody xmlns:a="http://schemas.openxmlformats.org/drawingml/2006/main">
+          <a:bodyPr/>
+          <a:p/>
+        </p:txBody>
       </p:sp>
       <p:sp>
         <p:nvSpPr>
@@ -34092,6 +36504,10 @@
             </a:solidFill>
           </a:ln>
         </p:spPr>
+        <p:txBody xmlns:a="http://schemas.openxmlformats.org/drawingml/2006/main">
+          <a:bodyPr/>
+          <a:p/>
+        </p:txBody>
       </p:sp>
       <p:sp>
         <p:nvSpPr>
@@ -34122,6 +36538,10 @@
             <a:noFill/>
           </a:ln>
         </p:spPr>
+        <p:txBody xmlns:a="http://schemas.openxmlformats.org/drawingml/2006/main">
+          <a:bodyPr/>
+          <a:p/>
+        </p:txBody>
       </p:sp>
       <p:sp>
         <p:nvSpPr>
@@ -34380,6 +36800,10 @@
             </a:solidFill>
           </a:ln>
         </p:spPr>
+        <p:txBody xmlns:a="http://schemas.openxmlformats.org/drawingml/2006/main">
+          <a:bodyPr/>
+          <a:p/>
+        </p:txBody>
       </p:sp>
       <p:sp>
         <p:nvSpPr>
@@ -34410,6 +36834,10 @@
             </a:solidFill>
           </a:ln>
         </p:spPr>
+        <p:txBody xmlns:a="http://schemas.openxmlformats.org/drawingml/2006/main">
+          <a:bodyPr/>
+          <a:p/>
+        </p:txBody>
       </p:sp>
       <p:sp>
         <p:nvSpPr>
@@ -34440,6 +36868,10 @@
             </a:solidFill>
           </a:ln>
         </p:spPr>
+        <p:txBody xmlns:a="http://schemas.openxmlformats.org/drawingml/2006/main">
+          <a:bodyPr/>
+          <a:p/>
+        </p:txBody>
       </p:sp>
       <p:sp>
         <p:nvSpPr>
@@ -34470,6 +36902,10 @@
             </a:solidFill>
           </a:ln>
         </p:spPr>
+        <p:txBody xmlns:a="http://schemas.openxmlformats.org/drawingml/2006/main">
+          <a:bodyPr/>
+          <a:p/>
+        </p:txBody>
       </p:sp>
       <p:sp>
         <p:nvSpPr>
@@ -34500,6 +36936,10 @@
             </a:solidFill>
           </a:ln>
         </p:spPr>
+        <p:txBody xmlns:a="http://schemas.openxmlformats.org/drawingml/2006/main">
+          <a:bodyPr/>
+          <a:p/>
+        </p:txBody>
       </p:sp>
       <p:sp>
         <p:nvSpPr>
@@ -34530,6 +36970,10 @@
             </a:solidFill>
           </a:ln>
         </p:spPr>
+        <p:txBody xmlns:a="http://schemas.openxmlformats.org/drawingml/2006/main">
+          <a:bodyPr/>
+          <a:p/>
+        </p:txBody>
       </p:sp>
       <p:sp>
         <p:nvSpPr>
@@ -34560,6 +37004,10 @@
             </a:solidFill>
           </a:ln>
         </p:spPr>
+        <p:txBody xmlns:a="http://schemas.openxmlformats.org/drawingml/2006/main">
+          <a:bodyPr/>
+          <a:p/>
+        </p:txBody>
       </p:sp>
       <p:sp>
         <p:nvSpPr>
@@ -34590,6 +37038,10 @@
             </a:solidFill>
           </a:ln>
         </p:spPr>
+        <p:txBody xmlns:a="http://schemas.openxmlformats.org/drawingml/2006/main">
+          <a:bodyPr/>
+          <a:p/>
+        </p:txBody>
       </p:sp>
       <p:sp>
         <p:nvSpPr>
@@ -34620,6 +37072,10 @@
             <a:noFill/>
           </a:ln>
         </p:spPr>
+        <p:txBody xmlns:a="http://schemas.openxmlformats.org/drawingml/2006/main">
+          <a:bodyPr/>
+          <a:p/>
+        </p:txBody>
       </p:sp>
       <p:sp>
         <p:nvSpPr>
@@ -34650,6 +37106,10 @@
             </a:solidFill>
           </a:ln>
         </p:spPr>
+        <p:txBody xmlns:a="http://schemas.openxmlformats.org/drawingml/2006/main">
+          <a:bodyPr/>
+          <a:p/>
+        </p:txBody>
       </p:sp>
       <p:sp>
         <p:nvSpPr>
@@ -34680,6 +37140,10 @@
             <a:noFill/>
           </a:ln>
         </p:spPr>
+        <p:txBody xmlns:a="http://schemas.openxmlformats.org/drawingml/2006/main">
+          <a:bodyPr/>
+          <a:p/>
+        </p:txBody>
       </p:sp>
       <p:sp>
         <p:nvSpPr>
@@ -34881,6 +37345,10 @@
             </a:solidFill>
           </a:ln>
         </p:spPr>
+        <p:txBody xmlns:a="http://schemas.openxmlformats.org/drawingml/2006/main">
+          <a:bodyPr/>
+          <a:p/>
+        </p:txBody>
       </p:sp>
       <p:sp>
         <p:nvSpPr>
@@ -34911,6 +37379,10 @@
             </a:solidFill>
           </a:ln>
         </p:spPr>
+        <p:txBody xmlns:a="http://schemas.openxmlformats.org/drawingml/2006/main">
+          <a:bodyPr/>
+          <a:p/>
+        </p:txBody>
       </p:sp>
       <p:sp>
         <p:nvSpPr>
@@ -34941,6 +37413,10 @@
             </a:solidFill>
           </a:ln>
         </p:spPr>
+        <p:txBody xmlns:a="http://schemas.openxmlformats.org/drawingml/2006/main">
+          <a:bodyPr/>
+          <a:p/>
+        </p:txBody>
       </p:sp>
       <p:sp>
         <p:nvSpPr>
@@ -34971,6 +37447,10 @@
             </a:solidFill>
           </a:ln>
         </p:spPr>
+        <p:txBody xmlns:a="http://schemas.openxmlformats.org/drawingml/2006/main">
+          <a:bodyPr/>
+          <a:p/>
+        </p:txBody>
       </p:sp>
       <p:sp>
         <p:nvSpPr>
@@ -35001,6 +37481,10 @@
             </a:solidFill>
           </a:ln>
         </p:spPr>
+        <p:txBody xmlns:a="http://schemas.openxmlformats.org/drawingml/2006/main">
+          <a:bodyPr/>
+          <a:p/>
+        </p:txBody>
       </p:sp>
       <p:sp>
         <p:nvSpPr>
@@ -35031,6 +37515,10 @@
             </a:solidFill>
           </a:ln>
         </p:spPr>
+        <p:txBody xmlns:a="http://schemas.openxmlformats.org/drawingml/2006/main">
+          <a:bodyPr/>
+          <a:p/>
+        </p:txBody>
       </p:sp>
       <p:sp>
         <p:nvSpPr>
@@ -35061,6 +37549,10 @@
             </a:solidFill>
           </a:ln>
         </p:spPr>
+        <p:txBody xmlns:a="http://schemas.openxmlformats.org/drawingml/2006/main">
+          <a:bodyPr/>
+          <a:p/>
+        </p:txBody>
       </p:sp>
       <p:sp>
         <p:nvSpPr>
@@ -35091,6 +37583,10 @@
             </a:solidFill>
           </a:ln>
         </p:spPr>
+        <p:txBody xmlns:a="http://schemas.openxmlformats.org/drawingml/2006/main">
+          <a:bodyPr/>
+          <a:p/>
+        </p:txBody>
       </p:sp>
       <p:sp>
         <p:nvSpPr>
@@ -35121,6 +37617,10 @@
             <a:noFill/>
           </a:ln>
         </p:spPr>
+        <p:txBody xmlns:a="http://schemas.openxmlformats.org/drawingml/2006/main">
+          <a:bodyPr/>
+          <a:p/>
+        </p:txBody>
       </p:sp>
       <p:sp>
         <p:nvSpPr>
@@ -35151,6 +37651,10 @@
             </a:solidFill>
           </a:ln>
         </p:spPr>
+        <p:txBody xmlns:a="http://schemas.openxmlformats.org/drawingml/2006/main">
+          <a:bodyPr/>
+          <a:p/>
+        </p:txBody>
       </p:sp>
       <p:sp>
         <p:nvSpPr>
@@ -35181,6 +37685,10 @@
             <a:noFill/>
           </a:ln>
         </p:spPr>
+        <p:txBody xmlns:a="http://schemas.openxmlformats.org/drawingml/2006/main">
+          <a:bodyPr/>
+          <a:p/>
+        </p:txBody>
       </p:sp>
       <p:sp>
         <p:nvSpPr>
@@ -35439,6 +37947,10 @@
             </a:solidFill>
           </a:ln>
         </p:spPr>
+        <p:txBody xmlns:a="http://schemas.openxmlformats.org/drawingml/2006/main">
+          <a:bodyPr/>
+          <a:p/>
+        </p:txBody>
       </p:sp>
       <p:sp>
         <p:nvSpPr>
@@ -35469,6 +37981,10 @@
             </a:solidFill>
           </a:ln>
         </p:spPr>
+        <p:txBody xmlns:a="http://schemas.openxmlformats.org/drawingml/2006/main">
+          <a:bodyPr/>
+          <a:p/>
+        </p:txBody>
       </p:sp>
       <p:sp>
         <p:nvSpPr>
@@ -35499,6 +38015,10 @@
             </a:solidFill>
           </a:ln>
         </p:spPr>
+        <p:txBody xmlns:a="http://schemas.openxmlformats.org/drawingml/2006/main">
+          <a:bodyPr/>
+          <a:p/>
+        </p:txBody>
       </p:sp>
       <p:sp>
         <p:nvSpPr>
@@ -35529,6 +38049,10 @@
             </a:solidFill>
           </a:ln>
         </p:spPr>
+        <p:txBody xmlns:a="http://schemas.openxmlformats.org/drawingml/2006/main">
+          <a:bodyPr/>
+          <a:p/>
+        </p:txBody>
       </p:sp>
       <p:sp>
         <p:nvSpPr>
@@ -35559,6 +38083,10 @@
             </a:solidFill>
           </a:ln>
         </p:spPr>
+        <p:txBody xmlns:a="http://schemas.openxmlformats.org/drawingml/2006/main">
+          <a:bodyPr/>
+          <a:p/>
+        </p:txBody>
       </p:sp>
       <p:sp>
         <p:nvSpPr>
@@ -35589,6 +38117,10 @@
             </a:solidFill>
           </a:ln>
         </p:spPr>
+        <p:txBody xmlns:a="http://schemas.openxmlformats.org/drawingml/2006/main">
+          <a:bodyPr/>
+          <a:p/>
+        </p:txBody>
       </p:sp>
       <p:sp>
         <p:nvSpPr>
@@ -35619,6 +38151,10 @@
             </a:solidFill>
           </a:ln>
         </p:spPr>
+        <p:txBody xmlns:a="http://schemas.openxmlformats.org/drawingml/2006/main">
+          <a:bodyPr/>
+          <a:p/>
+        </p:txBody>
       </p:sp>
       <p:sp>
         <p:nvSpPr>
@@ -35649,6 +38185,10 @@
             </a:solidFill>
           </a:ln>
         </p:spPr>
+        <p:txBody xmlns:a="http://schemas.openxmlformats.org/drawingml/2006/main">
+          <a:bodyPr/>
+          <a:p/>
+        </p:txBody>
       </p:sp>
       <p:sp>
         <p:nvSpPr>
@@ -35681,6 +38221,10 @@
             </a:solidFill>
           </a:ln>
         </p:spPr>
+        <p:txBody xmlns:a="http://schemas.openxmlformats.org/drawingml/2006/main">
+          <a:bodyPr/>
+          <a:p/>
+        </p:txBody>
       </p:sp>
       <p:sp>
         <p:nvSpPr>
@@ -35711,6 +38255,10 @@
             </a:solidFill>
           </a:ln>
         </p:spPr>
+        <p:txBody xmlns:a="http://schemas.openxmlformats.org/drawingml/2006/main">
+          <a:bodyPr/>
+          <a:p/>
+        </p:txBody>
       </p:sp>
       <p:sp>
         <p:nvSpPr>
@@ -35741,6 +38289,10 @@
             <a:noFill/>
           </a:ln>
         </p:spPr>
+        <p:txBody xmlns:a="http://schemas.openxmlformats.org/drawingml/2006/main">
+          <a:bodyPr/>
+          <a:p/>
+        </p:txBody>
       </p:sp>
       <p:sp>
         <p:nvSpPr>
@@ -35942,6 +38494,10 @@
             </a:solidFill>
           </a:ln>
         </p:spPr>
+        <p:txBody xmlns:a="http://schemas.openxmlformats.org/drawingml/2006/main">
+          <a:bodyPr/>
+          <a:p/>
+        </p:txBody>
       </p:sp>
       <p:sp>
         <p:nvSpPr>
@@ -35972,6 +38528,10 @@
             </a:solidFill>
           </a:ln>
         </p:spPr>
+        <p:txBody xmlns:a="http://schemas.openxmlformats.org/drawingml/2006/main">
+          <a:bodyPr/>
+          <a:p/>
+        </p:txBody>
       </p:sp>
       <p:sp>
         <p:nvSpPr>
@@ -36002,6 +38562,10 @@
             </a:solidFill>
           </a:ln>
         </p:spPr>
+        <p:txBody xmlns:a="http://schemas.openxmlformats.org/drawingml/2006/main">
+          <a:bodyPr/>
+          <a:p/>
+        </p:txBody>
       </p:sp>
       <p:sp>
         <p:nvSpPr>
@@ -36032,6 +38596,10 @@
             </a:solidFill>
           </a:ln>
         </p:spPr>
+        <p:txBody xmlns:a="http://schemas.openxmlformats.org/drawingml/2006/main">
+          <a:bodyPr/>
+          <a:p/>
+        </p:txBody>
       </p:sp>
       <p:sp>
         <p:nvSpPr>
@@ -36062,6 +38630,10 @@
             </a:solidFill>
           </a:ln>
         </p:spPr>
+        <p:txBody xmlns:a="http://schemas.openxmlformats.org/drawingml/2006/main">
+          <a:bodyPr/>
+          <a:p/>
+        </p:txBody>
       </p:sp>
       <p:sp>
         <p:nvSpPr>
@@ -36092,6 +38664,10 @@
             </a:solidFill>
           </a:ln>
         </p:spPr>
+        <p:txBody xmlns:a="http://schemas.openxmlformats.org/drawingml/2006/main">
+          <a:bodyPr/>
+          <a:p/>
+        </p:txBody>
       </p:sp>
       <p:sp>
         <p:nvSpPr>
@@ -36122,6 +38698,10 @@
             </a:solidFill>
           </a:ln>
         </p:spPr>
+        <p:txBody xmlns:a="http://schemas.openxmlformats.org/drawingml/2006/main">
+          <a:bodyPr/>
+          <a:p/>
+        </p:txBody>
       </p:sp>
       <p:sp>
         <p:nvSpPr>
@@ -36152,6 +38732,10 @@
             </a:solidFill>
           </a:ln>
         </p:spPr>
+        <p:txBody xmlns:a="http://schemas.openxmlformats.org/drawingml/2006/main">
+          <a:bodyPr/>
+          <a:p/>
+        </p:txBody>
       </p:sp>
       <p:sp>
         <p:nvSpPr>
@@ -36184,6 +38768,10 @@
             </a:solidFill>
           </a:ln>
         </p:spPr>
+        <p:txBody xmlns:a="http://schemas.openxmlformats.org/drawingml/2006/main">
+          <a:bodyPr/>
+          <a:p/>
+        </p:txBody>
       </p:sp>
       <p:sp>
         <p:nvSpPr>
@@ -36214,6 +38802,10 @@
             </a:solidFill>
           </a:ln>
         </p:spPr>
+        <p:txBody xmlns:a="http://schemas.openxmlformats.org/drawingml/2006/main">
+          <a:bodyPr/>
+          <a:p/>
+        </p:txBody>
       </p:sp>
       <p:sp>
         <p:nvSpPr>
@@ -36267,7 +38859,7 @@
                 <a:ea typeface="Arial"/>
                 <a:cs typeface="Arial"/>
               </a:rPr>
-              <a:t>24. Additional RNA-encoder comparisons</a:t>
+              <a:t>24. More DNA, RNA and protein encoders</a:t>
             </a:r>
           </a:p>
         </p:txBody>
@@ -36415,6 +39007,10 @@
             </a:solidFill>
           </a:ln>
         </p:spPr>
+        <p:txBody xmlns:a="http://schemas.openxmlformats.org/drawingml/2006/main">
+          <a:bodyPr/>
+          <a:p/>
+        </p:txBody>
       </p:sp>
       <p:sp>
         <p:nvSpPr>
@@ -36445,6 +39041,10 @@
             </a:solidFill>
           </a:ln>
         </p:spPr>
+        <p:txBody xmlns:a="http://schemas.openxmlformats.org/drawingml/2006/main">
+          <a:bodyPr/>
+          <a:p/>
+        </p:txBody>
       </p:sp>
       <p:sp>
         <p:nvSpPr>
@@ -36475,6 +39075,10 @@
             </a:solidFill>
           </a:ln>
         </p:spPr>
+        <p:txBody xmlns:a="http://schemas.openxmlformats.org/drawingml/2006/main">
+          <a:bodyPr/>
+          <a:p/>
+        </p:txBody>
       </p:sp>
       <p:sp>
         <p:nvSpPr>
@@ -36505,6 +39109,10 @@
             </a:solidFill>
           </a:ln>
         </p:spPr>
+        <p:txBody xmlns:a="http://schemas.openxmlformats.org/drawingml/2006/main">
+          <a:bodyPr/>
+          <a:p/>
+        </p:txBody>
       </p:sp>
       <p:sp>
         <p:nvSpPr>
@@ -36535,6 +39143,10 @@
             </a:solidFill>
           </a:ln>
         </p:spPr>
+        <p:txBody xmlns:a="http://schemas.openxmlformats.org/drawingml/2006/main">
+          <a:bodyPr/>
+          <a:p/>
+        </p:txBody>
       </p:sp>
       <p:sp>
         <p:nvSpPr>
@@ -36565,6 +39177,10 @@
             </a:solidFill>
           </a:ln>
         </p:spPr>
+        <p:txBody xmlns:a="http://schemas.openxmlformats.org/drawingml/2006/main">
+          <a:bodyPr/>
+          <a:p/>
+        </p:txBody>
       </p:sp>
       <p:sp>
         <p:nvSpPr>
@@ -36595,6 +39211,10 @@
             </a:solidFill>
           </a:ln>
         </p:spPr>
+        <p:txBody xmlns:a="http://schemas.openxmlformats.org/drawingml/2006/main">
+          <a:bodyPr/>
+          <a:p/>
+        </p:txBody>
       </p:sp>
       <p:sp>
         <p:nvSpPr>
@@ -36625,6 +39245,10 @@
             </a:solidFill>
           </a:ln>
         </p:spPr>
+        <p:txBody xmlns:a="http://schemas.openxmlformats.org/drawingml/2006/main">
+          <a:bodyPr/>
+          <a:p/>
+        </p:txBody>
       </p:sp>
       <p:sp>
         <p:nvSpPr>
@@ -36657,6 +39281,10 @@
             </a:solidFill>
           </a:ln>
         </p:spPr>
+        <p:txBody xmlns:a="http://schemas.openxmlformats.org/drawingml/2006/main">
+          <a:bodyPr/>
+          <a:p/>
+        </p:txBody>
       </p:sp>
       <p:sp>
         <p:nvSpPr>
@@ -36687,6 +39315,10 @@
             </a:solidFill>
           </a:ln>
         </p:spPr>
+        <p:txBody xmlns:a="http://schemas.openxmlformats.org/drawingml/2006/main">
+          <a:bodyPr/>
+          <a:p/>
+        </p:txBody>
       </p:sp>
       <p:sp>
         <p:nvSpPr>
@@ -36717,6 +39349,10 @@
             <a:noFill/>
           </a:ln>
         </p:spPr>
+        <p:txBody xmlns:a="http://schemas.openxmlformats.org/drawingml/2006/main">
+          <a:bodyPr/>
+          <a:p/>
+        </p:txBody>
       </p:sp>
       <p:sp>
         <p:nvSpPr>
@@ -36918,6 +39554,10 @@
             </a:solidFill>
           </a:ln>
         </p:spPr>
+        <p:txBody xmlns:a="http://schemas.openxmlformats.org/drawingml/2006/main">
+          <a:bodyPr/>
+          <a:p/>
+        </p:txBody>
       </p:sp>
       <p:sp>
         <p:nvSpPr>
@@ -36948,6 +39588,10 @@
             </a:solidFill>
           </a:ln>
         </p:spPr>
+        <p:txBody xmlns:a="http://schemas.openxmlformats.org/drawingml/2006/main">
+          <a:bodyPr/>
+          <a:p/>
+        </p:txBody>
       </p:sp>
       <p:sp>
         <p:nvSpPr>
@@ -36978,6 +39622,10 @@
             </a:solidFill>
           </a:ln>
         </p:spPr>
+        <p:txBody xmlns:a="http://schemas.openxmlformats.org/drawingml/2006/main">
+          <a:bodyPr/>
+          <a:p/>
+        </p:txBody>
       </p:sp>
       <p:sp>
         <p:nvSpPr>
@@ -37008,6 +39656,10 @@
             </a:solidFill>
           </a:ln>
         </p:spPr>
+        <p:txBody xmlns:a="http://schemas.openxmlformats.org/drawingml/2006/main">
+          <a:bodyPr/>
+          <a:p/>
+        </p:txBody>
       </p:sp>
       <p:sp>
         <p:nvSpPr>
@@ -37038,6 +39690,10 @@
             </a:solidFill>
           </a:ln>
         </p:spPr>
+        <p:txBody xmlns:a="http://schemas.openxmlformats.org/drawingml/2006/main">
+          <a:bodyPr/>
+          <a:p/>
+        </p:txBody>
       </p:sp>
       <p:sp>
         <p:nvSpPr>
@@ -37068,6 +39724,10 @@
             </a:solidFill>
           </a:ln>
         </p:spPr>
+        <p:txBody xmlns:a="http://schemas.openxmlformats.org/drawingml/2006/main">
+          <a:bodyPr/>
+          <a:p/>
+        </p:txBody>
       </p:sp>
       <p:sp>
         <p:nvSpPr>
@@ -37098,6 +39758,10 @@
             </a:solidFill>
           </a:ln>
         </p:spPr>
+        <p:txBody xmlns:a="http://schemas.openxmlformats.org/drawingml/2006/main">
+          <a:bodyPr/>
+          <a:p/>
+        </p:txBody>
       </p:sp>
       <p:sp>
         <p:nvSpPr>
@@ -37128,6 +39792,10 @@
             </a:solidFill>
           </a:ln>
         </p:spPr>
+        <p:txBody xmlns:a="http://schemas.openxmlformats.org/drawingml/2006/main">
+          <a:bodyPr/>
+          <a:p/>
+        </p:txBody>
       </p:sp>
       <p:sp>
         <p:nvSpPr>
@@ -37160,6 +39828,10 @@
             </a:solidFill>
           </a:ln>
         </p:spPr>
+        <p:txBody xmlns:a="http://schemas.openxmlformats.org/drawingml/2006/main">
+          <a:bodyPr/>
+          <a:p/>
+        </p:txBody>
       </p:sp>
       <p:sp>
         <p:nvSpPr>
@@ -37190,6 +39862,10 @@
             </a:solidFill>
           </a:ln>
         </p:spPr>
+        <p:txBody xmlns:a="http://schemas.openxmlformats.org/drawingml/2006/main">
+          <a:bodyPr/>
+          <a:p/>
+        </p:txBody>
       </p:sp>
       <p:sp>
         <p:nvSpPr>
@@ -37391,6 +40067,10 @@
             </a:solidFill>
           </a:ln>
         </p:spPr>
+        <p:txBody xmlns:a="http://schemas.openxmlformats.org/drawingml/2006/main">
+          <a:bodyPr/>
+          <a:p/>
+        </p:txBody>
       </p:sp>
       <p:sp>
         <p:nvSpPr>
@@ -37421,6 +40101,10 @@
             </a:solidFill>
           </a:ln>
         </p:spPr>
+        <p:txBody xmlns:a="http://schemas.openxmlformats.org/drawingml/2006/main">
+          <a:bodyPr/>
+          <a:p/>
+        </p:txBody>
       </p:sp>
       <p:sp>
         <p:nvSpPr>
@@ -37451,6 +40135,10 @@
             </a:solidFill>
           </a:ln>
         </p:spPr>
+        <p:txBody xmlns:a="http://schemas.openxmlformats.org/drawingml/2006/main">
+          <a:bodyPr/>
+          <a:p/>
+        </p:txBody>
       </p:sp>
       <p:sp>
         <p:nvSpPr>
@@ -37481,6 +40169,10 @@
             </a:solidFill>
           </a:ln>
         </p:spPr>
+        <p:txBody xmlns:a="http://schemas.openxmlformats.org/drawingml/2006/main">
+          <a:bodyPr/>
+          <a:p/>
+        </p:txBody>
       </p:sp>
       <p:sp>
         <p:nvSpPr>
@@ -37511,6 +40203,10 @@
             </a:solidFill>
           </a:ln>
         </p:spPr>
+        <p:txBody xmlns:a="http://schemas.openxmlformats.org/drawingml/2006/main">
+          <a:bodyPr/>
+          <a:p/>
+        </p:txBody>
       </p:sp>
       <p:sp>
         <p:nvSpPr>
@@ -37541,6 +40237,10 @@
             </a:solidFill>
           </a:ln>
         </p:spPr>
+        <p:txBody xmlns:a="http://schemas.openxmlformats.org/drawingml/2006/main">
+          <a:bodyPr/>
+          <a:p/>
+        </p:txBody>
       </p:sp>
       <p:sp>
         <p:nvSpPr>
@@ -37571,6 +40271,10 @@
             </a:solidFill>
           </a:ln>
         </p:spPr>
+        <p:txBody xmlns:a="http://schemas.openxmlformats.org/drawingml/2006/main">
+          <a:bodyPr/>
+          <a:p/>
+        </p:txBody>
       </p:sp>
       <p:sp>
         <p:nvSpPr>
@@ -37601,6 +40305,10 @@
             </a:solidFill>
           </a:ln>
         </p:spPr>
+        <p:txBody xmlns:a="http://schemas.openxmlformats.org/drawingml/2006/main">
+          <a:bodyPr/>
+          <a:p/>
+        </p:txBody>
       </p:sp>
       <p:sp>
         <p:nvSpPr>
@@ -37633,6 +40341,10 @@
             </a:solidFill>
           </a:ln>
         </p:spPr>
+        <p:txBody xmlns:a="http://schemas.openxmlformats.org/drawingml/2006/main">
+          <a:bodyPr/>
+          <a:p/>
+        </p:txBody>
       </p:sp>
       <p:sp>
         <p:nvSpPr>
@@ -37663,6 +40375,10 @@
             </a:solidFill>
           </a:ln>
         </p:spPr>
+        <p:txBody xmlns:a="http://schemas.openxmlformats.org/drawingml/2006/main">
+          <a:bodyPr/>
+          <a:p/>
+        </p:txBody>
       </p:sp>
       <p:sp>
         <p:nvSpPr>
@@ -37693,6 +40409,10 @@
             <a:noFill/>
           </a:ln>
         </p:spPr>
+        <p:txBody xmlns:a="http://schemas.openxmlformats.org/drawingml/2006/main">
+          <a:bodyPr/>
+          <a:p/>
+        </p:txBody>
       </p:sp>
       <p:sp>
         <p:nvSpPr>
@@ -37894,6 +40614,10 @@
             </a:solidFill>
           </a:ln>
         </p:spPr>
+        <p:txBody xmlns:a="http://schemas.openxmlformats.org/drawingml/2006/main">
+          <a:bodyPr/>
+          <a:p/>
+        </p:txBody>
       </p:sp>
       <p:sp>
         <p:nvSpPr>
@@ -37924,6 +40648,10 @@
             </a:solidFill>
           </a:ln>
         </p:spPr>
+        <p:txBody xmlns:a="http://schemas.openxmlformats.org/drawingml/2006/main">
+          <a:bodyPr/>
+          <a:p/>
+        </p:txBody>
       </p:sp>
       <p:sp>
         <p:nvSpPr>
@@ -37954,6 +40682,10 @@
             </a:solidFill>
           </a:ln>
         </p:spPr>
+        <p:txBody xmlns:a="http://schemas.openxmlformats.org/drawingml/2006/main">
+          <a:bodyPr/>
+          <a:p/>
+        </p:txBody>
       </p:sp>
       <p:sp>
         <p:nvSpPr>
@@ -37984,6 +40716,10 @@
             </a:solidFill>
           </a:ln>
         </p:spPr>
+        <p:txBody xmlns:a="http://schemas.openxmlformats.org/drawingml/2006/main">
+          <a:bodyPr/>
+          <a:p/>
+        </p:txBody>
       </p:sp>
       <p:sp>
         <p:nvSpPr>
@@ -38014,6 +40750,10 @@
             </a:solidFill>
           </a:ln>
         </p:spPr>
+        <p:txBody xmlns:a="http://schemas.openxmlformats.org/drawingml/2006/main">
+          <a:bodyPr/>
+          <a:p/>
+        </p:txBody>
       </p:sp>
       <p:sp>
         <p:nvSpPr>
@@ -38044,6 +40784,10 @@
             </a:solidFill>
           </a:ln>
         </p:spPr>
+        <p:txBody xmlns:a="http://schemas.openxmlformats.org/drawingml/2006/main">
+          <a:bodyPr/>
+          <a:p/>
+        </p:txBody>
       </p:sp>
       <p:sp>
         <p:nvSpPr>
@@ -38074,6 +40818,10 @@
             </a:solidFill>
           </a:ln>
         </p:spPr>
+        <p:txBody xmlns:a="http://schemas.openxmlformats.org/drawingml/2006/main">
+          <a:bodyPr/>
+          <a:p/>
+        </p:txBody>
       </p:sp>
       <p:sp>
         <p:nvSpPr>
@@ -38104,6 +40852,10 @@
             </a:solidFill>
           </a:ln>
         </p:spPr>
+        <p:txBody xmlns:a="http://schemas.openxmlformats.org/drawingml/2006/main">
+          <a:bodyPr/>
+          <a:p/>
+        </p:txBody>
       </p:sp>
       <p:sp>
         <p:nvSpPr>
@@ -38136,6 +40888,10 @@
             </a:solidFill>
           </a:ln>
         </p:spPr>
+        <p:txBody xmlns:a="http://schemas.openxmlformats.org/drawingml/2006/main">
+          <a:bodyPr/>
+          <a:p/>
+        </p:txBody>
       </p:sp>
       <p:sp>
         <p:nvSpPr>
@@ -38166,6 +40922,10 @@
             </a:solidFill>
           </a:ln>
         </p:spPr>
+        <p:txBody xmlns:a="http://schemas.openxmlformats.org/drawingml/2006/main">
+          <a:bodyPr/>
+          <a:p/>
+        </p:txBody>
       </p:sp>
       <p:sp>
         <p:nvSpPr>
@@ -38196,6 +40956,10 @@
             <a:noFill/>
           </a:ln>
         </p:spPr>
+        <p:txBody xmlns:a="http://schemas.openxmlformats.org/drawingml/2006/main">
+          <a:bodyPr/>
+          <a:p/>
+        </p:txBody>
       </p:sp>
       <p:sp>
         <p:nvSpPr>
@@ -38283,6 +41047,10 @@
             <a:noFill/>
           </a:ln>
         </p:spPr>
+        <p:txBody xmlns:a="http://schemas.openxmlformats.org/drawingml/2006/main">
+          <a:bodyPr/>
+          <a:p/>
+        </p:txBody>
       </p:sp>
       <p:sp>
         <p:nvSpPr>
@@ -38370,6 +41138,10 @@
             <a:noFill/>
           </a:ln>
         </p:spPr>
+        <p:txBody xmlns:a="http://schemas.openxmlformats.org/drawingml/2006/main">
+          <a:bodyPr/>
+          <a:p/>
+        </p:txBody>
       </p:sp>
       <p:sp>
         <p:nvSpPr>
@@ -38459,6 +41231,10 @@
             </a:solidFill>
           </a:ln>
         </p:spPr>
+        <p:txBody xmlns:a="http://schemas.openxmlformats.org/drawingml/2006/main">
+          <a:bodyPr/>
+          <a:p/>
+        </p:txBody>
       </p:sp>
       <p:sp>
         <p:nvSpPr>
@@ -38546,6 +41322,10 @@
             <a:noFill/>
           </a:ln>
         </p:spPr>
+        <p:txBody xmlns:a="http://schemas.openxmlformats.org/drawingml/2006/main">
+          <a:bodyPr/>
+          <a:p/>
+        </p:txBody>
       </p:sp>
       <p:sp>
         <p:nvSpPr>
@@ -38656,7 +41436,7 @@
                 <a:ea typeface="Arial"/>
                 <a:cs typeface="Arial"/>
               </a:rPr>
-              <a:t>As of Sep 26, 2026</a:t>
+              <a:t>As of Sep 29, 2026</a:t>
             </a:r>
           </a:p>
         </p:txBody>
@@ -38770,7 +41550,7 @@
                 <a:ea typeface="Arial"/>
                 <a:cs typeface="Arial"/>
               </a:rPr>
-              <a:t>AI assistance: OpenAI Codex helped organize this plan. Dates and task descriptions were checked against course materials and project notes.</a:t>
+              <a:t>AI assistance: OpenAI Codex helped organize this plan; Claude assisted with the DNA-scope revision. Dates and task descriptions were checked against course materials and project notes.</a:t>
             </a:r>
           </a:p>
         </p:txBody>

--- a/docs/Research_Project_Plan_Gantt.pptx
+++ b/docs/Research_Project_Plan_Gantt.pptx
@@ -6428,7 +6428,7 @@
                 <a:ea typeface="Arial"/>
                 <a:cs typeface="Arial"/>
               </a:rPr>
-              <a:t>Multimodal Biology | Research Project Plan</a:t>
+              <a:t>multimodal-bio-fusion | Research Project Plan</a:t>
             </a:r>
           </a:p>
         </p:txBody>
